--- a/outils/affiches/affiches-kiosques-sombre.pptx
+++ b/outils/affiches/affiches-kiosques-sombre.pptx
@@ -3119,20 +3119,6 @@
           </a:ln>
           <a:effectLst/>
         </p:spPr>
-        <p:style>
-          <a:lnRef idx="1">
-            <a:schemeClr val="accent1"/>
-          </a:lnRef>
-          <a:fillRef idx="3">
-            <a:schemeClr val="accent1"/>
-          </a:fillRef>
-          <a:effectRef idx="2">
-            <a:schemeClr val="accent1"/>
-          </a:effectRef>
-          <a:fontRef idx="minor">
-            <a:schemeClr val="lt1"/>
-          </a:fontRef>
-        </p:style>
         <p:txBody>
           <a:bodyPr rtlCol="0" anchor="ctr"/>
           <a:lstStyle/>
@@ -3163,20 +3149,6 @@
           </a:ln>
           <a:effectLst/>
         </p:spPr>
-        <p:style>
-          <a:lnRef idx="1">
-            <a:schemeClr val="accent1"/>
-          </a:lnRef>
-          <a:fillRef idx="3">
-            <a:schemeClr val="accent1"/>
-          </a:fillRef>
-          <a:effectRef idx="2">
-            <a:schemeClr val="accent1"/>
-          </a:effectRef>
-          <a:fontRef idx="minor">
-            <a:schemeClr val="lt1"/>
-          </a:fontRef>
-        </p:style>
         <p:txBody>
           <a:bodyPr rtlCol="0" anchor="ctr"/>
           <a:lstStyle/>
@@ -3301,20 +3273,6 @@
           </a:ln>
           <a:effectLst/>
         </p:spPr>
-        <p:style>
-          <a:lnRef idx="1">
-            <a:schemeClr val="accent1"/>
-          </a:lnRef>
-          <a:fillRef idx="3">
-            <a:schemeClr val="accent1"/>
-          </a:fillRef>
-          <a:effectRef idx="2">
-            <a:schemeClr val="accent1"/>
-          </a:effectRef>
-          <a:fontRef idx="minor">
-            <a:schemeClr val="lt1"/>
-          </a:fontRef>
-        </p:style>
         <p:txBody>
           <a:bodyPr rtlCol="0" anchor="ctr"/>
           <a:lstStyle/>
@@ -3540,20 +3498,6 @@
           </a:ln>
           <a:effectLst/>
         </p:spPr>
-        <p:style>
-          <a:lnRef idx="1">
-            <a:schemeClr val="accent1"/>
-          </a:lnRef>
-          <a:fillRef idx="3">
-            <a:schemeClr val="accent1"/>
-          </a:fillRef>
-          <a:effectRef idx="2">
-            <a:schemeClr val="accent1"/>
-          </a:effectRef>
-          <a:fontRef idx="minor">
-            <a:schemeClr val="lt1"/>
-          </a:fontRef>
-        </p:style>
         <p:txBody>
           <a:bodyPr rtlCol="0" anchor="ctr"/>
           <a:lstStyle/>
@@ -3655,20 +3599,6 @@
           </a:ln>
           <a:effectLst/>
         </p:spPr>
-        <p:style>
-          <a:lnRef idx="1">
-            <a:schemeClr val="accent1"/>
-          </a:lnRef>
-          <a:fillRef idx="3">
-            <a:schemeClr val="accent1"/>
-          </a:fillRef>
-          <a:effectRef idx="2">
-            <a:schemeClr val="accent1"/>
-          </a:effectRef>
-          <a:fontRef idx="minor">
-            <a:schemeClr val="lt1"/>
-          </a:fontRef>
-        </p:style>
         <p:txBody>
           <a:bodyPr rtlCol="0" anchor="ctr"/>
           <a:lstStyle/>
@@ -3770,20 +3700,6 @@
           </a:ln>
           <a:effectLst/>
         </p:spPr>
-        <p:style>
-          <a:lnRef idx="1">
-            <a:schemeClr val="accent1"/>
-          </a:lnRef>
-          <a:fillRef idx="3">
-            <a:schemeClr val="accent1"/>
-          </a:fillRef>
-          <a:effectRef idx="2">
-            <a:schemeClr val="accent1"/>
-          </a:effectRef>
-          <a:fontRef idx="minor">
-            <a:schemeClr val="lt1"/>
-          </a:fontRef>
-        </p:style>
         <p:txBody>
           <a:bodyPr rtlCol="0" anchor="ctr"/>
           <a:lstStyle/>
@@ -3885,20 +3801,6 @@
           </a:ln>
           <a:effectLst/>
         </p:spPr>
-        <p:style>
-          <a:lnRef idx="1">
-            <a:schemeClr val="accent1"/>
-          </a:lnRef>
-          <a:fillRef idx="3">
-            <a:schemeClr val="accent1"/>
-          </a:fillRef>
-          <a:effectRef idx="2">
-            <a:schemeClr val="accent1"/>
-          </a:effectRef>
-          <a:fontRef idx="minor">
-            <a:schemeClr val="lt1"/>
-          </a:fontRef>
-        </p:style>
         <p:txBody>
           <a:bodyPr rtlCol="0" anchor="ctr"/>
           <a:lstStyle/>
@@ -4000,20 +3902,6 @@
           </a:ln>
           <a:effectLst/>
         </p:spPr>
-        <p:style>
-          <a:lnRef idx="1">
-            <a:schemeClr val="accent1"/>
-          </a:lnRef>
-          <a:fillRef idx="3">
-            <a:schemeClr val="accent1"/>
-          </a:fillRef>
-          <a:effectRef idx="2">
-            <a:schemeClr val="accent1"/>
-          </a:effectRef>
-          <a:fontRef idx="minor">
-            <a:schemeClr val="lt1"/>
-          </a:fontRef>
-        </p:style>
         <p:txBody>
           <a:bodyPr rtlCol="0" anchor="ctr"/>
           <a:lstStyle/>
@@ -4115,20 +4003,6 @@
           </a:ln>
           <a:effectLst/>
         </p:spPr>
-        <p:style>
-          <a:lnRef idx="1">
-            <a:schemeClr val="accent1"/>
-          </a:lnRef>
-          <a:fillRef idx="3">
-            <a:schemeClr val="accent1"/>
-          </a:fillRef>
-          <a:effectRef idx="2">
-            <a:schemeClr val="accent1"/>
-          </a:effectRef>
-          <a:fontRef idx="minor">
-            <a:schemeClr val="lt1"/>
-          </a:fontRef>
-        </p:style>
         <p:txBody>
           <a:bodyPr rtlCol="0" anchor="ctr"/>
           <a:lstStyle/>
@@ -4159,20 +4033,6 @@
           </a:ln>
           <a:effectLst/>
         </p:spPr>
-        <p:style>
-          <a:lnRef idx="1">
-            <a:schemeClr val="accent1"/>
-          </a:lnRef>
-          <a:fillRef idx="3">
-            <a:schemeClr val="accent1"/>
-          </a:fillRef>
-          <a:effectRef idx="2">
-            <a:schemeClr val="accent1"/>
-          </a:effectRef>
-          <a:fontRef idx="minor">
-            <a:schemeClr val="lt1"/>
-          </a:fontRef>
-        </p:style>
         <p:txBody>
           <a:bodyPr rtlCol="0" anchor="ctr"/>
           <a:lstStyle/>
@@ -4316,20 +4176,6 @@
           </a:ln>
           <a:effectLst/>
         </p:spPr>
-        <p:style>
-          <a:lnRef idx="1">
-            <a:schemeClr val="accent1"/>
-          </a:lnRef>
-          <a:fillRef idx="3">
-            <a:schemeClr val="accent1"/>
-          </a:fillRef>
-          <a:effectRef idx="2">
-            <a:schemeClr val="accent1"/>
-          </a:effectRef>
-          <a:fontRef idx="minor">
-            <a:schemeClr val="lt1"/>
-          </a:fontRef>
-        </p:style>
         <p:txBody>
           <a:bodyPr rtlCol="0" anchor="ctr"/>
           <a:lstStyle/>
@@ -4360,20 +4206,6 @@
           </a:ln>
           <a:effectLst/>
         </p:spPr>
-        <p:style>
-          <a:lnRef idx="1">
-            <a:schemeClr val="accent1"/>
-          </a:lnRef>
-          <a:fillRef idx="3">
-            <a:schemeClr val="accent1"/>
-          </a:fillRef>
-          <a:effectRef idx="2">
-            <a:schemeClr val="accent1"/>
-          </a:effectRef>
-          <a:fontRef idx="minor">
-            <a:schemeClr val="lt1"/>
-          </a:fontRef>
-        </p:style>
         <p:txBody>
           <a:bodyPr rtlCol="0" anchor="ctr"/>
           <a:lstStyle/>
@@ -4498,20 +4330,6 @@
           </a:ln>
           <a:effectLst/>
         </p:spPr>
-        <p:style>
-          <a:lnRef idx="1">
-            <a:schemeClr val="accent1"/>
-          </a:lnRef>
-          <a:fillRef idx="3">
-            <a:schemeClr val="accent1"/>
-          </a:fillRef>
-          <a:effectRef idx="2">
-            <a:schemeClr val="accent1"/>
-          </a:effectRef>
-          <a:fontRef idx="minor">
-            <a:schemeClr val="lt1"/>
-          </a:fontRef>
-        </p:style>
         <p:txBody>
           <a:bodyPr rtlCol="0" anchor="ctr"/>
           <a:lstStyle/>
@@ -4737,20 +4555,6 @@
           </a:ln>
           <a:effectLst/>
         </p:spPr>
-        <p:style>
-          <a:lnRef idx="1">
-            <a:schemeClr val="accent1"/>
-          </a:lnRef>
-          <a:fillRef idx="3">
-            <a:schemeClr val="accent1"/>
-          </a:fillRef>
-          <a:effectRef idx="2">
-            <a:schemeClr val="accent1"/>
-          </a:effectRef>
-          <a:fontRef idx="minor">
-            <a:schemeClr val="lt1"/>
-          </a:fontRef>
-        </p:style>
         <p:txBody>
           <a:bodyPr rtlCol="0" anchor="ctr"/>
           <a:lstStyle/>
@@ -4852,20 +4656,6 @@
           </a:ln>
           <a:effectLst/>
         </p:spPr>
-        <p:style>
-          <a:lnRef idx="1">
-            <a:schemeClr val="accent1"/>
-          </a:lnRef>
-          <a:fillRef idx="3">
-            <a:schemeClr val="accent1"/>
-          </a:fillRef>
-          <a:effectRef idx="2">
-            <a:schemeClr val="accent1"/>
-          </a:effectRef>
-          <a:fontRef idx="minor">
-            <a:schemeClr val="lt1"/>
-          </a:fontRef>
-        </p:style>
         <p:txBody>
           <a:bodyPr rtlCol="0" anchor="ctr"/>
           <a:lstStyle/>
@@ -4967,20 +4757,6 @@
           </a:ln>
           <a:effectLst/>
         </p:spPr>
-        <p:style>
-          <a:lnRef idx="1">
-            <a:schemeClr val="accent1"/>
-          </a:lnRef>
-          <a:fillRef idx="3">
-            <a:schemeClr val="accent1"/>
-          </a:fillRef>
-          <a:effectRef idx="2">
-            <a:schemeClr val="accent1"/>
-          </a:effectRef>
-          <a:fontRef idx="minor">
-            <a:schemeClr val="lt1"/>
-          </a:fontRef>
-        </p:style>
         <p:txBody>
           <a:bodyPr rtlCol="0" anchor="ctr"/>
           <a:lstStyle/>
@@ -5082,20 +4858,6 @@
           </a:ln>
           <a:effectLst/>
         </p:spPr>
-        <p:style>
-          <a:lnRef idx="1">
-            <a:schemeClr val="accent1"/>
-          </a:lnRef>
-          <a:fillRef idx="3">
-            <a:schemeClr val="accent1"/>
-          </a:fillRef>
-          <a:effectRef idx="2">
-            <a:schemeClr val="accent1"/>
-          </a:effectRef>
-          <a:fontRef idx="minor">
-            <a:schemeClr val="lt1"/>
-          </a:fontRef>
-        </p:style>
         <p:txBody>
           <a:bodyPr rtlCol="0" anchor="ctr"/>
           <a:lstStyle/>
@@ -5197,20 +4959,6 @@
           </a:ln>
           <a:effectLst/>
         </p:spPr>
-        <p:style>
-          <a:lnRef idx="1">
-            <a:schemeClr val="accent1"/>
-          </a:lnRef>
-          <a:fillRef idx="3">
-            <a:schemeClr val="accent1"/>
-          </a:fillRef>
-          <a:effectRef idx="2">
-            <a:schemeClr val="accent1"/>
-          </a:effectRef>
-          <a:fontRef idx="minor">
-            <a:schemeClr val="lt1"/>
-          </a:fontRef>
-        </p:style>
         <p:txBody>
           <a:bodyPr rtlCol="0" anchor="ctr"/>
           <a:lstStyle/>
@@ -5312,20 +5060,6 @@
           </a:ln>
           <a:effectLst/>
         </p:spPr>
-        <p:style>
-          <a:lnRef idx="1">
-            <a:schemeClr val="accent1"/>
-          </a:lnRef>
-          <a:fillRef idx="3">
-            <a:schemeClr val="accent1"/>
-          </a:fillRef>
-          <a:effectRef idx="2">
-            <a:schemeClr val="accent1"/>
-          </a:effectRef>
-          <a:fontRef idx="minor">
-            <a:schemeClr val="lt1"/>
-          </a:fontRef>
-        </p:style>
         <p:txBody>
           <a:bodyPr rtlCol="0" anchor="ctr"/>
           <a:lstStyle/>
@@ -5356,20 +5090,6 @@
           </a:ln>
           <a:effectLst/>
         </p:spPr>
-        <p:style>
-          <a:lnRef idx="1">
-            <a:schemeClr val="accent1"/>
-          </a:lnRef>
-          <a:fillRef idx="3">
-            <a:schemeClr val="accent1"/>
-          </a:fillRef>
-          <a:effectRef idx="2">
-            <a:schemeClr val="accent1"/>
-          </a:effectRef>
-          <a:fontRef idx="minor">
-            <a:schemeClr val="lt1"/>
-          </a:fontRef>
-        </p:style>
         <p:txBody>
           <a:bodyPr rtlCol="0" anchor="ctr"/>
           <a:lstStyle/>
@@ -5513,20 +5233,6 @@
           </a:ln>
           <a:effectLst/>
         </p:spPr>
-        <p:style>
-          <a:lnRef idx="1">
-            <a:schemeClr val="accent1"/>
-          </a:lnRef>
-          <a:fillRef idx="3">
-            <a:schemeClr val="accent1"/>
-          </a:fillRef>
-          <a:effectRef idx="2">
-            <a:schemeClr val="accent1"/>
-          </a:effectRef>
-          <a:fontRef idx="minor">
-            <a:schemeClr val="lt1"/>
-          </a:fontRef>
-        </p:style>
         <p:txBody>
           <a:bodyPr rtlCol="0" anchor="ctr"/>
           <a:lstStyle/>
@@ -5557,20 +5263,6 @@
           </a:ln>
           <a:effectLst/>
         </p:spPr>
-        <p:style>
-          <a:lnRef idx="1">
-            <a:schemeClr val="accent1"/>
-          </a:lnRef>
-          <a:fillRef idx="3">
-            <a:schemeClr val="accent1"/>
-          </a:fillRef>
-          <a:effectRef idx="2">
-            <a:schemeClr val="accent1"/>
-          </a:effectRef>
-          <a:fontRef idx="minor">
-            <a:schemeClr val="lt1"/>
-          </a:fontRef>
-        </p:style>
         <p:txBody>
           <a:bodyPr rtlCol="0" anchor="ctr"/>
           <a:lstStyle/>
@@ -5695,20 +5387,6 @@
           </a:ln>
           <a:effectLst/>
         </p:spPr>
-        <p:style>
-          <a:lnRef idx="1">
-            <a:schemeClr val="accent1"/>
-          </a:lnRef>
-          <a:fillRef idx="3">
-            <a:schemeClr val="accent1"/>
-          </a:fillRef>
-          <a:effectRef idx="2">
-            <a:schemeClr val="accent1"/>
-          </a:effectRef>
-          <a:fontRef idx="minor">
-            <a:schemeClr val="lt1"/>
-          </a:fontRef>
-        </p:style>
         <p:txBody>
           <a:bodyPr rtlCol="0" anchor="ctr"/>
           <a:lstStyle/>
@@ -5934,20 +5612,6 @@
           </a:ln>
           <a:effectLst/>
         </p:spPr>
-        <p:style>
-          <a:lnRef idx="1">
-            <a:schemeClr val="accent1"/>
-          </a:lnRef>
-          <a:fillRef idx="3">
-            <a:schemeClr val="accent1"/>
-          </a:fillRef>
-          <a:effectRef idx="2">
-            <a:schemeClr val="accent1"/>
-          </a:effectRef>
-          <a:fontRef idx="minor">
-            <a:schemeClr val="lt1"/>
-          </a:fontRef>
-        </p:style>
         <p:txBody>
           <a:bodyPr rtlCol="0" anchor="ctr"/>
           <a:lstStyle/>
@@ -6049,20 +5713,6 @@
           </a:ln>
           <a:effectLst/>
         </p:spPr>
-        <p:style>
-          <a:lnRef idx="1">
-            <a:schemeClr val="accent1"/>
-          </a:lnRef>
-          <a:fillRef idx="3">
-            <a:schemeClr val="accent1"/>
-          </a:fillRef>
-          <a:effectRef idx="2">
-            <a:schemeClr val="accent1"/>
-          </a:effectRef>
-          <a:fontRef idx="minor">
-            <a:schemeClr val="lt1"/>
-          </a:fontRef>
-        </p:style>
         <p:txBody>
           <a:bodyPr rtlCol="0" anchor="ctr"/>
           <a:lstStyle/>
@@ -6164,20 +5814,6 @@
           </a:ln>
           <a:effectLst/>
         </p:spPr>
-        <p:style>
-          <a:lnRef idx="1">
-            <a:schemeClr val="accent1"/>
-          </a:lnRef>
-          <a:fillRef idx="3">
-            <a:schemeClr val="accent1"/>
-          </a:fillRef>
-          <a:effectRef idx="2">
-            <a:schemeClr val="accent1"/>
-          </a:effectRef>
-          <a:fontRef idx="minor">
-            <a:schemeClr val="lt1"/>
-          </a:fontRef>
-        </p:style>
         <p:txBody>
           <a:bodyPr rtlCol="0" anchor="ctr"/>
           <a:lstStyle/>
@@ -6279,20 +5915,6 @@
           </a:ln>
           <a:effectLst/>
         </p:spPr>
-        <p:style>
-          <a:lnRef idx="1">
-            <a:schemeClr val="accent1"/>
-          </a:lnRef>
-          <a:fillRef idx="3">
-            <a:schemeClr val="accent1"/>
-          </a:fillRef>
-          <a:effectRef idx="2">
-            <a:schemeClr val="accent1"/>
-          </a:effectRef>
-          <a:fontRef idx="minor">
-            <a:schemeClr val="lt1"/>
-          </a:fontRef>
-        </p:style>
         <p:txBody>
           <a:bodyPr rtlCol="0" anchor="ctr"/>
           <a:lstStyle/>
@@ -6394,20 +6016,6 @@
           </a:ln>
           <a:effectLst/>
         </p:spPr>
-        <p:style>
-          <a:lnRef idx="1">
-            <a:schemeClr val="accent1"/>
-          </a:lnRef>
-          <a:fillRef idx="3">
-            <a:schemeClr val="accent1"/>
-          </a:fillRef>
-          <a:effectRef idx="2">
-            <a:schemeClr val="accent1"/>
-          </a:effectRef>
-          <a:fontRef idx="minor">
-            <a:schemeClr val="lt1"/>
-          </a:fontRef>
-        </p:style>
         <p:txBody>
           <a:bodyPr rtlCol="0" anchor="ctr"/>
           <a:lstStyle/>
@@ -6509,20 +6117,6 @@
           </a:ln>
           <a:effectLst/>
         </p:spPr>
-        <p:style>
-          <a:lnRef idx="1">
-            <a:schemeClr val="accent1"/>
-          </a:lnRef>
-          <a:fillRef idx="3">
-            <a:schemeClr val="accent1"/>
-          </a:fillRef>
-          <a:effectRef idx="2">
-            <a:schemeClr val="accent1"/>
-          </a:effectRef>
-          <a:fontRef idx="minor">
-            <a:schemeClr val="lt1"/>
-          </a:fontRef>
-        </p:style>
         <p:txBody>
           <a:bodyPr rtlCol="0" anchor="ctr"/>
           <a:lstStyle/>
@@ -6553,20 +6147,6 @@
           </a:ln>
           <a:effectLst/>
         </p:spPr>
-        <p:style>
-          <a:lnRef idx="1">
-            <a:schemeClr val="accent1"/>
-          </a:lnRef>
-          <a:fillRef idx="3">
-            <a:schemeClr val="accent1"/>
-          </a:fillRef>
-          <a:effectRef idx="2">
-            <a:schemeClr val="accent1"/>
-          </a:effectRef>
-          <a:fontRef idx="minor">
-            <a:schemeClr val="lt1"/>
-          </a:fontRef>
-        </p:style>
         <p:txBody>
           <a:bodyPr rtlCol="0" anchor="ctr"/>
           <a:lstStyle/>
@@ -6710,20 +6290,6 @@
           </a:ln>
           <a:effectLst/>
         </p:spPr>
-        <p:style>
-          <a:lnRef idx="1">
-            <a:schemeClr val="accent1"/>
-          </a:lnRef>
-          <a:fillRef idx="3">
-            <a:schemeClr val="accent1"/>
-          </a:fillRef>
-          <a:effectRef idx="2">
-            <a:schemeClr val="accent1"/>
-          </a:effectRef>
-          <a:fontRef idx="minor">
-            <a:schemeClr val="lt1"/>
-          </a:fontRef>
-        </p:style>
         <p:txBody>
           <a:bodyPr rtlCol="0" anchor="ctr"/>
           <a:lstStyle/>
@@ -6754,20 +6320,6 @@
           </a:ln>
           <a:effectLst/>
         </p:spPr>
-        <p:style>
-          <a:lnRef idx="1">
-            <a:schemeClr val="accent1"/>
-          </a:lnRef>
-          <a:fillRef idx="3">
-            <a:schemeClr val="accent1"/>
-          </a:fillRef>
-          <a:effectRef idx="2">
-            <a:schemeClr val="accent1"/>
-          </a:effectRef>
-          <a:fontRef idx="minor">
-            <a:schemeClr val="lt1"/>
-          </a:fontRef>
-        </p:style>
         <p:txBody>
           <a:bodyPr rtlCol="0" anchor="ctr"/>
           <a:lstStyle/>
@@ -6892,20 +6444,6 @@
           </a:ln>
           <a:effectLst/>
         </p:spPr>
-        <p:style>
-          <a:lnRef idx="1">
-            <a:schemeClr val="accent1"/>
-          </a:lnRef>
-          <a:fillRef idx="3">
-            <a:schemeClr val="accent1"/>
-          </a:fillRef>
-          <a:effectRef idx="2">
-            <a:schemeClr val="accent1"/>
-          </a:effectRef>
-          <a:fontRef idx="minor">
-            <a:schemeClr val="lt1"/>
-          </a:fontRef>
-        </p:style>
         <p:txBody>
           <a:bodyPr rtlCol="0" anchor="ctr"/>
           <a:lstStyle/>
@@ -7131,20 +6669,6 @@
           </a:ln>
           <a:effectLst/>
         </p:spPr>
-        <p:style>
-          <a:lnRef idx="1">
-            <a:schemeClr val="accent1"/>
-          </a:lnRef>
-          <a:fillRef idx="3">
-            <a:schemeClr val="accent1"/>
-          </a:fillRef>
-          <a:effectRef idx="2">
-            <a:schemeClr val="accent1"/>
-          </a:effectRef>
-          <a:fontRef idx="minor">
-            <a:schemeClr val="lt1"/>
-          </a:fontRef>
-        </p:style>
         <p:txBody>
           <a:bodyPr rtlCol="0" anchor="ctr"/>
           <a:lstStyle/>
@@ -7246,20 +6770,6 @@
           </a:ln>
           <a:effectLst/>
         </p:spPr>
-        <p:style>
-          <a:lnRef idx="1">
-            <a:schemeClr val="accent1"/>
-          </a:lnRef>
-          <a:fillRef idx="3">
-            <a:schemeClr val="accent1"/>
-          </a:fillRef>
-          <a:effectRef idx="2">
-            <a:schemeClr val="accent1"/>
-          </a:effectRef>
-          <a:fontRef idx="minor">
-            <a:schemeClr val="lt1"/>
-          </a:fontRef>
-        </p:style>
         <p:txBody>
           <a:bodyPr rtlCol="0" anchor="ctr"/>
           <a:lstStyle/>
@@ -7361,20 +6871,6 @@
           </a:ln>
           <a:effectLst/>
         </p:spPr>
-        <p:style>
-          <a:lnRef idx="1">
-            <a:schemeClr val="accent1"/>
-          </a:lnRef>
-          <a:fillRef idx="3">
-            <a:schemeClr val="accent1"/>
-          </a:fillRef>
-          <a:effectRef idx="2">
-            <a:schemeClr val="accent1"/>
-          </a:effectRef>
-          <a:fontRef idx="minor">
-            <a:schemeClr val="lt1"/>
-          </a:fontRef>
-        </p:style>
         <p:txBody>
           <a:bodyPr rtlCol="0" anchor="ctr"/>
           <a:lstStyle/>
@@ -7476,20 +6972,6 @@
           </a:ln>
           <a:effectLst/>
         </p:spPr>
-        <p:style>
-          <a:lnRef idx="1">
-            <a:schemeClr val="accent1"/>
-          </a:lnRef>
-          <a:fillRef idx="3">
-            <a:schemeClr val="accent1"/>
-          </a:fillRef>
-          <a:effectRef idx="2">
-            <a:schemeClr val="accent1"/>
-          </a:effectRef>
-          <a:fontRef idx="minor">
-            <a:schemeClr val="lt1"/>
-          </a:fontRef>
-        </p:style>
         <p:txBody>
           <a:bodyPr rtlCol="0" anchor="ctr"/>
           <a:lstStyle/>
@@ -7591,20 +7073,6 @@
           </a:ln>
           <a:effectLst/>
         </p:spPr>
-        <p:style>
-          <a:lnRef idx="1">
-            <a:schemeClr val="accent1"/>
-          </a:lnRef>
-          <a:fillRef idx="3">
-            <a:schemeClr val="accent1"/>
-          </a:fillRef>
-          <a:effectRef idx="2">
-            <a:schemeClr val="accent1"/>
-          </a:effectRef>
-          <a:fontRef idx="minor">
-            <a:schemeClr val="lt1"/>
-          </a:fontRef>
-        </p:style>
         <p:txBody>
           <a:bodyPr rtlCol="0" anchor="ctr"/>
           <a:lstStyle/>
@@ -7706,20 +7174,6 @@
           </a:ln>
           <a:effectLst/>
         </p:spPr>
-        <p:style>
-          <a:lnRef idx="1">
-            <a:schemeClr val="accent1"/>
-          </a:lnRef>
-          <a:fillRef idx="3">
-            <a:schemeClr val="accent1"/>
-          </a:fillRef>
-          <a:effectRef idx="2">
-            <a:schemeClr val="accent1"/>
-          </a:effectRef>
-          <a:fontRef idx="minor">
-            <a:schemeClr val="lt1"/>
-          </a:fontRef>
-        </p:style>
         <p:txBody>
           <a:bodyPr rtlCol="0" anchor="ctr"/>
           <a:lstStyle/>
@@ -7750,20 +7204,6 @@
           </a:ln>
           <a:effectLst/>
         </p:spPr>
-        <p:style>
-          <a:lnRef idx="1">
-            <a:schemeClr val="accent1"/>
-          </a:lnRef>
-          <a:fillRef idx="3">
-            <a:schemeClr val="accent1"/>
-          </a:fillRef>
-          <a:effectRef idx="2">
-            <a:schemeClr val="accent1"/>
-          </a:effectRef>
-          <a:fontRef idx="minor">
-            <a:schemeClr val="lt1"/>
-          </a:fontRef>
-        </p:style>
         <p:txBody>
           <a:bodyPr rtlCol="0" anchor="ctr"/>
           <a:lstStyle/>
@@ -7907,20 +7347,6 @@
           </a:ln>
           <a:effectLst/>
         </p:spPr>
-        <p:style>
-          <a:lnRef idx="1">
-            <a:schemeClr val="accent1"/>
-          </a:lnRef>
-          <a:fillRef idx="3">
-            <a:schemeClr val="accent1"/>
-          </a:fillRef>
-          <a:effectRef idx="2">
-            <a:schemeClr val="accent1"/>
-          </a:effectRef>
-          <a:fontRef idx="minor">
-            <a:schemeClr val="lt1"/>
-          </a:fontRef>
-        </p:style>
         <p:txBody>
           <a:bodyPr rtlCol="0" anchor="ctr"/>
           <a:lstStyle/>
@@ -7951,20 +7377,6 @@
           </a:ln>
           <a:effectLst/>
         </p:spPr>
-        <p:style>
-          <a:lnRef idx="1">
-            <a:schemeClr val="accent1"/>
-          </a:lnRef>
-          <a:fillRef idx="3">
-            <a:schemeClr val="accent1"/>
-          </a:fillRef>
-          <a:effectRef idx="2">
-            <a:schemeClr val="accent1"/>
-          </a:effectRef>
-          <a:fontRef idx="minor">
-            <a:schemeClr val="lt1"/>
-          </a:fontRef>
-        </p:style>
         <p:txBody>
           <a:bodyPr rtlCol="0" anchor="ctr"/>
           <a:lstStyle/>
@@ -8089,20 +7501,6 @@
           </a:ln>
           <a:effectLst/>
         </p:spPr>
-        <p:style>
-          <a:lnRef idx="1">
-            <a:schemeClr val="accent1"/>
-          </a:lnRef>
-          <a:fillRef idx="3">
-            <a:schemeClr val="accent1"/>
-          </a:fillRef>
-          <a:effectRef idx="2">
-            <a:schemeClr val="accent1"/>
-          </a:effectRef>
-          <a:fontRef idx="minor">
-            <a:schemeClr val="lt1"/>
-          </a:fontRef>
-        </p:style>
         <p:txBody>
           <a:bodyPr rtlCol="0" anchor="ctr"/>
           <a:lstStyle/>
@@ -8328,20 +7726,6 @@
           </a:ln>
           <a:effectLst/>
         </p:spPr>
-        <p:style>
-          <a:lnRef idx="1">
-            <a:schemeClr val="accent1"/>
-          </a:lnRef>
-          <a:fillRef idx="3">
-            <a:schemeClr val="accent1"/>
-          </a:fillRef>
-          <a:effectRef idx="2">
-            <a:schemeClr val="accent1"/>
-          </a:effectRef>
-          <a:fontRef idx="minor">
-            <a:schemeClr val="lt1"/>
-          </a:fontRef>
-        </p:style>
         <p:txBody>
           <a:bodyPr rtlCol="0" anchor="ctr"/>
           <a:lstStyle/>
@@ -8443,20 +7827,6 @@
           </a:ln>
           <a:effectLst/>
         </p:spPr>
-        <p:style>
-          <a:lnRef idx="1">
-            <a:schemeClr val="accent1"/>
-          </a:lnRef>
-          <a:fillRef idx="3">
-            <a:schemeClr val="accent1"/>
-          </a:fillRef>
-          <a:effectRef idx="2">
-            <a:schemeClr val="accent1"/>
-          </a:effectRef>
-          <a:fontRef idx="minor">
-            <a:schemeClr val="lt1"/>
-          </a:fontRef>
-        </p:style>
         <p:txBody>
           <a:bodyPr rtlCol="0" anchor="ctr"/>
           <a:lstStyle/>
@@ -8558,20 +7928,6 @@
           </a:ln>
           <a:effectLst/>
         </p:spPr>
-        <p:style>
-          <a:lnRef idx="1">
-            <a:schemeClr val="accent1"/>
-          </a:lnRef>
-          <a:fillRef idx="3">
-            <a:schemeClr val="accent1"/>
-          </a:fillRef>
-          <a:effectRef idx="2">
-            <a:schemeClr val="accent1"/>
-          </a:effectRef>
-          <a:fontRef idx="minor">
-            <a:schemeClr val="lt1"/>
-          </a:fontRef>
-        </p:style>
         <p:txBody>
           <a:bodyPr rtlCol="0" anchor="ctr"/>
           <a:lstStyle/>
@@ -8673,20 +8029,6 @@
           </a:ln>
           <a:effectLst/>
         </p:spPr>
-        <p:style>
-          <a:lnRef idx="1">
-            <a:schemeClr val="accent1"/>
-          </a:lnRef>
-          <a:fillRef idx="3">
-            <a:schemeClr val="accent1"/>
-          </a:fillRef>
-          <a:effectRef idx="2">
-            <a:schemeClr val="accent1"/>
-          </a:effectRef>
-          <a:fontRef idx="minor">
-            <a:schemeClr val="lt1"/>
-          </a:fontRef>
-        </p:style>
         <p:txBody>
           <a:bodyPr rtlCol="0" anchor="ctr"/>
           <a:lstStyle/>
@@ -8788,20 +8130,6 @@
           </a:ln>
           <a:effectLst/>
         </p:spPr>
-        <p:style>
-          <a:lnRef idx="1">
-            <a:schemeClr val="accent1"/>
-          </a:lnRef>
-          <a:fillRef idx="3">
-            <a:schemeClr val="accent1"/>
-          </a:fillRef>
-          <a:effectRef idx="2">
-            <a:schemeClr val="accent1"/>
-          </a:effectRef>
-          <a:fontRef idx="minor">
-            <a:schemeClr val="lt1"/>
-          </a:fontRef>
-        </p:style>
         <p:txBody>
           <a:bodyPr rtlCol="0" anchor="ctr"/>
           <a:lstStyle/>
@@ -8903,20 +8231,6 @@
           </a:ln>
           <a:effectLst/>
         </p:spPr>
-        <p:style>
-          <a:lnRef idx="1">
-            <a:schemeClr val="accent1"/>
-          </a:lnRef>
-          <a:fillRef idx="3">
-            <a:schemeClr val="accent1"/>
-          </a:fillRef>
-          <a:effectRef idx="2">
-            <a:schemeClr val="accent1"/>
-          </a:effectRef>
-          <a:fontRef idx="minor">
-            <a:schemeClr val="lt1"/>
-          </a:fontRef>
-        </p:style>
         <p:txBody>
           <a:bodyPr rtlCol="0" anchor="ctr"/>
           <a:lstStyle/>
@@ -8947,20 +8261,6 @@
           </a:ln>
           <a:effectLst/>
         </p:spPr>
-        <p:style>
-          <a:lnRef idx="1">
-            <a:schemeClr val="accent1"/>
-          </a:lnRef>
-          <a:fillRef idx="3">
-            <a:schemeClr val="accent1"/>
-          </a:fillRef>
-          <a:effectRef idx="2">
-            <a:schemeClr val="accent1"/>
-          </a:effectRef>
-          <a:fontRef idx="minor">
-            <a:schemeClr val="lt1"/>
-          </a:fontRef>
-        </p:style>
         <p:txBody>
           <a:bodyPr rtlCol="0" anchor="ctr"/>
           <a:lstStyle/>
@@ -9104,20 +8404,6 @@
           </a:ln>
           <a:effectLst/>
         </p:spPr>
-        <p:style>
-          <a:lnRef idx="1">
-            <a:schemeClr val="accent1"/>
-          </a:lnRef>
-          <a:fillRef idx="3">
-            <a:schemeClr val="accent1"/>
-          </a:fillRef>
-          <a:effectRef idx="2">
-            <a:schemeClr val="accent1"/>
-          </a:effectRef>
-          <a:fontRef idx="minor">
-            <a:schemeClr val="lt1"/>
-          </a:fontRef>
-        </p:style>
         <p:txBody>
           <a:bodyPr rtlCol="0" anchor="ctr"/>
           <a:lstStyle/>
@@ -9148,20 +8434,6 @@
           </a:ln>
           <a:effectLst/>
         </p:spPr>
-        <p:style>
-          <a:lnRef idx="1">
-            <a:schemeClr val="accent1"/>
-          </a:lnRef>
-          <a:fillRef idx="3">
-            <a:schemeClr val="accent1"/>
-          </a:fillRef>
-          <a:effectRef idx="2">
-            <a:schemeClr val="accent1"/>
-          </a:effectRef>
-          <a:fontRef idx="minor">
-            <a:schemeClr val="lt1"/>
-          </a:fontRef>
-        </p:style>
         <p:txBody>
           <a:bodyPr rtlCol="0" anchor="ctr"/>
           <a:lstStyle/>
@@ -9286,20 +8558,6 @@
           </a:ln>
           <a:effectLst/>
         </p:spPr>
-        <p:style>
-          <a:lnRef idx="1">
-            <a:schemeClr val="accent1"/>
-          </a:lnRef>
-          <a:fillRef idx="3">
-            <a:schemeClr val="accent1"/>
-          </a:fillRef>
-          <a:effectRef idx="2">
-            <a:schemeClr val="accent1"/>
-          </a:effectRef>
-          <a:fontRef idx="minor">
-            <a:schemeClr val="lt1"/>
-          </a:fontRef>
-        </p:style>
         <p:txBody>
           <a:bodyPr rtlCol="0" anchor="ctr"/>
           <a:lstStyle/>
@@ -9525,20 +8783,6 @@
           </a:ln>
           <a:effectLst/>
         </p:spPr>
-        <p:style>
-          <a:lnRef idx="1">
-            <a:schemeClr val="accent1"/>
-          </a:lnRef>
-          <a:fillRef idx="3">
-            <a:schemeClr val="accent1"/>
-          </a:fillRef>
-          <a:effectRef idx="2">
-            <a:schemeClr val="accent1"/>
-          </a:effectRef>
-          <a:fontRef idx="minor">
-            <a:schemeClr val="lt1"/>
-          </a:fontRef>
-        </p:style>
         <p:txBody>
           <a:bodyPr rtlCol="0" anchor="ctr"/>
           <a:lstStyle/>
@@ -9640,20 +8884,6 @@
           </a:ln>
           <a:effectLst/>
         </p:spPr>
-        <p:style>
-          <a:lnRef idx="1">
-            <a:schemeClr val="accent1"/>
-          </a:lnRef>
-          <a:fillRef idx="3">
-            <a:schemeClr val="accent1"/>
-          </a:fillRef>
-          <a:effectRef idx="2">
-            <a:schemeClr val="accent1"/>
-          </a:effectRef>
-          <a:fontRef idx="minor">
-            <a:schemeClr val="lt1"/>
-          </a:fontRef>
-        </p:style>
         <p:txBody>
           <a:bodyPr rtlCol="0" anchor="ctr"/>
           <a:lstStyle/>
@@ -9755,20 +8985,6 @@
           </a:ln>
           <a:effectLst/>
         </p:spPr>
-        <p:style>
-          <a:lnRef idx="1">
-            <a:schemeClr val="accent1"/>
-          </a:lnRef>
-          <a:fillRef idx="3">
-            <a:schemeClr val="accent1"/>
-          </a:fillRef>
-          <a:effectRef idx="2">
-            <a:schemeClr val="accent1"/>
-          </a:effectRef>
-          <a:fontRef idx="minor">
-            <a:schemeClr val="lt1"/>
-          </a:fontRef>
-        </p:style>
         <p:txBody>
           <a:bodyPr rtlCol="0" anchor="ctr"/>
           <a:lstStyle/>
@@ -9870,20 +9086,6 @@
           </a:ln>
           <a:effectLst/>
         </p:spPr>
-        <p:style>
-          <a:lnRef idx="1">
-            <a:schemeClr val="accent1"/>
-          </a:lnRef>
-          <a:fillRef idx="3">
-            <a:schemeClr val="accent1"/>
-          </a:fillRef>
-          <a:effectRef idx="2">
-            <a:schemeClr val="accent1"/>
-          </a:effectRef>
-          <a:fontRef idx="minor">
-            <a:schemeClr val="lt1"/>
-          </a:fontRef>
-        </p:style>
         <p:txBody>
           <a:bodyPr rtlCol="0" anchor="ctr"/>
           <a:lstStyle/>
@@ -9985,20 +9187,6 @@
           </a:ln>
           <a:effectLst/>
         </p:spPr>
-        <p:style>
-          <a:lnRef idx="1">
-            <a:schemeClr val="accent1"/>
-          </a:lnRef>
-          <a:fillRef idx="3">
-            <a:schemeClr val="accent1"/>
-          </a:fillRef>
-          <a:effectRef idx="2">
-            <a:schemeClr val="accent1"/>
-          </a:effectRef>
-          <a:fontRef idx="minor">
-            <a:schemeClr val="lt1"/>
-          </a:fontRef>
-        </p:style>
         <p:txBody>
           <a:bodyPr rtlCol="0" anchor="ctr"/>
           <a:lstStyle/>
@@ -10100,20 +9288,6 @@
           </a:ln>
           <a:effectLst/>
         </p:spPr>
-        <p:style>
-          <a:lnRef idx="1">
-            <a:schemeClr val="accent1"/>
-          </a:lnRef>
-          <a:fillRef idx="3">
-            <a:schemeClr val="accent1"/>
-          </a:fillRef>
-          <a:effectRef idx="2">
-            <a:schemeClr val="accent1"/>
-          </a:effectRef>
-          <a:fontRef idx="minor">
-            <a:schemeClr val="lt1"/>
-          </a:fontRef>
-        </p:style>
         <p:txBody>
           <a:bodyPr rtlCol="0" anchor="ctr"/>
           <a:lstStyle/>
@@ -10144,20 +9318,6 @@
           </a:ln>
           <a:effectLst/>
         </p:spPr>
-        <p:style>
-          <a:lnRef idx="1">
-            <a:schemeClr val="accent1"/>
-          </a:lnRef>
-          <a:fillRef idx="3">
-            <a:schemeClr val="accent1"/>
-          </a:fillRef>
-          <a:effectRef idx="2">
-            <a:schemeClr val="accent1"/>
-          </a:effectRef>
-          <a:fontRef idx="minor">
-            <a:schemeClr val="lt1"/>
-          </a:fontRef>
-        </p:style>
         <p:txBody>
           <a:bodyPr rtlCol="0" anchor="ctr"/>
           <a:lstStyle/>
@@ -10301,20 +9461,6 @@
           </a:ln>
           <a:effectLst/>
         </p:spPr>
-        <p:style>
-          <a:lnRef idx="1">
-            <a:schemeClr val="accent1"/>
-          </a:lnRef>
-          <a:fillRef idx="3">
-            <a:schemeClr val="accent1"/>
-          </a:fillRef>
-          <a:effectRef idx="2">
-            <a:schemeClr val="accent1"/>
-          </a:effectRef>
-          <a:fontRef idx="minor">
-            <a:schemeClr val="lt1"/>
-          </a:fontRef>
-        </p:style>
         <p:txBody>
           <a:bodyPr rtlCol="0" anchor="ctr"/>
           <a:lstStyle/>
@@ -10345,20 +9491,6 @@
           </a:ln>
           <a:effectLst/>
         </p:spPr>
-        <p:style>
-          <a:lnRef idx="1">
-            <a:schemeClr val="accent1"/>
-          </a:lnRef>
-          <a:fillRef idx="3">
-            <a:schemeClr val="accent1"/>
-          </a:fillRef>
-          <a:effectRef idx="2">
-            <a:schemeClr val="accent1"/>
-          </a:effectRef>
-          <a:fontRef idx="minor">
-            <a:schemeClr val="lt1"/>
-          </a:fontRef>
-        </p:style>
         <p:txBody>
           <a:bodyPr rtlCol="0" anchor="ctr"/>
           <a:lstStyle/>
@@ -10483,20 +9615,6 @@
           </a:ln>
           <a:effectLst/>
         </p:spPr>
-        <p:style>
-          <a:lnRef idx="1">
-            <a:schemeClr val="accent1"/>
-          </a:lnRef>
-          <a:fillRef idx="3">
-            <a:schemeClr val="accent1"/>
-          </a:fillRef>
-          <a:effectRef idx="2">
-            <a:schemeClr val="accent1"/>
-          </a:effectRef>
-          <a:fontRef idx="minor">
-            <a:schemeClr val="lt1"/>
-          </a:fontRef>
-        </p:style>
         <p:txBody>
           <a:bodyPr rtlCol="0" anchor="ctr"/>
           <a:lstStyle/>
@@ -10722,20 +9840,6 @@
           </a:ln>
           <a:effectLst/>
         </p:spPr>
-        <p:style>
-          <a:lnRef idx="1">
-            <a:schemeClr val="accent1"/>
-          </a:lnRef>
-          <a:fillRef idx="3">
-            <a:schemeClr val="accent1"/>
-          </a:fillRef>
-          <a:effectRef idx="2">
-            <a:schemeClr val="accent1"/>
-          </a:effectRef>
-          <a:fontRef idx="minor">
-            <a:schemeClr val="lt1"/>
-          </a:fontRef>
-        </p:style>
         <p:txBody>
           <a:bodyPr rtlCol="0" anchor="ctr"/>
           <a:lstStyle/>
@@ -10837,20 +9941,6 @@
           </a:ln>
           <a:effectLst/>
         </p:spPr>
-        <p:style>
-          <a:lnRef idx="1">
-            <a:schemeClr val="accent1"/>
-          </a:lnRef>
-          <a:fillRef idx="3">
-            <a:schemeClr val="accent1"/>
-          </a:fillRef>
-          <a:effectRef idx="2">
-            <a:schemeClr val="accent1"/>
-          </a:effectRef>
-          <a:fontRef idx="minor">
-            <a:schemeClr val="lt1"/>
-          </a:fontRef>
-        </p:style>
         <p:txBody>
           <a:bodyPr rtlCol="0" anchor="ctr"/>
           <a:lstStyle/>
@@ -10952,20 +10042,6 @@
           </a:ln>
           <a:effectLst/>
         </p:spPr>
-        <p:style>
-          <a:lnRef idx="1">
-            <a:schemeClr val="accent1"/>
-          </a:lnRef>
-          <a:fillRef idx="3">
-            <a:schemeClr val="accent1"/>
-          </a:fillRef>
-          <a:effectRef idx="2">
-            <a:schemeClr val="accent1"/>
-          </a:effectRef>
-          <a:fontRef idx="minor">
-            <a:schemeClr val="lt1"/>
-          </a:fontRef>
-        </p:style>
         <p:txBody>
           <a:bodyPr rtlCol="0" anchor="ctr"/>
           <a:lstStyle/>
@@ -11067,20 +10143,6 @@
           </a:ln>
           <a:effectLst/>
         </p:spPr>
-        <p:style>
-          <a:lnRef idx="1">
-            <a:schemeClr val="accent1"/>
-          </a:lnRef>
-          <a:fillRef idx="3">
-            <a:schemeClr val="accent1"/>
-          </a:fillRef>
-          <a:effectRef idx="2">
-            <a:schemeClr val="accent1"/>
-          </a:effectRef>
-          <a:fontRef idx="minor">
-            <a:schemeClr val="lt1"/>
-          </a:fontRef>
-        </p:style>
         <p:txBody>
           <a:bodyPr rtlCol="0" anchor="ctr"/>
           <a:lstStyle/>
@@ -11182,20 +10244,6 @@
           </a:ln>
           <a:effectLst/>
         </p:spPr>
-        <p:style>
-          <a:lnRef idx="1">
-            <a:schemeClr val="accent1"/>
-          </a:lnRef>
-          <a:fillRef idx="3">
-            <a:schemeClr val="accent1"/>
-          </a:fillRef>
-          <a:effectRef idx="2">
-            <a:schemeClr val="accent1"/>
-          </a:effectRef>
-          <a:fontRef idx="minor">
-            <a:schemeClr val="lt1"/>
-          </a:fontRef>
-        </p:style>
         <p:txBody>
           <a:bodyPr rtlCol="0" anchor="ctr"/>
           <a:lstStyle/>
@@ -11297,20 +10345,6 @@
           </a:ln>
           <a:effectLst/>
         </p:spPr>
-        <p:style>
-          <a:lnRef idx="1">
-            <a:schemeClr val="accent1"/>
-          </a:lnRef>
-          <a:fillRef idx="3">
-            <a:schemeClr val="accent1"/>
-          </a:fillRef>
-          <a:effectRef idx="2">
-            <a:schemeClr val="accent1"/>
-          </a:effectRef>
-          <a:fontRef idx="minor">
-            <a:schemeClr val="lt1"/>
-          </a:fontRef>
-        </p:style>
         <p:txBody>
           <a:bodyPr rtlCol="0" anchor="ctr"/>
           <a:lstStyle/>
@@ -11341,20 +10375,6 @@
           </a:ln>
           <a:effectLst/>
         </p:spPr>
-        <p:style>
-          <a:lnRef idx="1">
-            <a:schemeClr val="accent1"/>
-          </a:lnRef>
-          <a:fillRef idx="3">
-            <a:schemeClr val="accent1"/>
-          </a:fillRef>
-          <a:effectRef idx="2">
-            <a:schemeClr val="accent1"/>
-          </a:effectRef>
-          <a:fontRef idx="minor">
-            <a:schemeClr val="lt1"/>
-          </a:fontRef>
-        </p:style>
         <p:txBody>
           <a:bodyPr rtlCol="0" anchor="ctr"/>
           <a:lstStyle/>
@@ -11498,20 +10518,6 @@
           </a:ln>
           <a:effectLst/>
         </p:spPr>
-        <p:style>
-          <a:lnRef idx="1">
-            <a:schemeClr val="accent1"/>
-          </a:lnRef>
-          <a:fillRef idx="3">
-            <a:schemeClr val="accent1"/>
-          </a:fillRef>
-          <a:effectRef idx="2">
-            <a:schemeClr val="accent1"/>
-          </a:effectRef>
-          <a:fontRef idx="minor">
-            <a:schemeClr val="lt1"/>
-          </a:fontRef>
-        </p:style>
         <p:txBody>
           <a:bodyPr rtlCol="0" anchor="ctr"/>
           <a:lstStyle/>
@@ -11542,20 +10548,6 @@
           </a:ln>
           <a:effectLst/>
         </p:spPr>
-        <p:style>
-          <a:lnRef idx="1">
-            <a:schemeClr val="accent1"/>
-          </a:lnRef>
-          <a:fillRef idx="3">
-            <a:schemeClr val="accent1"/>
-          </a:fillRef>
-          <a:effectRef idx="2">
-            <a:schemeClr val="accent1"/>
-          </a:effectRef>
-          <a:fontRef idx="minor">
-            <a:schemeClr val="lt1"/>
-          </a:fontRef>
-        </p:style>
         <p:txBody>
           <a:bodyPr rtlCol="0" anchor="ctr"/>
           <a:lstStyle/>
@@ -11680,20 +10672,6 @@
           </a:ln>
           <a:effectLst/>
         </p:spPr>
-        <p:style>
-          <a:lnRef idx="1">
-            <a:schemeClr val="accent1"/>
-          </a:lnRef>
-          <a:fillRef idx="3">
-            <a:schemeClr val="accent1"/>
-          </a:fillRef>
-          <a:effectRef idx="2">
-            <a:schemeClr val="accent1"/>
-          </a:effectRef>
-          <a:fontRef idx="minor">
-            <a:schemeClr val="lt1"/>
-          </a:fontRef>
-        </p:style>
         <p:txBody>
           <a:bodyPr rtlCol="0" anchor="ctr"/>
           <a:lstStyle/>
@@ -11919,20 +10897,6 @@
           </a:ln>
           <a:effectLst/>
         </p:spPr>
-        <p:style>
-          <a:lnRef idx="1">
-            <a:schemeClr val="accent1"/>
-          </a:lnRef>
-          <a:fillRef idx="3">
-            <a:schemeClr val="accent1"/>
-          </a:fillRef>
-          <a:effectRef idx="2">
-            <a:schemeClr val="accent1"/>
-          </a:effectRef>
-          <a:fontRef idx="minor">
-            <a:schemeClr val="lt1"/>
-          </a:fontRef>
-        </p:style>
         <p:txBody>
           <a:bodyPr rtlCol="0" anchor="ctr"/>
           <a:lstStyle/>
@@ -12034,20 +10998,6 @@
           </a:ln>
           <a:effectLst/>
         </p:spPr>
-        <p:style>
-          <a:lnRef idx="1">
-            <a:schemeClr val="accent1"/>
-          </a:lnRef>
-          <a:fillRef idx="3">
-            <a:schemeClr val="accent1"/>
-          </a:fillRef>
-          <a:effectRef idx="2">
-            <a:schemeClr val="accent1"/>
-          </a:effectRef>
-          <a:fontRef idx="minor">
-            <a:schemeClr val="lt1"/>
-          </a:fontRef>
-        </p:style>
         <p:txBody>
           <a:bodyPr rtlCol="0" anchor="ctr"/>
           <a:lstStyle/>
@@ -12149,20 +11099,6 @@
           </a:ln>
           <a:effectLst/>
         </p:spPr>
-        <p:style>
-          <a:lnRef idx="1">
-            <a:schemeClr val="accent1"/>
-          </a:lnRef>
-          <a:fillRef idx="3">
-            <a:schemeClr val="accent1"/>
-          </a:fillRef>
-          <a:effectRef idx="2">
-            <a:schemeClr val="accent1"/>
-          </a:effectRef>
-          <a:fontRef idx="minor">
-            <a:schemeClr val="lt1"/>
-          </a:fontRef>
-        </p:style>
         <p:txBody>
           <a:bodyPr rtlCol="0" anchor="ctr"/>
           <a:lstStyle/>
@@ -12264,20 +11200,6 @@
           </a:ln>
           <a:effectLst/>
         </p:spPr>
-        <p:style>
-          <a:lnRef idx="1">
-            <a:schemeClr val="accent1"/>
-          </a:lnRef>
-          <a:fillRef idx="3">
-            <a:schemeClr val="accent1"/>
-          </a:fillRef>
-          <a:effectRef idx="2">
-            <a:schemeClr val="accent1"/>
-          </a:effectRef>
-          <a:fontRef idx="minor">
-            <a:schemeClr val="lt1"/>
-          </a:fontRef>
-        </p:style>
         <p:txBody>
           <a:bodyPr rtlCol="0" anchor="ctr"/>
           <a:lstStyle/>
@@ -12379,20 +11301,6 @@
           </a:ln>
           <a:effectLst/>
         </p:spPr>
-        <p:style>
-          <a:lnRef idx="1">
-            <a:schemeClr val="accent1"/>
-          </a:lnRef>
-          <a:fillRef idx="3">
-            <a:schemeClr val="accent1"/>
-          </a:fillRef>
-          <a:effectRef idx="2">
-            <a:schemeClr val="accent1"/>
-          </a:effectRef>
-          <a:fontRef idx="minor">
-            <a:schemeClr val="lt1"/>
-          </a:fontRef>
-        </p:style>
         <p:txBody>
           <a:bodyPr rtlCol="0" anchor="ctr"/>
           <a:lstStyle/>
@@ -12494,20 +11402,6 @@
           </a:ln>
           <a:effectLst/>
         </p:spPr>
-        <p:style>
-          <a:lnRef idx="1">
-            <a:schemeClr val="accent1"/>
-          </a:lnRef>
-          <a:fillRef idx="3">
-            <a:schemeClr val="accent1"/>
-          </a:fillRef>
-          <a:effectRef idx="2">
-            <a:schemeClr val="accent1"/>
-          </a:effectRef>
-          <a:fontRef idx="minor">
-            <a:schemeClr val="lt1"/>
-          </a:fontRef>
-        </p:style>
         <p:txBody>
           <a:bodyPr rtlCol="0" anchor="ctr"/>
           <a:lstStyle/>
@@ -12538,20 +11432,6 @@
           </a:ln>
           <a:effectLst/>
         </p:spPr>
-        <p:style>
-          <a:lnRef idx="1">
-            <a:schemeClr val="accent1"/>
-          </a:lnRef>
-          <a:fillRef idx="3">
-            <a:schemeClr val="accent1"/>
-          </a:fillRef>
-          <a:effectRef idx="2">
-            <a:schemeClr val="accent1"/>
-          </a:effectRef>
-          <a:fontRef idx="minor">
-            <a:schemeClr val="lt1"/>
-          </a:fontRef>
-        </p:style>
         <p:txBody>
           <a:bodyPr rtlCol="0" anchor="ctr"/>
           <a:lstStyle/>
@@ -12695,20 +11575,6 @@
           </a:ln>
           <a:effectLst/>
         </p:spPr>
-        <p:style>
-          <a:lnRef idx="1">
-            <a:schemeClr val="accent1"/>
-          </a:lnRef>
-          <a:fillRef idx="3">
-            <a:schemeClr val="accent1"/>
-          </a:fillRef>
-          <a:effectRef idx="2">
-            <a:schemeClr val="accent1"/>
-          </a:effectRef>
-          <a:fontRef idx="minor">
-            <a:schemeClr val="lt1"/>
-          </a:fontRef>
-        </p:style>
         <p:txBody>
           <a:bodyPr rtlCol="0" anchor="ctr"/>
           <a:lstStyle/>
@@ -12739,20 +11605,6 @@
           </a:ln>
           <a:effectLst/>
         </p:spPr>
-        <p:style>
-          <a:lnRef idx="1">
-            <a:schemeClr val="accent1"/>
-          </a:lnRef>
-          <a:fillRef idx="3">
-            <a:schemeClr val="accent1"/>
-          </a:fillRef>
-          <a:effectRef idx="2">
-            <a:schemeClr val="accent1"/>
-          </a:effectRef>
-          <a:fontRef idx="minor">
-            <a:schemeClr val="lt1"/>
-          </a:fontRef>
-        </p:style>
         <p:txBody>
           <a:bodyPr rtlCol="0" anchor="ctr"/>
           <a:lstStyle/>
@@ -12877,20 +11729,6 @@
           </a:ln>
           <a:effectLst/>
         </p:spPr>
-        <p:style>
-          <a:lnRef idx="1">
-            <a:schemeClr val="accent1"/>
-          </a:lnRef>
-          <a:fillRef idx="3">
-            <a:schemeClr val="accent1"/>
-          </a:fillRef>
-          <a:effectRef idx="2">
-            <a:schemeClr val="accent1"/>
-          </a:effectRef>
-          <a:fontRef idx="minor">
-            <a:schemeClr val="lt1"/>
-          </a:fontRef>
-        </p:style>
         <p:txBody>
           <a:bodyPr rtlCol="0" anchor="ctr"/>
           <a:lstStyle/>
@@ -13116,20 +11954,6 @@
           </a:ln>
           <a:effectLst/>
         </p:spPr>
-        <p:style>
-          <a:lnRef idx="1">
-            <a:schemeClr val="accent1"/>
-          </a:lnRef>
-          <a:fillRef idx="3">
-            <a:schemeClr val="accent1"/>
-          </a:fillRef>
-          <a:effectRef idx="2">
-            <a:schemeClr val="accent1"/>
-          </a:effectRef>
-          <a:fontRef idx="minor">
-            <a:schemeClr val="lt1"/>
-          </a:fontRef>
-        </p:style>
         <p:txBody>
           <a:bodyPr rtlCol="0" anchor="ctr"/>
           <a:lstStyle/>
@@ -13231,20 +12055,6 @@
           </a:ln>
           <a:effectLst/>
         </p:spPr>
-        <p:style>
-          <a:lnRef idx="1">
-            <a:schemeClr val="accent1"/>
-          </a:lnRef>
-          <a:fillRef idx="3">
-            <a:schemeClr val="accent1"/>
-          </a:fillRef>
-          <a:effectRef idx="2">
-            <a:schemeClr val="accent1"/>
-          </a:effectRef>
-          <a:fontRef idx="minor">
-            <a:schemeClr val="lt1"/>
-          </a:fontRef>
-        </p:style>
         <p:txBody>
           <a:bodyPr rtlCol="0" anchor="ctr"/>
           <a:lstStyle/>
@@ -13346,20 +12156,6 @@
           </a:ln>
           <a:effectLst/>
         </p:spPr>
-        <p:style>
-          <a:lnRef idx="1">
-            <a:schemeClr val="accent1"/>
-          </a:lnRef>
-          <a:fillRef idx="3">
-            <a:schemeClr val="accent1"/>
-          </a:fillRef>
-          <a:effectRef idx="2">
-            <a:schemeClr val="accent1"/>
-          </a:effectRef>
-          <a:fontRef idx="minor">
-            <a:schemeClr val="lt1"/>
-          </a:fontRef>
-        </p:style>
         <p:txBody>
           <a:bodyPr rtlCol="0" anchor="ctr"/>
           <a:lstStyle/>
@@ -13461,20 +12257,6 @@
           </a:ln>
           <a:effectLst/>
         </p:spPr>
-        <p:style>
-          <a:lnRef idx="1">
-            <a:schemeClr val="accent1"/>
-          </a:lnRef>
-          <a:fillRef idx="3">
-            <a:schemeClr val="accent1"/>
-          </a:fillRef>
-          <a:effectRef idx="2">
-            <a:schemeClr val="accent1"/>
-          </a:effectRef>
-          <a:fontRef idx="minor">
-            <a:schemeClr val="lt1"/>
-          </a:fontRef>
-        </p:style>
         <p:txBody>
           <a:bodyPr rtlCol="0" anchor="ctr"/>
           <a:lstStyle/>
@@ -13576,20 +12358,6 @@
           </a:ln>
           <a:effectLst/>
         </p:spPr>
-        <p:style>
-          <a:lnRef idx="1">
-            <a:schemeClr val="accent1"/>
-          </a:lnRef>
-          <a:fillRef idx="3">
-            <a:schemeClr val="accent1"/>
-          </a:fillRef>
-          <a:effectRef idx="2">
-            <a:schemeClr val="accent1"/>
-          </a:effectRef>
-          <a:fontRef idx="minor">
-            <a:schemeClr val="lt1"/>
-          </a:fontRef>
-        </p:style>
         <p:txBody>
           <a:bodyPr rtlCol="0" anchor="ctr"/>
           <a:lstStyle/>
@@ -13691,20 +12459,6 @@
           </a:ln>
           <a:effectLst/>
         </p:spPr>
-        <p:style>
-          <a:lnRef idx="1">
-            <a:schemeClr val="accent1"/>
-          </a:lnRef>
-          <a:fillRef idx="3">
-            <a:schemeClr val="accent1"/>
-          </a:fillRef>
-          <a:effectRef idx="2">
-            <a:schemeClr val="accent1"/>
-          </a:effectRef>
-          <a:fontRef idx="minor">
-            <a:schemeClr val="lt1"/>
-          </a:fontRef>
-        </p:style>
         <p:txBody>
           <a:bodyPr rtlCol="0" anchor="ctr"/>
           <a:lstStyle/>
@@ -13735,20 +12489,6 @@
           </a:ln>
           <a:effectLst/>
         </p:spPr>
-        <p:style>
-          <a:lnRef idx="1">
-            <a:schemeClr val="accent1"/>
-          </a:lnRef>
-          <a:fillRef idx="3">
-            <a:schemeClr val="accent1"/>
-          </a:fillRef>
-          <a:effectRef idx="2">
-            <a:schemeClr val="accent1"/>
-          </a:effectRef>
-          <a:fontRef idx="minor">
-            <a:schemeClr val="lt1"/>
-          </a:fontRef>
-        </p:style>
         <p:txBody>
           <a:bodyPr rtlCol="0" anchor="ctr"/>
           <a:lstStyle/>
@@ -13892,20 +12632,6 @@
           </a:ln>
           <a:effectLst/>
         </p:spPr>
-        <p:style>
-          <a:lnRef idx="1">
-            <a:schemeClr val="accent1"/>
-          </a:lnRef>
-          <a:fillRef idx="3">
-            <a:schemeClr val="accent1"/>
-          </a:fillRef>
-          <a:effectRef idx="2">
-            <a:schemeClr val="accent1"/>
-          </a:effectRef>
-          <a:fontRef idx="minor">
-            <a:schemeClr val="lt1"/>
-          </a:fontRef>
-        </p:style>
         <p:txBody>
           <a:bodyPr rtlCol="0" anchor="ctr"/>
           <a:lstStyle/>
@@ -13936,20 +12662,6 @@
           </a:ln>
           <a:effectLst/>
         </p:spPr>
-        <p:style>
-          <a:lnRef idx="1">
-            <a:schemeClr val="accent1"/>
-          </a:lnRef>
-          <a:fillRef idx="3">
-            <a:schemeClr val="accent1"/>
-          </a:fillRef>
-          <a:effectRef idx="2">
-            <a:schemeClr val="accent1"/>
-          </a:effectRef>
-          <a:fontRef idx="minor">
-            <a:schemeClr val="lt1"/>
-          </a:fontRef>
-        </p:style>
         <p:txBody>
           <a:bodyPr rtlCol="0" anchor="ctr"/>
           <a:lstStyle/>
@@ -14074,20 +12786,6 @@
           </a:ln>
           <a:effectLst/>
         </p:spPr>
-        <p:style>
-          <a:lnRef idx="1">
-            <a:schemeClr val="accent1"/>
-          </a:lnRef>
-          <a:fillRef idx="3">
-            <a:schemeClr val="accent1"/>
-          </a:fillRef>
-          <a:effectRef idx="2">
-            <a:schemeClr val="accent1"/>
-          </a:effectRef>
-          <a:fontRef idx="minor">
-            <a:schemeClr val="lt1"/>
-          </a:fontRef>
-        </p:style>
         <p:txBody>
           <a:bodyPr rtlCol="0" anchor="ctr"/>
           <a:lstStyle/>
@@ -14313,20 +13011,6 @@
           </a:ln>
           <a:effectLst/>
         </p:spPr>
-        <p:style>
-          <a:lnRef idx="1">
-            <a:schemeClr val="accent1"/>
-          </a:lnRef>
-          <a:fillRef idx="3">
-            <a:schemeClr val="accent1"/>
-          </a:fillRef>
-          <a:effectRef idx="2">
-            <a:schemeClr val="accent1"/>
-          </a:effectRef>
-          <a:fontRef idx="minor">
-            <a:schemeClr val="lt1"/>
-          </a:fontRef>
-        </p:style>
         <p:txBody>
           <a:bodyPr rtlCol="0" anchor="ctr"/>
           <a:lstStyle/>
@@ -14428,20 +13112,6 @@
           </a:ln>
           <a:effectLst/>
         </p:spPr>
-        <p:style>
-          <a:lnRef idx="1">
-            <a:schemeClr val="accent1"/>
-          </a:lnRef>
-          <a:fillRef idx="3">
-            <a:schemeClr val="accent1"/>
-          </a:fillRef>
-          <a:effectRef idx="2">
-            <a:schemeClr val="accent1"/>
-          </a:effectRef>
-          <a:fontRef idx="minor">
-            <a:schemeClr val="lt1"/>
-          </a:fontRef>
-        </p:style>
         <p:txBody>
           <a:bodyPr rtlCol="0" anchor="ctr"/>
           <a:lstStyle/>
@@ -14543,20 +13213,6 @@
           </a:ln>
           <a:effectLst/>
         </p:spPr>
-        <p:style>
-          <a:lnRef idx="1">
-            <a:schemeClr val="accent1"/>
-          </a:lnRef>
-          <a:fillRef idx="3">
-            <a:schemeClr val="accent1"/>
-          </a:fillRef>
-          <a:effectRef idx="2">
-            <a:schemeClr val="accent1"/>
-          </a:effectRef>
-          <a:fontRef idx="minor">
-            <a:schemeClr val="lt1"/>
-          </a:fontRef>
-        </p:style>
         <p:txBody>
           <a:bodyPr rtlCol="0" anchor="ctr"/>
           <a:lstStyle/>
@@ -14658,20 +13314,6 @@
           </a:ln>
           <a:effectLst/>
         </p:spPr>
-        <p:style>
-          <a:lnRef idx="1">
-            <a:schemeClr val="accent1"/>
-          </a:lnRef>
-          <a:fillRef idx="3">
-            <a:schemeClr val="accent1"/>
-          </a:fillRef>
-          <a:effectRef idx="2">
-            <a:schemeClr val="accent1"/>
-          </a:effectRef>
-          <a:fontRef idx="minor">
-            <a:schemeClr val="lt1"/>
-          </a:fontRef>
-        </p:style>
         <p:txBody>
           <a:bodyPr rtlCol="0" anchor="ctr"/>
           <a:lstStyle/>
@@ -14773,20 +13415,6 @@
           </a:ln>
           <a:effectLst/>
         </p:spPr>
-        <p:style>
-          <a:lnRef idx="1">
-            <a:schemeClr val="accent1"/>
-          </a:lnRef>
-          <a:fillRef idx="3">
-            <a:schemeClr val="accent1"/>
-          </a:fillRef>
-          <a:effectRef idx="2">
-            <a:schemeClr val="accent1"/>
-          </a:effectRef>
-          <a:fontRef idx="minor">
-            <a:schemeClr val="lt1"/>
-          </a:fontRef>
-        </p:style>
         <p:txBody>
           <a:bodyPr rtlCol="0" anchor="ctr"/>
           <a:lstStyle/>
@@ -14888,20 +13516,6 @@
           </a:ln>
           <a:effectLst/>
         </p:spPr>
-        <p:style>
-          <a:lnRef idx="1">
-            <a:schemeClr val="accent1"/>
-          </a:lnRef>
-          <a:fillRef idx="3">
-            <a:schemeClr val="accent1"/>
-          </a:fillRef>
-          <a:effectRef idx="2">
-            <a:schemeClr val="accent1"/>
-          </a:effectRef>
-          <a:fontRef idx="minor">
-            <a:schemeClr val="lt1"/>
-          </a:fontRef>
-        </p:style>
         <p:txBody>
           <a:bodyPr rtlCol="0" anchor="ctr"/>
           <a:lstStyle/>
@@ -14932,20 +13546,6 @@
           </a:ln>
           <a:effectLst/>
         </p:spPr>
-        <p:style>
-          <a:lnRef idx="1">
-            <a:schemeClr val="accent1"/>
-          </a:lnRef>
-          <a:fillRef idx="3">
-            <a:schemeClr val="accent1"/>
-          </a:fillRef>
-          <a:effectRef idx="2">
-            <a:schemeClr val="accent1"/>
-          </a:effectRef>
-          <a:fontRef idx="minor">
-            <a:schemeClr val="lt1"/>
-          </a:fontRef>
-        </p:style>
         <p:txBody>
           <a:bodyPr rtlCol="0" anchor="ctr"/>
           <a:lstStyle/>

--- a/outils/affiches/affiches-kiosques-sombre.pptx
+++ b/outils/affiches/affiches-kiosques-sombre.pptx
@@ -4450,7 +4450,7 @@
                 </a:solidFill>
                 <a:latin typeface="Barlow Condensed"/>
               </a:rPr>
-              <a:t>Vidéo TESTY — libre service</a:t>
+              <a:t>Mini-Série TESTY</a:t>
             </a:r>
           </a:p>
         </p:txBody>

--- a/outils/affiches/affiches-kiosques-sombre.pptx
+++ b/outils/affiches/affiches-kiosques-sombre.pptx
@@ -3406,8 +3406,8 @@
         </p:nvSpPr>
         <p:spPr>
           <a:xfrm>
-            <a:off x="720000" y="6336000"/>
-            <a:ext cx="9252000" cy="2304000"/>
+            <a:off x="720000" y="6263999"/>
+            <a:ext cx="9252000" cy="1069848"/>
           </a:xfrm>
           <a:prstGeom prst="rect">
             <a:avLst/>
@@ -3426,13 +3426,13 @@
               </a:lnSpc>
             </a:pPr>
             <a:r>
-              <a:rPr sz="3400" b="0">
+              <a:rPr sz="2600" b="0">
                 <a:solidFill>
                   <a:srgbClr val="E3E3E3"/>
                 </a:solidFill>
                 <a:latin typeface="Barlow"/>
               </a:rPr>
-              <a:t>Tour de Babel ou Marshmallow Challenge : découvrez par le jeu pourquoi il faut tester tôt !</a:t>
+              <a:t>Tour de Babel et Marshmallow Challenge en alternance : découvrez par le jeu pourquoi il faut tester tôt !</a:t>
             </a:r>
           </a:p>
         </p:txBody>
@@ -3445,8 +3445,8 @@
         </p:nvSpPr>
         <p:spPr>
           <a:xfrm>
-            <a:off x="720000" y="9072000"/>
-            <a:ext cx="9252000" cy="432000"/>
+            <a:off x="720000" y="7621847"/>
+            <a:ext cx="9252000" cy="396000"/>
           </a:xfrm>
           <a:prstGeom prst="rect">
             <a:avLst/>
@@ -3471,7 +3471,7 @@
                 </a:solidFill>
                 <a:latin typeface="Barlow Condensed"/>
               </a:rPr>
-              <a:t>5 ROTATIONS DE 30 MINUTES · 14h00 → 16h30</a:t>
+              <a:t>ANIMÉ PAR</a:t>
             </a:r>
           </a:p>
         </p:txBody>
@@ -3484,8 +3484,8 @@
         </p:nvSpPr>
         <p:spPr>
           <a:xfrm>
-            <a:off x="720000" y="9648000"/>
-            <a:ext cx="1735200" cy="1655999"/>
+            <a:off x="720000" y="8053847"/>
+            <a:ext cx="9252000" cy="762911"/>
           </a:xfrm>
           <a:prstGeom prst="rect">
             <a:avLst/>
@@ -3514,8 +3514,8 @@
         </p:nvSpPr>
         <p:spPr>
           <a:xfrm>
-            <a:off x="720000" y="9900000"/>
-            <a:ext cx="1735200" cy="1224000"/>
+            <a:off x="936000" y="8233847"/>
+            <a:ext cx="8820000" cy="402911"/>
           </a:xfrm>
           <a:prstGeom prst="rect">
             <a:avLst/>
@@ -3528,65 +3528,81 @@
           </a:bodyPr>
           <a:lstStyle/>
           <a:p>
-            <a:pPr algn="ctr">
+            <a:pPr algn="l">
+              <a:lnSpc>
+                <a:spcPct val="120000"/>
+              </a:lnSpc>
+            </a:pPr>
+            <a:r>
+              <a:rPr sz="1800" b="1">
+                <a:solidFill>
+                  <a:srgbClr val="00B4B4"/>
+                </a:solidFill>
+                <a:latin typeface="Barlow Condensed"/>
+              </a:rPr>
+              <a:t>CRAN Quality Experts</a:t>
+            </a:r>
+            <a:r>
+              <a:rPr sz="2400" b="0">
+                <a:solidFill>
+                  <a:srgbClr val="FFFFFF"/>
+                </a:solidFill>
+                <a:latin typeface="Barlow"/>
+              </a:rPr>
+              <a:t>   Guillaume COUSIN</a:t>
+            </a:r>
+          </a:p>
+        </p:txBody>
+      </p:sp>
+      <p:sp>
+        <p:nvSpPr>
+          <p:cNvPr id="14" name="TextBox 13"/>
+          <p:cNvSpPr txBox="1"/>
+          <p:nvPr/>
+        </p:nvSpPr>
+        <p:spPr>
+          <a:xfrm>
+            <a:off x="720000" y="9140758"/>
+            <a:ext cx="9252000" cy="432000"/>
+          </a:xfrm>
+          <a:prstGeom prst="rect">
+            <a:avLst/>
+          </a:prstGeom>
+          <a:noFill/>
+        </p:spPr>
+        <p:txBody>
+          <a:bodyPr wrap="square" anchor="t" lIns="0" rIns="0" tIns="0" bIns="0">
+            <a:spAutoFit/>
+          </a:bodyPr>
+          <a:lstStyle/>
+          <a:p>
+            <a:pPr algn="l">
               <a:lnSpc>
                 <a:spcPct val="100000"/>
               </a:lnSpc>
             </a:pPr>
             <a:r>
-              <a:rPr sz="3200" b="1">
+              <a:rPr sz="2400" b="1">
                 <a:solidFill>
                   <a:srgbClr val="00B4B4"/>
                 </a:solidFill>
                 <a:latin typeface="Barlow Condensed"/>
               </a:rPr>
-              <a:t>14h00</a:t>
-            </a:r>
-          </a:p>
-          <a:p>
-            <a:pPr algn="ctr">
-              <a:lnSpc>
-                <a:spcPct val="115000"/>
-              </a:lnSpc>
-            </a:pPr>
-            <a:r>
-              <a:rPr sz="2000" b="0">
-                <a:solidFill>
-                  <a:srgbClr val="00B4B4"/>
-                </a:solidFill>
-                <a:latin typeface="Barlow Condensed"/>
-              </a:rPr>
-              <a:t>→ 14h30</a:t>
-            </a:r>
-          </a:p>
-          <a:p>
-            <a:pPr algn="ctr">
-              <a:lnSpc>
-                <a:spcPct val="150000"/>
-              </a:lnSpc>
-            </a:pPr>
-            <a:r>
-              <a:rPr sz="1400" b="0">
-                <a:solidFill>
-                  <a:srgbClr val="E3E3E3"/>
-                </a:solidFill>
-                <a:latin typeface="Barlow"/>
-              </a:rPr>
-              <a:t>Rotation 1</a:t>
-            </a:r>
-          </a:p>
-        </p:txBody>
-      </p:sp>
-      <p:sp>
-        <p:nvSpPr>
-          <p:cNvPr id="14" name="Rectangle 13"/>
+              <a:t>5 ROTATIONS DE 30 MINUTES · 14h00 à 16h30</a:t>
+            </a:r>
+          </a:p>
+        </p:txBody>
+      </p:sp>
+      <p:sp>
+        <p:nvSpPr>
+          <p:cNvPr id="15" name="Rectangle 14"/>
           <p:cNvSpPr/>
           <p:nvPr/>
         </p:nvSpPr>
         <p:spPr>
           <a:xfrm>
-            <a:off x="2599200" y="9648000"/>
-            <a:ext cx="1735200" cy="1655999"/>
+            <a:off x="720000" y="9644757"/>
+            <a:ext cx="1735200" cy="1440000"/>
           </a:xfrm>
           <a:prstGeom prst="rect">
             <a:avLst/>
@@ -3609,14 +3625,14 @@
       </p:sp>
       <p:sp>
         <p:nvSpPr>
-          <p:cNvPr id="15" name="TextBox 14"/>
+          <p:cNvPr id="16" name="TextBox 15"/>
           <p:cNvSpPr txBox="1"/>
           <p:nvPr/>
         </p:nvSpPr>
         <p:spPr>
           <a:xfrm>
-            <a:off x="2599200" y="9900000"/>
-            <a:ext cx="1735200" cy="1224000"/>
+            <a:off x="720000" y="9860757"/>
+            <a:ext cx="1735200" cy="1152000"/>
           </a:xfrm>
           <a:prstGeom prst="rect">
             <a:avLst/>
@@ -3641,23 +3657,23 @@
                 </a:solidFill>
                 <a:latin typeface="Barlow Condensed"/>
               </a:rPr>
-              <a:t>14h30</a:t>
-            </a:r>
-          </a:p>
-          <a:p>
-            <a:pPr algn="ctr">
-              <a:lnSpc>
-                <a:spcPct val="115000"/>
-              </a:lnSpc>
-            </a:pPr>
-            <a:r>
-              <a:rPr sz="2000" b="0">
+              <a:t>14h00</a:t>
+            </a:r>
+          </a:p>
+          <a:p>
+            <a:pPr algn="ctr">
+              <a:lnSpc>
+                <a:spcPct val="120000"/>
+              </a:lnSpc>
+            </a:pPr>
+            <a:r>
+              <a:rPr sz="1800" b="0">
                 <a:solidFill>
                   <a:srgbClr val="00B4B4"/>
                 </a:solidFill>
                 <a:latin typeface="Barlow Condensed"/>
               </a:rPr>
-              <a:t>→ 15h00</a:t>
+              <a:t>jusqu’à 14h30</a:t>
             </a:r>
           </a:p>
           <a:p>
@@ -3673,21 +3689,21 @@
                 </a:solidFill>
                 <a:latin typeface="Barlow"/>
               </a:rPr>
-              <a:t>Rotation 2</a:t>
-            </a:r>
-          </a:p>
-        </p:txBody>
-      </p:sp>
-      <p:sp>
-        <p:nvSpPr>
-          <p:cNvPr id="16" name="Rectangle 15"/>
+              <a:t>Rotation 1</a:t>
+            </a:r>
+          </a:p>
+        </p:txBody>
+      </p:sp>
+      <p:sp>
+        <p:nvSpPr>
+          <p:cNvPr id="17" name="Rectangle 16"/>
           <p:cNvSpPr/>
           <p:nvPr/>
         </p:nvSpPr>
         <p:spPr>
           <a:xfrm>
-            <a:off x="4478400" y="9648000"/>
-            <a:ext cx="1735200" cy="1655999"/>
+            <a:off x="2599200" y="9644757"/>
+            <a:ext cx="1735200" cy="1440000"/>
           </a:xfrm>
           <a:prstGeom prst="rect">
             <a:avLst/>
@@ -3710,14 +3726,14 @@
       </p:sp>
       <p:sp>
         <p:nvSpPr>
-          <p:cNvPr id="17" name="TextBox 16"/>
+          <p:cNvPr id="18" name="TextBox 17"/>
           <p:cNvSpPr txBox="1"/>
           <p:nvPr/>
         </p:nvSpPr>
         <p:spPr>
           <a:xfrm>
-            <a:off x="4478400" y="9900000"/>
-            <a:ext cx="1735200" cy="1224000"/>
+            <a:off x="2599200" y="9860757"/>
+            <a:ext cx="1735200" cy="1152000"/>
           </a:xfrm>
           <a:prstGeom prst="rect">
             <a:avLst/>
@@ -3742,23 +3758,23 @@
                 </a:solidFill>
                 <a:latin typeface="Barlow Condensed"/>
               </a:rPr>
-              <a:t>15h00</a:t>
-            </a:r>
-          </a:p>
-          <a:p>
-            <a:pPr algn="ctr">
-              <a:lnSpc>
-                <a:spcPct val="115000"/>
-              </a:lnSpc>
-            </a:pPr>
-            <a:r>
-              <a:rPr sz="2000" b="0">
+              <a:t>14h30</a:t>
+            </a:r>
+          </a:p>
+          <a:p>
+            <a:pPr algn="ctr">
+              <a:lnSpc>
+                <a:spcPct val="120000"/>
+              </a:lnSpc>
+            </a:pPr>
+            <a:r>
+              <a:rPr sz="1800" b="0">
                 <a:solidFill>
                   <a:srgbClr val="00B4B4"/>
                 </a:solidFill>
                 <a:latin typeface="Barlow Condensed"/>
               </a:rPr>
-              <a:t>→ 15h30</a:t>
+              <a:t>jusqu’à 15h00</a:t>
             </a:r>
           </a:p>
           <a:p>
@@ -3774,21 +3790,21 @@
                 </a:solidFill>
                 <a:latin typeface="Barlow"/>
               </a:rPr>
-              <a:t>Rotation 3</a:t>
-            </a:r>
-          </a:p>
-        </p:txBody>
-      </p:sp>
-      <p:sp>
-        <p:nvSpPr>
-          <p:cNvPr id="18" name="Rectangle 17"/>
+              <a:t>Rotation 2</a:t>
+            </a:r>
+          </a:p>
+        </p:txBody>
+      </p:sp>
+      <p:sp>
+        <p:nvSpPr>
+          <p:cNvPr id="19" name="Rectangle 18"/>
           <p:cNvSpPr/>
           <p:nvPr/>
         </p:nvSpPr>
         <p:spPr>
           <a:xfrm>
-            <a:off x="6357600" y="9648000"/>
-            <a:ext cx="1735200" cy="1655999"/>
+            <a:off x="4478400" y="9644757"/>
+            <a:ext cx="1735200" cy="1440000"/>
           </a:xfrm>
           <a:prstGeom prst="rect">
             <a:avLst/>
@@ -3811,14 +3827,14 @@
       </p:sp>
       <p:sp>
         <p:nvSpPr>
-          <p:cNvPr id="19" name="TextBox 18"/>
+          <p:cNvPr id="20" name="TextBox 19"/>
           <p:cNvSpPr txBox="1"/>
           <p:nvPr/>
         </p:nvSpPr>
         <p:spPr>
           <a:xfrm>
-            <a:off x="6357600" y="9900000"/>
-            <a:ext cx="1735200" cy="1224000"/>
+            <a:off x="4478400" y="9860757"/>
+            <a:ext cx="1735200" cy="1152000"/>
           </a:xfrm>
           <a:prstGeom prst="rect">
             <a:avLst/>
@@ -3843,23 +3859,23 @@
                 </a:solidFill>
                 <a:latin typeface="Barlow Condensed"/>
               </a:rPr>
-              <a:t>15h30</a:t>
-            </a:r>
-          </a:p>
-          <a:p>
-            <a:pPr algn="ctr">
-              <a:lnSpc>
-                <a:spcPct val="115000"/>
-              </a:lnSpc>
-            </a:pPr>
-            <a:r>
-              <a:rPr sz="2000" b="0">
+              <a:t>15h00</a:t>
+            </a:r>
+          </a:p>
+          <a:p>
+            <a:pPr algn="ctr">
+              <a:lnSpc>
+                <a:spcPct val="120000"/>
+              </a:lnSpc>
+            </a:pPr>
+            <a:r>
+              <a:rPr sz="1800" b="0">
                 <a:solidFill>
                   <a:srgbClr val="00B4B4"/>
                 </a:solidFill>
                 <a:latin typeface="Barlow Condensed"/>
               </a:rPr>
-              <a:t>→ 16h00</a:t>
+              <a:t>jusqu’à 15h30</a:t>
             </a:r>
           </a:p>
           <a:p>
@@ -3875,21 +3891,21 @@
                 </a:solidFill>
                 <a:latin typeface="Barlow"/>
               </a:rPr>
-              <a:t>Rotation 4</a:t>
-            </a:r>
-          </a:p>
-        </p:txBody>
-      </p:sp>
-      <p:sp>
-        <p:nvSpPr>
-          <p:cNvPr id="20" name="Rectangle 19"/>
+              <a:t>Rotation 3</a:t>
+            </a:r>
+          </a:p>
+        </p:txBody>
+      </p:sp>
+      <p:sp>
+        <p:nvSpPr>
+          <p:cNvPr id="21" name="Rectangle 20"/>
           <p:cNvSpPr/>
           <p:nvPr/>
         </p:nvSpPr>
         <p:spPr>
           <a:xfrm>
-            <a:off x="8236800" y="9648000"/>
-            <a:ext cx="1735200" cy="1655999"/>
+            <a:off x="6357600" y="9644757"/>
+            <a:ext cx="1735200" cy="1440000"/>
           </a:xfrm>
           <a:prstGeom prst="rect">
             <a:avLst/>
@@ -3912,14 +3928,14 @@
       </p:sp>
       <p:sp>
         <p:nvSpPr>
-          <p:cNvPr id="21" name="TextBox 20"/>
+          <p:cNvPr id="22" name="TextBox 21"/>
           <p:cNvSpPr txBox="1"/>
           <p:nvPr/>
         </p:nvSpPr>
         <p:spPr>
           <a:xfrm>
-            <a:off x="8236800" y="9900000"/>
-            <a:ext cx="1735200" cy="1224000"/>
+            <a:off x="6357600" y="9860757"/>
+            <a:ext cx="1735200" cy="1152000"/>
           </a:xfrm>
           <a:prstGeom prst="rect">
             <a:avLst/>
@@ -3944,23 +3960,124 @@
                 </a:solidFill>
                 <a:latin typeface="Barlow Condensed"/>
               </a:rPr>
+              <a:t>15h30</a:t>
+            </a:r>
+          </a:p>
+          <a:p>
+            <a:pPr algn="ctr">
+              <a:lnSpc>
+                <a:spcPct val="120000"/>
+              </a:lnSpc>
+            </a:pPr>
+            <a:r>
+              <a:rPr sz="1800" b="0">
+                <a:solidFill>
+                  <a:srgbClr val="00B4B4"/>
+                </a:solidFill>
+                <a:latin typeface="Barlow Condensed"/>
+              </a:rPr>
+              <a:t>jusqu’à 16h00</a:t>
+            </a:r>
+          </a:p>
+          <a:p>
+            <a:pPr algn="ctr">
+              <a:lnSpc>
+                <a:spcPct val="150000"/>
+              </a:lnSpc>
+            </a:pPr>
+            <a:r>
+              <a:rPr sz="1400" b="0">
+                <a:solidFill>
+                  <a:srgbClr val="E3E3E3"/>
+                </a:solidFill>
+                <a:latin typeface="Barlow"/>
+              </a:rPr>
+              <a:t>Rotation 4</a:t>
+            </a:r>
+          </a:p>
+        </p:txBody>
+      </p:sp>
+      <p:sp>
+        <p:nvSpPr>
+          <p:cNvPr id="23" name="Rectangle 22"/>
+          <p:cNvSpPr/>
+          <p:nvPr/>
+        </p:nvSpPr>
+        <p:spPr>
+          <a:xfrm>
+            <a:off x="8236800" y="9644757"/>
+            <a:ext cx="1735200" cy="1440000"/>
+          </a:xfrm>
+          <a:prstGeom prst="rect">
+            <a:avLst/>
+          </a:prstGeom>
+          <a:solidFill>
+            <a:srgbClr val="2E2E50"/>
+          </a:solidFill>
+          <a:ln>
+            <a:noFill/>
+          </a:ln>
+          <a:effectLst/>
+        </p:spPr>
+        <p:txBody>
+          <a:bodyPr rtlCol="0" anchor="ctr"/>
+          <a:lstStyle/>
+          <a:p>
+            <a:pPr algn="ctr"/>
+          </a:p>
+        </p:txBody>
+      </p:sp>
+      <p:sp>
+        <p:nvSpPr>
+          <p:cNvPr id="24" name="TextBox 23"/>
+          <p:cNvSpPr txBox="1"/>
+          <p:nvPr/>
+        </p:nvSpPr>
+        <p:spPr>
+          <a:xfrm>
+            <a:off x="8236800" y="9860757"/>
+            <a:ext cx="1735200" cy="1152000"/>
+          </a:xfrm>
+          <a:prstGeom prst="rect">
+            <a:avLst/>
+          </a:prstGeom>
+          <a:noFill/>
+        </p:spPr>
+        <p:txBody>
+          <a:bodyPr wrap="square" anchor="t" lIns="0" rIns="0" tIns="0" bIns="0">
+            <a:spAutoFit/>
+          </a:bodyPr>
+          <a:lstStyle/>
+          <a:p>
+            <a:pPr algn="ctr">
+              <a:lnSpc>
+                <a:spcPct val="100000"/>
+              </a:lnSpc>
+            </a:pPr>
+            <a:r>
+              <a:rPr sz="3200" b="1">
+                <a:solidFill>
+                  <a:srgbClr val="00B4B4"/>
+                </a:solidFill>
+                <a:latin typeface="Barlow Condensed"/>
+              </a:rPr>
               <a:t>16h00</a:t>
             </a:r>
           </a:p>
           <a:p>
             <a:pPr algn="ctr">
               <a:lnSpc>
-                <a:spcPct val="115000"/>
-              </a:lnSpc>
-            </a:pPr>
-            <a:r>
-              <a:rPr sz="2000" b="0">
+                <a:spcPct val="120000"/>
+              </a:lnSpc>
+            </a:pPr>
+            <a:r>
+              <a:rPr sz="1800" b="0">
                 <a:solidFill>
                   <a:srgbClr val="00B4B4"/>
                 </a:solidFill>
                 <a:latin typeface="Barlow Condensed"/>
               </a:rPr>
-              <a:t>→ 16h30</a:t>
+              <a:t>jusqu’à 16h30</a:t>
             </a:r>
           </a:p>
           <a:p>
@@ -3983,7 +4100,7 @@
       </p:sp>
       <p:sp>
         <p:nvSpPr>
-          <p:cNvPr id="22" name="Rectangle 21"/>
+          <p:cNvPr id="25" name="Rectangle 24"/>
           <p:cNvSpPr/>
           <p:nvPr/>
         </p:nvSpPr>
@@ -4013,7 +4130,7 @@
       </p:sp>
       <p:sp>
         <p:nvSpPr>
-          <p:cNvPr id="23" name="Rectangle 22"/>
+          <p:cNvPr id="26" name="Rectangle 25"/>
           <p:cNvSpPr/>
           <p:nvPr/>
         </p:nvSpPr>
@@ -4043,7 +4160,7 @@
       </p:sp>
       <p:pic>
         <p:nvPicPr>
-          <p:cNvPr id="24" name="Picture 23" descr="testing-event-2026.png"/>
+          <p:cNvPr id="27" name="Picture 26" descr="testing-event-2026.png"/>
           <p:cNvPicPr>
             <a:picLocks noChangeAspect="1"/>
           </p:cNvPicPr>
@@ -4067,7 +4184,7 @@
       </p:pic>
       <p:sp>
         <p:nvSpPr>
-          <p:cNvPr id="25" name="TextBox 24"/>
+          <p:cNvPr id="28" name="TextBox 27"/>
           <p:cNvSpPr txBox="1"/>
           <p:nvPr/>
         </p:nvSpPr>
@@ -4463,8 +4580,8 @@
         </p:nvSpPr>
         <p:spPr>
           <a:xfrm>
-            <a:off x="720000" y="6336000"/>
-            <a:ext cx="9252000" cy="2304000"/>
+            <a:off x="720000" y="6263999"/>
+            <a:ext cx="9252000" cy="1069848"/>
           </a:xfrm>
           <a:prstGeom prst="rect">
             <a:avLst/>
@@ -4483,7 +4600,7 @@
               </a:lnSpc>
             </a:pPr>
             <a:r>
-              <a:rPr sz="3400" b="0">
+              <a:rPr sz="2600" b="0">
                 <a:solidFill>
                   <a:srgbClr val="E3E3E3"/>
                 </a:solidFill>
@@ -4502,8 +4619,8 @@
         </p:nvSpPr>
         <p:spPr>
           <a:xfrm>
-            <a:off x="720000" y="9072000"/>
-            <a:ext cx="9252000" cy="432000"/>
+            <a:off x="720000" y="7621847"/>
+            <a:ext cx="9252000" cy="396000"/>
           </a:xfrm>
           <a:prstGeom prst="rect">
             <a:avLst/>
@@ -4528,7 +4645,7 @@
                 </a:solidFill>
                 <a:latin typeface="Barlow Condensed"/>
               </a:rPr>
-              <a:t>5 ROTATIONS DE 30 MINUTES · 14h00 → 16h30</a:t>
+              <a:t>ANIMÉ PAR</a:t>
             </a:r>
           </a:p>
         </p:txBody>
@@ -4541,8 +4658,8 @@
         </p:nvSpPr>
         <p:spPr>
           <a:xfrm>
-            <a:off x="720000" y="9648000"/>
-            <a:ext cx="1735200" cy="1655999"/>
+            <a:off x="720000" y="8053847"/>
+            <a:ext cx="9252000" cy="762911"/>
           </a:xfrm>
           <a:prstGeom prst="rect">
             <a:avLst/>
@@ -4571,8 +4688,8 @@
         </p:nvSpPr>
         <p:spPr>
           <a:xfrm>
-            <a:off x="720000" y="9900000"/>
-            <a:ext cx="1735200" cy="1224000"/>
+            <a:off x="936000" y="8233847"/>
+            <a:ext cx="8820000" cy="402911"/>
           </a:xfrm>
           <a:prstGeom prst="rect">
             <a:avLst/>
@@ -4585,65 +4702,81 @@
           </a:bodyPr>
           <a:lstStyle/>
           <a:p>
-            <a:pPr algn="ctr">
+            <a:pPr algn="l">
+              <a:lnSpc>
+                <a:spcPct val="120000"/>
+              </a:lnSpc>
+            </a:pPr>
+            <a:r>
+              <a:rPr sz="1800" b="1">
+                <a:solidFill>
+                  <a:srgbClr val="00B4B4"/>
+                </a:solidFill>
+                <a:latin typeface="Barlow Condensed"/>
+              </a:rPr>
+              <a:t>TFC</a:t>
+            </a:r>
+            <a:r>
+              <a:rPr sz="2400" b="0">
+                <a:solidFill>
+                  <a:srgbClr val="FFFFFF"/>
+                </a:solidFill>
+                <a:latin typeface="Barlow"/>
+              </a:rPr>
+              <a:t>   Elena TOMAS et Jaber BENZEGOUTTA</a:t>
+            </a:r>
+          </a:p>
+        </p:txBody>
+      </p:sp>
+      <p:sp>
+        <p:nvSpPr>
+          <p:cNvPr id="14" name="TextBox 13"/>
+          <p:cNvSpPr txBox="1"/>
+          <p:nvPr/>
+        </p:nvSpPr>
+        <p:spPr>
+          <a:xfrm>
+            <a:off x="720000" y="9140758"/>
+            <a:ext cx="9252000" cy="432000"/>
+          </a:xfrm>
+          <a:prstGeom prst="rect">
+            <a:avLst/>
+          </a:prstGeom>
+          <a:noFill/>
+        </p:spPr>
+        <p:txBody>
+          <a:bodyPr wrap="square" anchor="t" lIns="0" rIns="0" tIns="0" bIns="0">
+            <a:spAutoFit/>
+          </a:bodyPr>
+          <a:lstStyle/>
+          <a:p>
+            <a:pPr algn="l">
               <a:lnSpc>
                 <a:spcPct val="100000"/>
               </a:lnSpc>
             </a:pPr>
             <a:r>
-              <a:rPr sz="3200" b="1">
+              <a:rPr sz="2400" b="1">
                 <a:solidFill>
                   <a:srgbClr val="00B4B4"/>
                 </a:solidFill>
                 <a:latin typeface="Barlow Condensed"/>
               </a:rPr>
-              <a:t>14h00</a:t>
-            </a:r>
-          </a:p>
-          <a:p>
-            <a:pPr algn="ctr">
-              <a:lnSpc>
-                <a:spcPct val="115000"/>
-              </a:lnSpc>
-            </a:pPr>
-            <a:r>
-              <a:rPr sz="2000" b="0">
-                <a:solidFill>
-                  <a:srgbClr val="00B4B4"/>
-                </a:solidFill>
-                <a:latin typeface="Barlow Condensed"/>
-              </a:rPr>
-              <a:t>→ 14h30</a:t>
-            </a:r>
-          </a:p>
-          <a:p>
-            <a:pPr algn="ctr">
-              <a:lnSpc>
-                <a:spcPct val="150000"/>
-              </a:lnSpc>
-            </a:pPr>
-            <a:r>
-              <a:rPr sz="1400" b="0">
-                <a:solidFill>
-                  <a:srgbClr val="E3E3E3"/>
-                </a:solidFill>
-                <a:latin typeface="Barlow"/>
-              </a:rPr>
-              <a:t>Rotation 1</a:t>
-            </a:r>
-          </a:p>
-        </p:txBody>
-      </p:sp>
-      <p:sp>
-        <p:nvSpPr>
-          <p:cNvPr id="14" name="Rectangle 13"/>
+              <a:t>5 ROTATIONS DE 30 MINUTES · 14h00 à 16h30</a:t>
+            </a:r>
+          </a:p>
+        </p:txBody>
+      </p:sp>
+      <p:sp>
+        <p:nvSpPr>
+          <p:cNvPr id="15" name="Rectangle 14"/>
           <p:cNvSpPr/>
           <p:nvPr/>
         </p:nvSpPr>
         <p:spPr>
           <a:xfrm>
-            <a:off x="2599200" y="9648000"/>
-            <a:ext cx="1735200" cy="1655999"/>
+            <a:off x="720000" y="9644757"/>
+            <a:ext cx="1735200" cy="1440000"/>
           </a:xfrm>
           <a:prstGeom prst="rect">
             <a:avLst/>
@@ -4666,14 +4799,14 @@
       </p:sp>
       <p:sp>
         <p:nvSpPr>
-          <p:cNvPr id="15" name="TextBox 14"/>
+          <p:cNvPr id="16" name="TextBox 15"/>
           <p:cNvSpPr txBox="1"/>
           <p:nvPr/>
         </p:nvSpPr>
         <p:spPr>
           <a:xfrm>
-            <a:off x="2599200" y="9900000"/>
-            <a:ext cx="1735200" cy="1224000"/>
+            <a:off x="720000" y="9860757"/>
+            <a:ext cx="1735200" cy="1152000"/>
           </a:xfrm>
           <a:prstGeom prst="rect">
             <a:avLst/>
@@ -4698,23 +4831,23 @@
                 </a:solidFill>
                 <a:latin typeface="Barlow Condensed"/>
               </a:rPr>
-              <a:t>14h30</a:t>
-            </a:r>
-          </a:p>
-          <a:p>
-            <a:pPr algn="ctr">
-              <a:lnSpc>
-                <a:spcPct val="115000"/>
-              </a:lnSpc>
-            </a:pPr>
-            <a:r>
-              <a:rPr sz="2000" b="0">
+              <a:t>14h00</a:t>
+            </a:r>
+          </a:p>
+          <a:p>
+            <a:pPr algn="ctr">
+              <a:lnSpc>
+                <a:spcPct val="120000"/>
+              </a:lnSpc>
+            </a:pPr>
+            <a:r>
+              <a:rPr sz="1800" b="0">
                 <a:solidFill>
                   <a:srgbClr val="00B4B4"/>
                 </a:solidFill>
                 <a:latin typeface="Barlow Condensed"/>
               </a:rPr>
-              <a:t>→ 15h00</a:t>
+              <a:t>jusqu’à 14h30</a:t>
             </a:r>
           </a:p>
           <a:p>
@@ -4730,21 +4863,21 @@
                 </a:solidFill>
                 <a:latin typeface="Barlow"/>
               </a:rPr>
-              <a:t>Rotation 2</a:t>
-            </a:r>
-          </a:p>
-        </p:txBody>
-      </p:sp>
-      <p:sp>
-        <p:nvSpPr>
-          <p:cNvPr id="16" name="Rectangle 15"/>
+              <a:t>Rotation 1</a:t>
+            </a:r>
+          </a:p>
+        </p:txBody>
+      </p:sp>
+      <p:sp>
+        <p:nvSpPr>
+          <p:cNvPr id="17" name="Rectangle 16"/>
           <p:cNvSpPr/>
           <p:nvPr/>
         </p:nvSpPr>
         <p:spPr>
           <a:xfrm>
-            <a:off x="4478400" y="9648000"/>
-            <a:ext cx="1735200" cy="1655999"/>
+            <a:off x="2599200" y="9644757"/>
+            <a:ext cx="1735200" cy="1440000"/>
           </a:xfrm>
           <a:prstGeom prst="rect">
             <a:avLst/>
@@ -4767,14 +4900,14 @@
       </p:sp>
       <p:sp>
         <p:nvSpPr>
-          <p:cNvPr id="17" name="TextBox 16"/>
+          <p:cNvPr id="18" name="TextBox 17"/>
           <p:cNvSpPr txBox="1"/>
           <p:nvPr/>
         </p:nvSpPr>
         <p:spPr>
           <a:xfrm>
-            <a:off x="4478400" y="9900000"/>
-            <a:ext cx="1735200" cy="1224000"/>
+            <a:off x="2599200" y="9860757"/>
+            <a:ext cx="1735200" cy="1152000"/>
           </a:xfrm>
           <a:prstGeom prst="rect">
             <a:avLst/>
@@ -4799,23 +4932,23 @@
                 </a:solidFill>
                 <a:latin typeface="Barlow Condensed"/>
               </a:rPr>
-              <a:t>15h00</a:t>
-            </a:r>
-          </a:p>
-          <a:p>
-            <a:pPr algn="ctr">
-              <a:lnSpc>
-                <a:spcPct val="115000"/>
-              </a:lnSpc>
-            </a:pPr>
-            <a:r>
-              <a:rPr sz="2000" b="0">
+              <a:t>14h30</a:t>
+            </a:r>
+          </a:p>
+          <a:p>
+            <a:pPr algn="ctr">
+              <a:lnSpc>
+                <a:spcPct val="120000"/>
+              </a:lnSpc>
+            </a:pPr>
+            <a:r>
+              <a:rPr sz="1800" b="0">
                 <a:solidFill>
                   <a:srgbClr val="00B4B4"/>
                 </a:solidFill>
                 <a:latin typeface="Barlow Condensed"/>
               </a:rPr>
-              <a:t>→ 15h30</a:t>
+              <a:t>jusqu’à 15h00</a:t>
             </a:r>
           </a:p>
           <a:p>
@@ -4831,21 +4964,21 @@
                 </a:solidFill>
                 <a:latin typeface="Barlow"/>
               </a:rPr>
-              <a:t>Rotation 3</a:t>
-            </a:r>
-          </a:p>
-        </p:txBody>
-      </p:sp>
-      <p:sp>
-        <p:nvSpPr>
-          <p:cNvPr id="18" name="Rectangle 17"/>
+              <a:t>Rotation 2</a:t>
+            </a:r>
+          </a:p>
+        </p:txBody>
+      </p:sp>
+      <p:sp>
+        <p:nvSpPr>
+          <p:cNvPr id="19" name="Rectangle 18"/>
           <p:cNvSpPr/>
           <p:nvPr/>
         </p:nvSpPr>
         <p:spPr>
           <a:xfrm>
-            <a:off x="6357600" y="9648000"/>
-            <a:ext cx="1735200" cy="1655999"/>
+            <a:off x="4478400" y="9644757"/>
+            <a:ext cx="1735200" cy="1440000"/>
           </a:xfrm>
           <a:prstGeom prst="rect">
             <a:avLst/>
@@ -4868,14 +5001,14 @@
       </p:sp>
       <p:sp>
         <p:nvSpPr>
-          <p:cNvPr id="19" name="TextBox 18"/>
+          <p:cNvPr id="20" name="TextBox 19"/>
           <p:cNvSpPr txBox="1"/>
           <p:nvPr/>
         </p:nvSpPr>
         <p:spPr>
           <a:xfrm>
-            <a:off x="6357600" y="9900000"/>
-            <a:ext cx="1735200" cy="1224000"/>
+            <a:off x="4478400" y="9860757"/>
+            <a:ext cx="1735200" cy="1152000"/>
           </a:xfrm>
           <a:prstGeom prst="rect">
             <a:avLst/>
@@ -4900,23 +5033,23 @@
                 </a:solidFill>
                 <a:latin typeface="Barlow Condensed"/>
               </a:rPr>
-              <a:t>15h30</a:t>
-            </a:r>
-          </a:p>
-          <a:p>
-            <a:pPr algn="ctr">
-              <a:lnSpc>
-                <a:spcPct val="115000"/>
-              </a:lnSpc>
-            </a:pPr>
-            <a:r>
-              <a:rPr sz="2000" b="0">
+              <a:t>15h00</a:t>
+            </a:r>
+          </a:p>
+          <a:p>
+            <a:pPr algn="ctr">
+              <a:lnSpc>
+                <a:spcPct val="120000"/>
+              </a:lnSpc>
+            </a:pPr>
+            <a:r>
+              <a:rPr sz="1800" b="0">
                 <a:solidFill>
                   <a:srgbClr val="00B4B4"/>
                 </a:solidFill>
                 <a:latin typeface="Barlow Condensed"/>
               </a:rPr>
-              <a:t>→ 16h00</a:t>
+              <a:t>jusqu’à 15h30</a:t>
             </a:r>
           </a:p>
           <a:p>
@@ -4932,21 +5065,21 @@
                 </a:solidFill>
                 <a:latin typeface="Barlow"/>
               </a:rPr>
-              <a:t>Rotation 4</a:t>
-            </a:r>
-          </a:p>
-        </p:txBody>
-      </p:sp>
-      <p:sp>
-        <p:nvSpPr>
-          <p:cNvPr id="20" name="Rectangle 19"/>
+              <a:t>Rotation 3</a:t>
+            </a:r>
+          </a:p>
+        </p:txBody>
+      </p:sp>
+      <p:sp>
+        <p:nvSpPr>
+          <p:cNvPr id="21" name="Rectangle 20"/>
           <p:cNvSpPr/>
           <p:nvPr/>
         </p:nvSpPr>
         <p:spPr>
           <a:xfrm>
-            <a:off x="8236800" y="9648000"/>
-            <a:ext cx="1735200" cy="1655999"/>
+            <a:off x="6357600" y="9644757"/>
+            <a:ext cx="1735200" cy="1440000"/>
           </a:xfrm>
           <a:prstGeom prst="rect">
             <a:avLst/>
@@ -4969,14 +5102,14 @@
       </p:sp>
       <p:sp>
         <p:nvSpPr>
-          <p:cNvPr id="21" name="TextBox 20"/>
+          <p:cNvPr id="22" name="TextBox 21"/>
           <p:cNvSpPr txBox="1"/>
           <p:nvPr/>
         </p:nvSpPr>
         <p:spPr>
           <a:xfrm>
-            <a:off x="8236800" y="9900000"/>
-            <a:ext cx="1735200" cy="1224000"/>
+            <a:off x="6357600" y="9860757"/>
+            <a:ext cx="1735200" cy="1152000"/>
           </a:xfrm>
           <a:prstGeom prst="rect">
             <a:avLst/>
@@ -5001,23 +5134,124 @@
                 </a:solidFill>
                 <a:latin typeface="Barlow Condensed"/>
               </a:rPr>
+              <a:t>15h30</a:t>
+            </a:r>
+          </a:p>
+          <a:p>
+            <a:pPr algn="ctr">
+              <a:lnSpc>
+                <a:spcPct val="120000"/>
+              </a:lnSpc>
+            </a:pPr>
+            <a:r>
+              <a:rPr sz="1800" b="0">
+                <a:solidFill>
+                  <a:srgbClr val="00B4B4"/>
+                </a:solidFill>
+                <a:latin typeface="Barlow Condensed"/>
+              </a:rPr>
+              <a:t>jusqu’à 16h00</a:t>
+            </a:r>
+          </a:p>
+          <a:p>
+            <a:pPr algn="ctr">
+              <a:lnSpc>
+                <a:spcPct val="150000"/>
+              </a:lnSpc>
+            </a:pPr>
+            <a:r>
+              <a:rPr sz="1400" b="0">
+                <a:solidFill>
+                  <a:srgbClr val="E3E3E3"/>
+                </a:solidFill>
+                <a:latin typeface="Barlow"/>
+              </a:rPr>
+              <a:t>Rotation 4</a:t>
+            </a:r>
+          </a:p>
+        </p:txBody>
+      </p:sp>
+      <p:sp>
+        <p:nvSpPr>
+          <p:cNvPr id="23" name="Rectangle 22"/>
+          <p:cNvSpPr/>
+          <p:nvPr/>
+        </p:nvSpPr>
+        <p:spPr>
+          <a:xfrm>
+            <a:off x="8236800" y="9644757"/>
+            <a:ext cx="1735200" cy="1440000"/>
+          </a:xfrm>
+          <a:prstGeom prst="rect">
+            <a:avLst/>
+          </a:prstGeom>
+          <a:solidFill>
+            <a:srgbClr val="2E2E50"/>
+          </a:solidFill>
+          <a:ln>
+            <a:noFill/>
+          </a:ln>
+          <a:effectLst/>
+        </p:spPr>
+        <p:txBody>
+          <a:bodyPr rtlCol="0" anchor="ctr"/>
+          <a:lstStyle/>
+          <a:p>
+            <a:pPr algn="ctr"/>
+          </a:p>
+        </p:txBody>
+      </p:sp>
+      <p:sp>
+        <p:nvSpPr>
+          <p:cNvPr id="24" name="TextBox 23"/>
+          <p:cNvSpPr txBox="1"/>
+          <p:nvPr/>
+        </p:nvSpPr>
+        <p:spPr>
+          <a:xfrm>
+            <a:off x="8236800" y="9860757"/>
+            <a:ext cx="1735200" cy="1152000"/>
+          </a:xfrm>
+          <a:prstGeom prst="rect">
+            <a:avLst/>
+          </a:prstGeom>
+          <a:noFill/>
+        </p:spPr>
+        <p:txBody>
+          <a:bodyPr wrap="square" anchor="t" lIns="0" rIns="0" tIns="0" bIns="0">
+            <a:spAutoFit/>
+          </a:bodyPr>
+          <a:lstStyle/>
+          <a:p>
+            <a:pPr algn="ctr">
+              <a:lnSpc>
+                <a:spcPct val="100000"/>
+              </a:lnSpc>
+            </a:pPr>
+            <a:r>
+              <a:rPr sz="3200" b="1">
+                <a:solidFill>
+                  <a:srgbClr val="00B4B4"/>
+                </a:solidFill>
+                <a:latin typeface="Barlow Condensed"/>
+              </a:rPr>
               <a:t>16h00</a:t>
             </a:r>
           </a:p>
           <a:p>
             <a:pPr algn="ctr">
               <a:lnSpc>
-                <a:spcPct val="115000"/>
-              </a:lnSpc>
-            </a:pPr>
-            <a:r>
-              <a:rPr sz="2000" b="0">
+                <a:spcPct val="120000"/>
+              </a:lnSpc>
+            </a:pPr>
+            <a:r>
+              <a:rPr sz="1800" b="0">
                 <a:solidFill>
                   <a:srgbClr val="00B4B4"/>
                 </a:solidFill>
                 <a:latin typeface="Barlow Condensed"/>
               </a:rPr>
-              <a:t>→ 16h30</a:t>
+              <a:t>jusqu’à 16h30</a:t>
             </a:r>
           </a:p>
           <a:p>
@@ -5040,7 +5274,7 @@
       </p:sp>
       <p:sp>
         <p:nvSpPr>
-          <p:cNvPr id="22" name="Rectangle 21"/>
+          <p:cNvPr id="25" name="Rectangle 24"/>
           <p:cNvSpPr/>
           <p:nvPr/>
         </p:nvSpPr>
@@ -5070,7 +5304,7 @@
       </p:sp>
       <p:sp>
         <p:nvSpPr>
-          <p:cNvPr id="23" name="Rectangle 22"/>
+          <p:cNvPr id="26" name="Rectangle 25"/>
           <p:cNvSpPr/>
           <p:nvPr/>
         </p:nvSpPr>
@@ -5100,7 +5334,7 @@
       </p:sp>
       <p:pic>
         <p:nvPicPr>
-          <p:cNvPr id="24" name="Picture 23" descr="testing-event-2026.png"/>
+          <p:cNvPr id="27" name="Picture 26" descr="testing-event-2026.png"/>
           <p:cNvPicPr>
             <a:picLocks noChangeAspect="1"/>
           </p:cNvPicPr>
@@ -5124,7 +5358,7 @@
       </p:pic>
       <p:sp>
         <p:nvSpPr>
-          <p:cNvPr id="25" name="TextBox 24"/>
+          <p:cNvPr id="28" name="TextBox 27"/>
           <p:cNvSpPr txBox="1"/>
           <p:nvPr/>
         </p:nvSpPr>
@@ -5520,8 +5754,8 @@
         </p:nvSpPr>
         <p:spPr>
           <a:xfrm>
-            <a:off x="720000" y="6336000"/>
-            <a:ext cx="9252000" cy="2304000"/>
+            <a:off x="720000" y="6263999"/>
+            <a:ext cx="9252000" cy="1069848"/>
           </a:xfrm>
           <a:prstGeom prst="rect">
             <a:avLst/>
@@ -5540,7 +5774,7 @@
               </a:lnSpc>
             </a:pPr>
             <a:r>
-              <a:rPr sz="3400" b="0">
+              <a:rPr sz="2600" b="0">
                 <a:solidFill>
                   <a:srgbClr val="E3E3E3"/>
                 </a:solidFill>
@@ -5559,8 +5793,8 @@
         </p:nvSpPr>
         <p:spPr>
           <a:xfrm>
-            <a:off x="720000" y="9072000"/>
-            <a:ext cx="9252000" cy="432000"/>
+            <a:off x="720000" y="7621847"/>
+            <a:ext cx="9252000" cy="396000"/>
           </a:xfrm>
           <a:prstGeom prst="rect">
             <a:avLst/>
@@ -5585,7 +5819,7 @@
                 </a:solidFill>
                 <a:latin typeface="Barlow Condensed"/>
               </a:rPr>
-              <a:t>5 ROTATIONS DE 30 MINUTES · 14h00 → 16h30</a:t>
+              <a:t>ANIMÉ PAR</a:t>
             </a:r>
           </a:p>
         </p:txBody>
@@ -5598,8 +5832,8 @@
         </p:nvSpPr>
         <p:spPr>
           <a:xfrm>
-            <a:off x="720000" y="9648000"/>
-            <a:ext cx="1735200" cy="1655999"/>
+            <a:off x="720000" y="8053847"/>
+            <a:ext cx="9252000" cy="762911"/>
           </a:xfrm>
           <a:prstGeom prst="rect">
             <a:avLst/>
@@ -5628,8 +5862,8 @@
         </p:nvSpPr>
         <p:spPr>
           <a:xfrm>
-            <a:off x="720000" y="9900000"/>
-            <a:ext cx="1735200" cy="1224000"/>
+            <a:off x="936000" y="8233847"/>
+            <a:ext cx="8820000" cy="402911"/>
           </a:xfrm>
           <a:prstGeom prst="rect">
             <a:avLst/>
@@ -5642,65 +5876,81 @@
           </a:bodyPr>
           <a:lstStyle/>
           <a:p>
-            <a:pPr algn="ctr">
+            <a:pPr algn="l">
+              <a:lnSpc>
+                <a:spcPct val="120000"/>
+              </a:lnSpc>
+            </a:pPr>
+            <a:r>
+              <a:rPr sz="1800" b="1">
+                <a:solidFill>
+                  <a:srgbClr val="00B4B4"/>
+                </a:solidFill>
+                <a:latin typeface="Barlow Condensed"/>
+              </a:rPr>
+              <a:t>Smartesting</a:t>
+            </a:r>
+            <a:r>
+              <a:rPr sz="2400" b="0">
+                <a:solidFill>
+                  <a:srgbClr val="FFFFFF"/>
+                </a:solidFill>
+                <a:latin typeface="Barlow"/>
+              </a:rPr>
+              <a:t>   Fabien NICOLET et Michel GUEZ</a:t>
+            </a:r>
+          </a:p>
+        </p:txBody>
+      </p:sp>
+      <p:sp>
+        <p:nvSpPr>
+          <p:cNvPr id="14" name="TextBox 13"/>
+          <p:cNvSpPr txBox="1"/>
+          <p:nvPr/>
+        </p:nvSpPr>
+        <p:spPr>
+          <a:xfrm>
+            <a:off x="720000" y="9140758"/>
+            <a:ext cx="9252000" cy="432000"/>
+          </a:xfrm>
+          <a:prstGeom prst="rect">
+            <a:avLst/>
+          </a:prstGeom>
+          <a:noFill/>
+        </p:spPr>
+        <p:txBody>
+          <a:bodyPr wrap="square" anchor="t" lIns="0" rIns="0" tIns="0" bIns="0">
+            <a:spAutoFit/>
+          </a:bodyPr>
+          <a:lstStyle/>
+          <a:p>
+            <a:pPr algn="l">
               <a:lnSpc>
                 <a:spcPct val="100000"/>
               </a:lnSpc>
             </a:pPr>
             <a:r>
-              <a:rPr sz="3200" b="1">
+              <a:rPr sz="2400" b="1">
                 <a:solidFill>
                   <a:srgbClr val="00B4B4"/>
                 </a:solidFill>
                 <a:latin typeface="Barlow Condensed"/>
               </a:rPr>
-              <a:t>14h00</a:t>
-            </a:r>
-          </a:p>
-          <a:p>
-            <a:pPr algn="ctr">
-              <a:lnSpc>
-                <a:spcPct val="115000"/>
-              </a:lnSpc>
-            </a:pPr>
-            <a:r>
-              <a:rPr sz="2000" b="0">
-                <a:solidFill>
-                  <a:srgbClr val="00B4B4"/>
-                </a:solidFill>
-                <a:latin typeface="Barlow Condensed"/>
-              </a:rPr>
-              <a:t>→ 14h30</a:t>
-            </a:r>
-          </a:p>
-          <a:p>
-            <a:pPr algn="ctr">
-              <a:lnSpc>
-                <a:spcPct val="150000"/>
-              </a:lnSpc>
-            </a:pPr>
-            <a:r>
-              <a:rPr sz="1400" b="0">
-                <a:solidFill>
-                  <a:srgbClr val="E3E3E3"/>
-                </a:solidFill>
-                <a:latin typeface="Barlow"/>
-              </a:rPr>
-              <a:t>Rotation 1</a:t>
-            </a:r>
-          </a:p>
-        </p:txBody>
-      </p:sp>
-      <p:sp>
-        <p:nvSpPr>
-          <p:cNvPr id="14" name="Rectangle 13"/>
+              <a:t>5 ROTATIONS DE 30 MINUTES · 14h00 à 16h30</a:t>
+            </a:r>
+          </a:p>
+        </p:txBody>
+      </p:sp>
+      <p:sp>
+        <p:nvSpPr>
+          <p:cNvPr id="15" name="Rectangle 14"/>
           <p:cNvSpPr/>
           <p:nvPr/>
         </p:nvSpPr>
         <p:spPr>
           <a:xfrm>
-            <a:off x="2599200" y="9648000"/>
-            <a:ext cx="1735200" cy="1655999"/>
+            <a:off x="720000" y="9644757"/>
+            <a:ext cx="1735200" cy="1440000"/>
           </a:xfrm>
           <a:prstGeom prst="rect">
             <a:avLst/>
@@ -5723,14 +5973,14 @@
       </p:sp>
       <p:sp>
         <p:nvSpPr>
-          <p:cNvPr id="15" name="TextBox 14"/>
+          <p:cNvPr id="16" name="TextBox 15"/>
           <p:cNvSpPr txBox="1"/>
           <p:nvPr/>
         </p:nvSpPr>
         <p:spPr>
           <a:xfrm>
-            <a:off x="2599200" y="9900000"/>
-            <a:ext cx="1735200" cy="1224000"/>
+            <a:off x="720000" y="9860757"/>
+            <a:ext cx="1735200" cy="1152000"/>
           </a:xfrm>
           <a:prstGeom prst="rect">
             <a:avLst/>
@@ -5755,23 +6005,23 @@
                 </a:solidFill>
                 <a:latin typeface="Barlow Condensed"/>
               </a:rPr>
-              <a:t>14h30</a:t>
-            </a:r>
-          </a:p>
-          <a:p>
-            <a:pPr algn="ctr">
-              <a:lnSpc>
-                <a:spcPct val="115000"/>
-              </a:lnSpc>
-            </a:pPr>
-            <a:r>
-              <a:rPr sz="2000" b="0">
+              <a:t>14h00</a:t>
+            </a:r>
+          </a:p>
+          <a:p>
+            <a:pPr algn="ctr">
+              <a:lnSpc>
+                <a:spcPct val="120000"/>
+              </a:lnSpc>
+            </a:pPr>
+            <a:r>
+              <a:rPr sz="1800" b="0">
                 <a:solidFill>
                   <a:srgbClr val="00B4B4"/>
                 </a:solidFill>
                 <a:latin typeface="Barlow Condensed"/>
               </a:rPr>
-              <a:t>→ 15h00</a:t>
+              <a:t>jusqu’à 14h30</a:t>
             </a:r>
           </a:p>
           <a:p>
@@ -5787,21 +6037,21 @@
                 </a:solidFill>
                 <a:latin typeface="Barlow"/>
               </a:rPr>
-              <a:t>Rotation 2</a:t>
-            </a:r>
-          </a:p>
-        </p:txBody>
-      </p:sp>
-      <p:sp>
-        <p:nvSpPr>
-          <p:cNvPr id="16" name="Rectangle 15"/>
+              <a:t>Rotation 1</a:t>
+            </a:r>
+          </a:p>
+        </p:txBody>
+      </p:sp>
+      <p:sp>
+        <p:nvSpPr>
+          <p:cNvPr id="17" name="Rectangle 16"/>
           <p:cNvSpPr/>
           <p:nvPr/>
         </p:nvSpPr>
         <p:spPr>
           <a:xfrm>
-            <a:off x="4478400" y="9648000"/>
-            <a:ext cx="1735200" cy="1655999"/>
+            <a:off x="2599200" y="9644757"/>
+            <a:ext cx="1735200" cy="1440000"/>
           </a:xfrm>
           <a:prstGeom prst="rect">
             <a:avLst/>
@@ -5824,14 +6074,14 @@
       </p:sp>
       <p:sp>
         <p:nvSpPr>
-          <p:cNvPr id="17" name="TextBox 16"/>
+          <p:cNvPr id="18" name="TextBox 17"/>
           <p:cNvSpPr txBox="1"/>
           <p:nvPr/>
         </p:nvSpPr>
         <p:spPr>
           <a:xfrm>
-            <a:off x="4478400" y="9900000"/>
-            <a:ext cx="1735200" cy="1224000"/>
+            <a:off x="2599200" y="9860757"/>
+            <a:ext cx="1735200" cy="1152000"/>
           </a:xfrm>
           <a:prstGeom prst="rect">
             <a:avLst/>
@@ -5856,23 +6106,23 @@
                 </a:solidFill>
                 <a:latin typeface="Barlow Condensed"/>
               </a:rPr>
-              <a:t>15h00</a:t>
-            </a:r>
-          </a:p>
-          <a:p>
-            <a:pPr algn="ctr">
-              <a:lnSpc>
-                <a:spcPct val="115000"/>
-              </a:lnSpc>
-            </a:pPr>
-            <a:r>
-              <a:rPr sz="2000" b="0">
+              <a:t>14h30</a:t>
+            </a:r>
+          </a:p>
+          <a:p>
+            <a:pPr algn="ctr">
+              <a:lnSpc>
+                <a:spcPct val="120000"/>
+              </a:lnSpc>
+            </a:pPr>
+            <a:r>
+              <a:rPr sz="1800" b="0">
                 <a:solidFill>
                   <a:srgbClr val="00B4B4"/>
                 </a:solidFill>
                 <a:latin typeface="Barlow Condensed"/>
               </a:rPr>
-              <a:t>→ 15h30</a:t>
+              <a:t>jusqu’à 15h00</a:t>
             </a:r>
           </a:p>
           <a:p>
@@ -5888,21 +6138,21 @@
                 </a:solidFill>
                 <a:latin typeface="Barlow"/>
               </a:rPr>
-              <a:t>Rotation 3</a:t>
-            </a:r>
-          </a:p>
-        </p:txBody>
-      </p:sp>
-      <p:sp>
-        <p:nvSpPr>
-          <p:cNvPr id="18" name="Rectangle 17"/>
+              <a:t>Rotation 2</a:t>
+            </a:r>
+          </a:p>
+        </p:txBody>
+      </p:sp>
+      <p:sp>
+        <p:nvSpPr>
+          <p:cNvPr id="19" name="Rectangle 18"/>
           <p:cNvSpPr/>
           <p:nvPr/>
         </p:nvSpPr>
         <p:spPr>
           <a:xfrm>
-            <a:off x="6357600" y="9648000"/>
-            <a:ext cx="1735200" cy="1655999"/>
+            <a:off x="4478400" y="9644757"/>
+            <a:ext cx="1735200" cy="1440000"/>
           </a:xfrm>
           <a:prstGeom prst="rect">
             <a:avLst/>
@@ -5925,14 +6175,14 @@
       </p:sp>
       <p:sp>
         <p:nvSpPr>
-          <p:cNvPr id="19" name="TextBox 18"/>
+          <p:cNvPr id="20" name="TextBox 19"/>
           <p:cNvSpPr txBox="1"/>
           <p:nvPr/>
         </p:nvSpPr>
         <p:spPr>
           <a:xfrm>
-            <a:off x="6357600" y="9900000"/>
-            <a:ext cx="1735200" cy="1224000"/>
+            <a:off x="4478400" y="9860757"/>
+            <a:ext cx="1735200" cy="1152000"/>
           </a:xfrm>
           <a:prstGeom prst="rect">
             <a:avLst/>
@@ -5957,23 +6207,23 @@
                 </a:solidFill>
                 <a:latin typeface="Barlow Condensed"/>
               </a:rPr>
-              <a:t>15h30</a:t>
-            </a:r>
-          </a:p>
-          <a:p>
-            <a:pPr algn="ctr">
-              <a:lnSpc>
-                <a:spcPct val="115000"/>
-              </a:lnSpc>
-            </a:pPr>
-            <a:r>
-              <a:rPr sz="2000" b="0">
+              <a:t>15h00</a:t>
+            </a:r>
+          </a:p>
+          <a:p>
+            <a:pPr algn="ctr">
+              <a:lnSpc>
+                <a:spcPct val="120000"/>
+              </a:lnSpc>
+            </a:pPr>
+            <a:r>
+              <a:rPr sz="1800" b="0">
                 <a:solidFill>
                   <a:srgbClr val="00B4B4"/>
                 </a:solidFill>
                 <a:latin typeface="Barlow Condensed"/>
               </a:rPr>
-              <a:t>→ 16h00</a:t>
+              <a:t>jusqu’à 15h30</a:t>
             </a:r>
           </a:p>
           <a:p>
@@ -5989,21 +6239,21 @@
                 </a:solidFill>
                 <a:latin typeface="Barlow"/>
               </a:rPr>
-              <a:t>Rotation 4</a:t>
-            </a:r>
-          </a:p>
-        </p:txBody>
-      </p:sp>
-      <p:sp>
-        <p:nvSpPr>
-          <p:cNvPr id="20" name="Rectangle 19"/>
+              <a:t>Rotation 3</a:t>
+            </a:r>
+          </a:p>
+        </p:txBody>
+      </p:sp>
+      <p:sp>
+        <p:nvSpPr>
+          <p:cNvPr id="21" name="Rectangle 20"/>
           <p:cNvSpPr/>
           <p:nvPr/>
         </p:nvSpPr>
         <p:spPr>
           <a:xfrm>
-            <a:off x="8236800" y="9648000"/>
-            <a:ext cx="1735200" cy="1655999"/>
+            <a:off x="6357600" y="9644757"/>
+            <a:ext cx="1735200" cy="1440000"/>
           </a:xfrm>
           <a:prstGeom prst="rect">
             <a:avLst/>
@@ -6026,14 +6276,14 @@
       </p:sp>
       <p:sp>
         <p:nvSpPr>
-          <p:cNvPr id="21" name="TextBox 20"/>
+          <p:cNvPr id="22" name="TextBox 21"/>
           <p:cNvSpPr txBox="1"/>
           <p:nvPr/>
         </p:nvSpPr>
         <p:spPr>
           <a:xfrm>
-            <a:off x="8236800" y="9900000"/>
-            <a:ext cx="1735200" cy="1224000"/>
+            <a:off x="6357600" y="9860757"/>
+            <a:ext cx="1735200" cy="1152000"/>
           </a:xfrm>
           <a:prstGeom prst="rect">
             <a:avLst/>
@@ -6058,23 +6308,124 @@
                 </a:solidFill>
                 <a:latin typeface="Barlow Condensed"/>
               </a:rPr>
+              <a:t>15h30</a:t>
+            </a:r>
+          </a:p>
+          <a:p>
+            <a:pPr algn="ctr">
+              <a:lnSpc>
+                <a:spcPct val="120000"/>
+              </a:lnSpc>
+            </a:pPr>
+            <a:r>
+              <a:rPr sz="1800" b="0">
+                <a:solidFill>
+                  <a:srgbClr val="00B4B4"/>
+                </a:solidFill>
+                <a:latin typeface="Barlow Condensed"/>
+              </a:rPr>
+              <a:t>jusqu’à 16h00</a:t>
+            </a:r>
+          </a:p>
+          <a:p>
+            <a:pPr algn="ctr">
+              <a:lnSpc>
+                <a:spcPct val="150000"/>
+              </a:lnSpc>
+            </a:pPr>
+            <a:r>
+              <a:rPr sz="1400" b="0">
+                <a:solidFill>
+                  <a:srgbClr val="E3E3E3"/>
+                </a:solidFill>
+                <a:latin typeface="Barlow"/>
+              </a:rPr>
+              <a:t>Rotation 4</a:t>
+            </a:r>
+          </a:p>
+        </p:txBody>
+      </p:sp>
+      <p:sp>
+        <p:nvSpPr>
+          <p:cNvPr id="23" name="Rectangle 22"/>
+          <p:cNvSpPr/>
+          <p:nvPr/>
+        </p:nvSpPr>
+        <p:spPr>
+          <a:xfrm>
+            <a:off x="8236800" y="9644757"/>
+            <a:ext cx="1735200" cy="1440000"/>
+          </a:xfrm>
+          <a:prstGeom prst="rect">
+            <a:avLst/>
+          </a:prstGeom>
+          <a:solidFill>
+            <a:srgbClr val="2E2E50"/>
+          </a:solidFill>
+          <a:ln>
+            <a:noFill/>
+          </a:ln>
+          <a:effectLst/>
+        </p:spPr>
+        <p:txBody>
+          <a:bodyPr rtlCol="0" anchor="ctr"/>
+          <a:lstStyle/>
+          <a:p>
+            <a:pPr algn="ctr"/>
+          </a:p>
+        </p:txBody>
+      </p:sp>
+      <p:sp>
+        <p:nvSpPr>
+          <p:cNvPr id="24" name="TextBox 23"/>
+          <p:cNvSpPr txBox="1"/>
+          <p:nvPr/>
+        </p:nvSpPr>
+        <p:spPr>
+          <a:xfrm>
+            <a:off x="8236800" y="9860757"/>
+            <a:ext cx="1735200" cy="1152000"/>
+          </a:xfrm>
+          <a:prstGeom prst="rect">
+            <a:avLst/>
+          </a:prstGeom>
+          <a:noFill/>
+        </p:spPr>
+        <p:txBody>
+          <a:bodyPr wrap="square" anchor="t" lIns="0" rIns="0" tIns="0" bIns="0">
+            <a:spAutoFit/>
+          </a:bodyPr>
+          <a:lstStyle/>
+          <a:p>
+            <a:pPr algn="ctr">
+              <a:lnSpc>
+                <a:spcPct val="100000"/>
+              </a:lnSpc>
+            </a:pPr>
+            <a:r>
+              <a:rPr sz="3200" b="1">
+                <a:solidFill>
+                  <a:srgbClr val="00B4B4"/>
+                </a:solidFill>
+                <a:latin typeface="Barlow Condensed"/>
+              </a:rPr>
               <a:t>16h00</a:t>
             </a:r>
           </a:p>
           <a:p>
             <a:pPr algn="ctr">
               <a:lnSpc>
-                <a:spcPct val="115000"/>
-              </a:lnSpc>
-            </a:pPr>
-            <a:r>
-              <a:rPr sz="2000" b="0">
+                <a:spcPct val="120000"/>
+              </a:lnSpc>
+            </a:pPr>
+            <a:r>
+              <a:rPr sz="1800" b="0">
                 <a:solidFill>
                   <a:srgbClr val="00B4B4"/>
                 </a:solidFill>
                 <a:latin typeface="Barlow Condensed"/>
               </a:rPr>
-              <a:t>→ 16h30</a:t>
+              <a:t>jusqu’à 16h30</a:t>
             </a:r>
           </a:p>
           <a:p>
@@ -6097,7 +6448,7 @@
       </p:sp>
       <p:sp>
         <p:nvSpPr>
-          <p:cNvPr id="22" name="Rectangle 21"/>
+          <p:cNvPr id="25" name="Rectangle 24"/>
           <p:cNvSpPr/>
           <p:nvPr/>
         </p:nvSpPr>
@@ -6127,7 +6478,7 @@
       </p:sp>
       <p:sp>
         <p:nvSpPr>
-          <p:cNvPr id="23" name="Rectangle 22"/>
+          <p:cNvPr id="26" name="Rectangle 25"/>
           <p:cNvSpPr/>
           <p:nvPr/>
         </p:nvSpPr>
@@ -6157,7 +6508,7 @@
       </p:sp>
       <p:pic>
         <p:nvPicPr>
-          <p:cNvPr id="24" name="Picture 23" descr="testing-event-2026.png"/>
+          <p:cNvPr id="27" name="Picture 26" descr="testing-event-2026.png"/>
           <p:cNvPicPr>
             <a:picLocks noChangeAspect="1"/>
           </p:cNvPicPr>
@@ -6181,7 +6532,7 @@
       </p:pic>
       <p:sp>
         <p:nvSpPr>
-          <p:cNvPr id="25" name="TextBox 24"/>
+          <p:cNvPr id="28" name="TextBox 27"/>
           <p:cNvSpPr txBox="1"/>
           <p:nvPr/>
         </p:nvSpPr>
@@ -6577,8 +6928,8 @@
         </p:nvSpPr>
         <p:spPr>
           <a:xfrm>
-            <a:off x="720000" y="6336000"/>
-            <a:ext cx="9252000" cy="2304000"/>
+            <a:off x="720000" y="6263999"/>
+            <a:ext cx="9252000" cy="1069848"/>
           </a:xfrm>
           <a:prstGeom prst="rect">
             <a:avLst/>
@@ -6597,7 +6948,7 @@
               </a:lnSpc>
             </a:pPr>
             <a:r>
-              <a:rPr sz="3400" b="0">
+              <a:rPr sz="2600" b="0">
                 <a:solidFill>
                   <a:srgbClr val="E3E3E3"/>
                 </a:solidFill>
@@ -6616,8 +6967,8 @@
         </p:nvSpPr>
         <p:spPr>
           <a:xfrm>
-            <a:off x="720000" y="9072000"/>
-            <a:ext cx="9252000" cy="432000"/>
+            <a:off x="720000" y="7621847"/>
+            <a:ext cx="9252000" cy="396000"/>
           </a:xfrm>
           <a:prstGeom prst="rect">
             <a:avLst/>
@@ -6642,7 +6993,7 @@
                 </a:solidFill>
                 <a:latin typeface="Barlow Condensed"/>
               </a:rPr>
-              <a:t>5 ROTATIONS DE 30 MINUTES · 14h00 → 16h30</a:t>
+              <a:t>ANIMÉ PAR</a:t>
             </a:r>
           </a:p>
         </p:txBody>
@@ -6655,8 +7006,8 @@
         </p:nvSpPr>
         <p:spPr>
           <a:xfrm>
-            <a:off x="720000" y="9648000"/>
-            <a:ext cx="1735200" cy="1655999"/>
+            <a:off x="720000" y="8053847"/>
+            <a:ext cx="9252000" cy="762911"/>
           </a:xfrm>
           <a:prstGeom prst="rect">
             <a:avLst/>
@@ -6685,8 +7036,8 @@
         </p:nvSpPr>
         <p:spPr>
           <a:xfrm>
-            <a:off x="720000" y="9900000"/>
-            <a:ext cx="1735200" cy="1224000"/>
+            <a:off x="936000" y="8233847"/>
+            <a:ext cx="8820000" cy="402911"/>
           </a:xfrm>
           <a:prstGeom prst="rect">
             <a:avLst/>
@@ -6699,65 +7050,81 @@
           </a:bodyPr>
           <a:lstStyle/>
           <a:p>
-            <a:pPr algn="ctr">
+            <a:pPr algn="l">
+              <a:lnSpc>
+                <a:spcPct val="120000"/>
+              </a:lnSpc>
+            </a:pPr>
+            <a:r>
+              <a:rPr sz="1800" b="1">
+                <a:solidFill>
+                  <a:srgbClr val="00B4B4"/>
+                </a:solidFill>
+                <a:latin typeface="Barlow Condensed"/>
+              </a:rPr>
+              <a:t>TFC</a:t>
+            </a:r>
+            <a:r>
+              <a:rPr sz="2400" b="0">
+                <a:solidFill>
+                  <a:srgbClr val="FFFFFF"/>
+                </a:solidFill>
+                <a:latin typeface="Barlow"/>
+              </a:rPr>
+              <a:t>   Jérémy DELAUX</a:t>
+            </a:r>
+          </a:p>
+        </p:txBody>
+      </p:sp>
+      <p:sp>
+        <p:nvSpPr>
+          <p:cNvPr id="14" name="TextBox 13"/>
+          <p:cNvSpPr txBox="1"/>
+          <p:nvPr/>
+        </p:nvSpPr>
+        <p:spPr>
+          <a:xfrm>
+            <a:off x="720000" y="9140758"/>
+            <a:ext cx="9252000" cy="432000"/>
+          </a:xfrm>
+          <a:prstGeom prst="rect">
+            <a:avLst/>
+          </a:prstGeom>
+          <a:noFill/>
+        </p:spPr>
+        <p:txBody>
+          <a:bodyPr wrap="square" anchor="t" lIns="0" rIns="0" tIns="0" bIns="0">
+            <a:spAutoFit/>
+          </a:bodyPr>
+          <a:lstStyle/>
+          <a:p>
+            <a:pPr algn="l">
               <a:lnSpc>
                 <a:spcPct val="100000"/>
               </a:lnSpc>
             </a:pPr>
             <a:r>
-              <a:rPr sz="3200" b="1">
+              <a:rPr sz="2400" b="1">
                 <a:solidFill>
                   <a:srgbClr val="00B4B4"/>
                 </a:solidFill>
                 <a:latin typeface="Barlow Condensed"/>
               </a:rPr>
-              <a:t>14h00</a:t>
-            </a:r>
-          </a:p>
-          <a:p>
-            <a:pPr algn="ctr">
-              <a:lnSpc>
-                <a:spcPct val="115000"/>
-              </a:lnSpc>
-            </a:pPr>
-            <a:r>
-              <a:rPr sz="2000" b="0">
-                <a:solidFill>
-                  <a:srgbClr val="00B4B4"/>
-                </a:solidFill>
-                <a:latin typeface="Barlow Condensed"/>
-              </a:rPr>
-              <a:t>→ 14h30</a:t>
-            </a:r>
-          </a:p>
-          <a:p>
-            <a:pPr algn="ctr">
-              <a:lnSpc>
-                <a:spcPct val="150000"/>
-              </a:lnSpc>
-            </a:pPr>
-            <a:r>
-              <a:rPr sz="1400" b="0">
-                <a:solidFill>
-                  <a:srgbClr val="E3E3E3"/>
-                </a:solidFill>
-                <a:latin typeface="Barlow"/>
-              </a:rPr>
-              <a:t>Rotation 1</a:t>
-            </a:r>
-          </a:p>
-        </p:txBody>
-      </p:sp>
-      <p:sp>
-        <p:nvSpPr>
-          <p:cNvPr id="14" name="Rectangle 13"/>
+              <a:t>5 ROTATIONS DE 30 MINUTES · 14h00 à 16h30</a:t>
+            </a:r>
+          </a:p>
+        </p:txBody>
+      </p:sp>
+      <p:sp>
+        <p:nvSpPr>
+          <p:cNvPr id="15" name="Rectangle 14"/>
           <p:cNvSpPr/>
           <p:nvPr/>
         </p:nvSpPr>
         <p:spPr>
           <a:xfrm>
-            <a:off x="2599200" y="9648000"/>
-            <a:ext cx="1735200" cy="1655999"/>
+            <a:off x="720000" y="9644757"/>
+            <a:ext cx="1735200" cy="1440000"/>
           </a:xfrm>
           <a:prstGeom prst="rect">
             <a:avLst/>
@@ -6780,14 +7147,14 @@
       </p:sp>
       <p:sp>
         <p:nvSpPr>
-          <p:cNvPr id="15" name="TextBox 14"/>
+          <p:cNvPr id="16" name="TextBox 15"/>
           <p:cNvSpPr txBox="1"/>
           <p:nvPr/>
         </p:nvSpPr>
         <p:spPr>
           <a:xfrm>
-            <a:off x="2599200" y="9900000"/>
-            <a:ext cx="1735200" cy="1224000"/>
+            <a:off x="720000" y="9860757"/>
+            <a:ext cx="1735200" cy="1152000"/>
           </a:xfrm>
           <a:prstGeom prst="rect">
             <a:avLst/>
@@ -6812,23 +7179,23 @@
                 </a:solidFill>
                 <a:latin typeface="Barlow Condensed"/>
               </a:rPr>
-              <a:t>14h30</a:t>
-            </a:r>
-          </a:p>
-          <a:p>
-            <a:pPr algn="ctr">
-              <a:lnSpc>
-                <a:spcPct val="115000"/>
-              </a:lnSpc>
-            </a:pPr>
-            <a:r>
-              <a:rPr sz="2000" b="0">
+              <a:t>14h00</a:t>
+            </a:r>
+          </a:p>
+          <a:p>
+            <a:pPr algn="ctr">
+              <a:lnSpc>
+                <a:spcPct val="120000"/>
+              </a:lnSpc>
+            </a:pPr>
+            <a:r>
+              <a:rPr sz="1800" b="0">
                 <a:solidFill>
                   <a:srgbClr val="00B4B4"/>
                 </a:solidFill>
                 <a:latin typeface="Barlow Condensed"/>
               </a:rPr>
-              <a:t>→ 15h00</a:t>
+              <a:t>jusqu’à 14h30</a:t>
             </a:r>
           </a:p>
           <a:p>
@@ -6844,21 +7211,21 @@
                 </a:solidFill>
                 <a:latin typeface="Barlow"/>
               </a:rPr>
-              <a:t>Rotation 2</a:t>
-            </a:r>
-          </a:p>
-        </p:txBody>
-      </p:sp>
-      <p:sp>
-        <p:nvSpPr>
-          <p:cNvPr id="16" name="Rectangle 15"/>
+              <a:t>Rotation 1</a:t>
+            </a:r>
+          </a:p>
+        </p:txBody>
+      </p:sp>
+      <p:sp>
+        <p:nvSpPr>
+          <p:cNvPr id="17" name="Rectangle 16"/>
           <p:cNvSpPr/>
           <p:nvPr/>
         </p:nvSpPr>
         <p:spPr>
           <a:xfrm>
-            <a:off x="4478400" y="9648000"/>
-            <a:ext cx="1735200" cy="1655999"/>
+            <a:off x="2599200" y="9644757"/>
+            <a:ext cx="1735200" cy="1440000"/>
           </a:xfrm>
           <a:prstGeom prst="rect">
             <a:avLst/>
@@ -6881,14 +7248,14 @@
       </p:sp>
       <p:sp>
         <p:nvSpPr>
-          <p:cNvPr id="17" name="TextBox 16"/>
+          <p:cNvPr id="18" name="TextBox 17"/>
           <p:cNvSpPr txBox="1"/>
           <p:nvPr/>
         </p:nvSpPr>
         <p:spPr>
           <a:xfrm>
-            <a:off x="4478400" y="9900000"/>
-            <a:ext cx="1735200" cy="1224000"/>
+            <a:off x="2599200" y="9860757"/>
+            <a:ext cx="1735200" cy="1152000"/>
           </a:xfrm>
           <a:prstGeom prst="rect">
             <a:avLst/>
@@ -6913,23 +7280,23 @@
                 </a:solidFill>
                 <a:latin typeface="Barlow Condensed"/>
               </a:rPr>
-              <a:t>15h00</a:t>
-            </a:r>
-          </a:p>
-          <a:p>
-            <a:pPr algn="ctr">
-              <a:lnSpc>
-                <a:spcPct val="115000"/>
-              </a:lnSpc>
-            </a:pPr>
-            <a:r>
-              <a:rPr sz="2000" b="0">
+              <a:t>14h30</a:t>
+            </a:r>
+          </a:p>
+          <a:p>
+            <a:pPr algn="ctr">
+              <a:lnSpc>
+                <a:spcPct val="120000"/>
+              </a:lnSpc>
+            </a:pPr>
+            <a:r>
+              <a:rPr sz="1800" b="0">
                 <a:solidFill>
                   <a:srgbClr val="00B4B4"/>
                 </a:solidFill>
                 <a:latin typeface="Barlow Condensed"/>
               </a:rPr>
-              <a:t>→ 15h30</a:t>
+              <a:t>jusqu’à 15h00</a:t>
             </a:r>
           </a:p>
           <a:p>
@@ -6945,21 +7312,21 @@
                 </a:solidFill>
                 <a:latin typeface="Barlow"/>
               </a:rPr>
-              <a:t>Rotation 3</a:t>
-            </a:r>
-          </a:p>
-        </p:txBody>
-      </p:sp>
-      <p:sp>
-        <p:nvSpPr>
-          <p:cNvPr id="18" name="Rectangle 17"/>
+              <a:t>Rotation 2</a:t>
+            </a:r>
+          </a:p>
+        </p:txBody>
+      </p:sp>
+      <p:sp>
+        <p:nvSpPr>
+          <p:cNvPr id="19" name="Rectangle 18"/>
           <p:cNvSpPr/>
           <p:nvPr/>
         </p:nvSpPr>
         <p:spPr>
           <a:xfrm>
-            <a:off x="6357600" y="9648000"/>
-            <a:ext cx="1735200" cy="1655999"/>
+            <a:off x="4478400" y="9644757"/>
+            <a:ext cx="1735200" cy="1440000"/>
           </a:xfrm>
           <a:prstGeom prst="rect">
             <a:avLst/>
@@ -6982,14 +7349,14 @@
       </p:sp>
       <p:sp>
         <p:nvSpPr>
-          <p:cNvPr id="19" name="TextBox 18"/>
+          <p:cNvPr id="20" name="TextBox 19"/>
           <p:cNvSpPr txBox="1"/>
           <p:nvPr/>
         </p:nvSpPr>
         <p:spPr>
           <a:xfrm>
-            <a:off x="6357600" y="9900000"/>
-            <a:ext cx="1735200" cy="1224000"/>
+            <a:off x="4478400" y="9860757"/>
+            <a:ext cx="1735200" cy="1152000"/>
           </a:xfrm>
           <a:prstGeom prst="rect">
             <a:avLst/>
@@ -7014,23 +7381,23 @@
                 </a:solidFill>
                 <a:latin typeface="Barlow Condensed"/>
               </a:rPr>
-              <a:t>15h30</a:t>
-            </a:r>
-          </a:p>
-          <a:p>
-            <a:pPr algn="ctr">
-              <a:lnSpc>
-                <a:spcPct val="115000"/>
-              </a:lnSpc>
-            </a:pPr>
-            <a:r>
-              <a:rPr sz="2000" b="0">
+              <a:t>15h00</a:t>
+            </a:r>
+          </a:p>
+          <a:p>
+            <a:pPr algn="ctr">
+              <a:lnSpc>
+                <a:spcPct val="120000"/>
+              </a:lnSpc>
+            </a:pPr>
+            <a:r>
+              <a:rPr sz="1800" b="0">
                 <a:solidFill>
                   <a:srgbClr val="00B4B4"/>
                 </a:solidFill>
                 <a:latin typeface="Barlow Condensed"/>
               </a:rPr>
-              <a:t>→ 16h00</a:t>
+              <a:t>jusqu’à 15h30</a:t>
             </a:r>
           </a:p>
           <a:p>
@@ -7046,21 +7413,21 @@
                 </a:solidFill>
                 <a:latin typeface="Barlow"/>
               </a:rPr>
-              <a:t>Rotation 4</a:t>
-            </a:r>
-          </a:p>
-        </p:txBody>
-      </p:sp>
-      <p:sp>
-        <p:nvSpPr>
-          <p:cNvPr id="20" name="Rectangle 19"/>
+              <a:t>Rotation 3</a:t>
+            </a:r>
+          </a:p>
+        </p:txBody>
+      </p:sp>
+      <p:sp>
+        <p:nvSpPr>
+          <p:cNvPr id="21" name="Rectangle 20"/>
           <p:cNvSpPr/>
           <p:nvPr/>
         </p:nvSpPr>
         <p:spPr>
           <a:xfrm>
-            <a:off x="8236800" y="9648000"/>
-            <a:ext cx="1735200" cy="1655999"/>
+            <a:off x="6357600" y="9644757"/>
+            <a:ext cx="1735200" cy="1440000"/>
           </a:xfrm>
           <a:prstGeom prst="rect">
             <a:avLst/>
@@ -7083,14 +7450,14 @@
       </p:sp>
       <p:sp>
         <p:nvSpPr>
-          <p:cNvPr id="21" name="TextBox 20"/>
+          <p:cNvPr id="22" name="TextBox 21"/>
           <p:cNvSpPr txBox="1"/>
           <p:nvPr/>
         </p:nvSpPr>
         <p:spPr>
           <a:xfrm>
-            <a:off x="8236800" y="9900000"/>
-            <a:ext cx="1735200" cy="1224000"/>
+            <a:off x="6357600" y="9860757"/>
+            <a:ext cx="1735200" cy="1152000"/>
           </a:xfrm>
           <a:prstGeom prst="rect">
             <a:avLst/>
@@ -7115,23 +7482,124 @@
                 </a:solidFill>
                 <a:latin typeface="Barlow Condensed"/>
               </a:rPr>
+              <a:t>15h30</a:t>
+            </a:r>
+          </a:p>
+          <a:p>
+            <a:pPr algn="ctr">
+              <a:lnSpc>
+                <a:spcPct val="120000"/>
+              </a:lnSpc>
+            </a:pPr>
+            <a:r>
+              <a:rPr sz="1800" b="0">
+                <a:solidFill>
+                  <a:srgbClr val="00B4B4"/>
+                </a:solidFill>
+                <a:latin typeface="Barlow Condensed"/>
+              </a:rPr>
+              <a:t>jusqu’à 16h00</a:t>
+            </a:r>
+          </a:p>
+          <a:p>
+            <a:pPr algn="ctr">
+              <a:lnSpc>
+                <a:spcPct val="150000"/>
+              </a:lnSpc>
+            </a:pPr>
+            <a:r>
+              <a:rPr sz="1400" b="0">
+                <a:solidFill>
+                  <a:srgbClr val="E3E3E3"/>
+                </a:solidFill>
+                <a:latin typeface="Barlow"/>
+              </a:rPr>
+              <a:t>Rotation 4</a:t>
+            </a:r>
+          </a:p>
+        </p:txBody>
+      </p:sp>
+      <p:sp>
+        <p:nvSpPr>
+          <p:cNvPr id="23" name="Rectangle 22"/>
+          <p:cNvSpPr/>
+          <p:nvPr/>
+        </p:nvSpPr>
+        <p:spPr>
+          <a:xfrm>
+            <a:off x="8236800" y="9644757"/>
+            <a:ext cx="1735200" cy="1440000"/>
+          </a:xfrm>
+          <a:prstGeom prst="rect">
+            <a:avLst/>
+          </a:prstGeom>
+          <a:solidFill>
+            <a:srgbClr val="2E2E50"/>
+          </a:solidFill>
+          <a:ln>
+            <a:noFill/>
+          </a:ln>
+          <a:effectLst/>
+        </p:spPr>
+        <p:txBody>
+          <a:bodyPr rtlCol="0" anchor="ctr"/>
+          <a:lstStyle/>
+          <a:p>
+            <a:pPr algn="ctr"/>
+          </a:p>
+        </p:txBody>
+      </p:sp>
+      <p:sp>
+        <p:nvSpPr>
+          <p:cNvPr id="24" name="TextBox 23"/>
+          <p:cNvSpPr txBox="1"/>
+          <p:nvPr/>
+        </p:nvSpPr>
+        <p:spPr>
+          <a:xfrm>
+            <a:off x="8236800" y="9860757"/>
+            <a:ext cx="1735200" cy="1152000"/>
+          </a:xfrm>
+          <a:prstGeom prst="rect">
+            <a:avLst/>
+          </a:prstGeom>
+          <a:noFill/>
+        </p:spPr>
+        <p:txBody>
+          <a:bodyPr wrap="square" anchor="t" lIns="0" rIns="0" tIns="0" bIns="0">
+            <a:spAutoFit/>
+          </a:bodyPr>
+          <a:lstStyle/>
+          <a:p>
+            <a:pPr algn="ctr">
+              <a:lnSpc>
+                <a:spcPct val="100000"/>
+              </a:lnSpc>
+            </a:pPr>
+            <a:r>
+              <a:rPr sz="3200" b="1">
+                <a:solidFill>
+                  <a:srgbClr val="00B4B4"/>
+                </a:solidFill>
+                <a:latin typeface="Barlow Condensed"/>
+              </a:rPr>
               <a:t>16h00</a:t>
             </a:r>
           </a:p>
           <a:p>
             <a:pPr algn="ctr">
               <a:lnSpc>
-                <a:spcPct val="115000"/>
-              </a:lnSpc>
-            </a:pPr>
-            <a:r>
-              <a:rPr sz="2000" b="0">
+                <a:spcPct val="120000"/>
+              </a:lnSpc>
+            </a:pPr>
+            <a:r>
+              <a:rPr sz="1800" b="0">
                 <a:solidFill>
                   <a:srgbClr val="00B4B4"/>
                 </a:solidFill>
                 <a:latin typeface="Barlow Condensed"/>
               </a:rPr>
-              <a:t>→ 16h30</a:t>
+              <a:t>jusqu’à 16h30</a:t>
             </a:r>
           </a:p>
           <a:p>
@@ -7154,7 +7622,7 @@
       </p:sp>
       <p:sp>
         <p:nvSpPr>
-          <p:cNvPr id="22" name="Rectangle 21"/>
+          <p:cNvPr id="25" name="Rectangle 24"/>
           <p:cNvSpPr/>
           <p:nvPr/>
         </p:nvSpPr>
@@ -7184,7 +7652,7 @@
       </p:sp>
       <p:sp>
         <p:nvSpPr>
-          <p:cNvPr id="23" name="Rectangle 22"/>
+          <p:cNvPr id="26" name="Rectangle 25"/>
           <p:cNvSpPr/>
           <p:nvPr/>
         </p:nvSpPr>
@@ -7214,7 +7682,7 @@
       </p:sp>
       <p:pic>
         <p:nvPicPr>
-          <p:cNvPr id="24" name="Picture 23" descr="testing-event-2026.png"/>
+          <p:cNvPr id="27" name="Picture 26" descr="testing-event-2026.png"/>
           <p:cNvPicPr>
             <a:picLocks noChangeAspect="1"/>
           </p:cNvPicPr>
@@ -7238,7 +7706,7 @@
       </p:pic>
       <p:sp>
         <p:nvSpPr>
-          <p:cNvPr id="25" name="TextBox 24"/>
+          <p:cNvPr id="28" name="TextBox 27"/>
           <p:cNvSpPr txBox="1"/>
           <p:nvPr/>
         </p:nvSpPr>
@@ -7634,8 +8102,8 @@
         </p:nvSpPr>
         <p:spPr>
           <a:xfrm>
-            <a:off x="720000" y="6336000"/>
-            <a:ext cx="9252000" cy="2304000"/>
+            <a:off x="720000" y="6263999"/>
+            <a:ext cx="9252000" cy="1069848"/>
           </a:xfrm>
           <a:prstGeom prst="rect">
             <a:avLst/>
@@ -7654,7 +8122,7 @@
               </a:lnSpc>
             </a:pPr>
             <a:r>
-              <a:rPr sz="3400" b="0">
+              <a:rPr sz="2600" b="0">
                 <a:solidFill>
                   <a:srgbClr val="E3E3E3"/>
                 </a:solidFill>
@@ -7673,8 +8141,8 @@
         </p:nvSpPr>
         <p:spPr>
           <a:xfrm>
-            <a:off x="720000" y="9072000"/>
-            <a:ext cx="9252000" cy="432000"/>
+            <a:off x="720000" y="7621847"/>
+            <a:ext cx="9252000" cy="396000"/>
           </a:xfrm>
           <a:prstGeom prst="rect">
             <a:avLst/>
@@ -7699,7 +8167,7 @@
                 </a:solidFill>
                 <a:latin typeface="Barlow Condensed"/>
               </a:rPr>
-              <a:t>5 ROTATIONS DE 30 MINUTES · 14h00 → 16h30</a:t>
+              <a:t>ANIMÉ PAR</a:t>
             </a:r>
           </a:p>
         </p:txBody>
@@ -7712,8 +8180,8 @@
         </p:nvSpPr>
         <p:spPr>
           <a:xfrm>
-            <a:off x="720000" y="9648000"/>
-            <a:ext cx="1735200" cy="1655999"/>
+            <a:off x="720000" y="8053847"/>
+            <a:ext cx="9252000" cy="762911"/>
           </a:xfrm>
           <a:prstGeom prst="rect">
             <a:avLst/>
@@ -7742,8 +8210,8 @@
         </p:nvSpPr>
         <p:spPr>
           <a:xfrm>
-            <a:off x="720000" y="9900000"/>
-            <a:ext cx="1735200" cy="1224000"/>
+            <a:off x="936000" y="8233847"/>
+            <a:ext cx="8820000" cy="402911"/>
           </a:xfrm>
           <a:prstGeom prst="rect">
             <a:avLst/>
@@ -7756,65 +8224,81 @@
           </a:bodyPr>
           <a:lstStyle/>
           <a:p>
-            <a:pPr algn="ctr">
+            <a:pPr algn="l">
+              <a:lnSpc>
+                <a:spcPct val="120000"/>
+              </a:lnSpc>
+            </a:pPr>
+            <a:r>
+              <a:rPr sz="1800" b="1">
+                <a:solidFill>
+                  <a:srgbClr val="00B4B4"/>
+                </a:solidFill>
+                <a:latin typeface="Barlow Condensed"/>
+              </a:rPr>
+              <a:t>Smartesting</a:t>
+            </a:r>
+            <a:r>
+              <a:rPr sz="2400" b="0">
+                <a:solidFill>
+                  <a:srgbClr val="FFFFFF"/>
+                </a:solidFill>
+                <a:latin typeface="Barlow"/>
+              </a:rPr>
+              <a:t>   Arnaud BOUZY</a:t>
+            </a:r>
+          </a:p>
+        </p:txBody>
+      </p:sp>
+      <p:sp>
+        <p:nvSpPr>
+          <p:cNvPr id="14" name="TextBox 13"/>
+          <p:cNvSpPr txBox="1"/>
+          <p:nvPr/>
+        </p:nvSpPr>
+        <p:spPr>
+          <a:xfrm>
+            <a:off x="720000" y="9140758"/>
+            <a:ext cx="9252000" cy="432000"/>
+          </a:xfrm>
+          <a:prstGeom prst="rect">
+            <a:avLst/>
+          </a:prstGeom>
+          <a:noFill/>
+        </p:spPr>
+        <p:txBody>
+          <a:bodyPr wrap="square" anchor="t" lIns="0" rIns="0" tIns="0" bIns="0">
+            <a:spAutoFit/>
+          </a:bodyPr>
+          <a:lstStyle/>
+          <a:p>
+            <a:pPr algn="l">
               <a:lnSpc>
                 <a:spcPct val="100000"/>
               </a:lnSpc>
             </a:pPr>
             <a:r>
-              <a:rPr sz="3200" b="1">
+              <a:rPr sz="2400" b="1">
                 <a:solidFill>
                   <a:srgbClr val="00B4B4"/>
                 </a:solidFill>
                 <a:latin typeface="Barlow Condensed"/>
               </a:rPr>
-              <a:t>14h00</a:t>
-            </a:r>
-          </a:p>
-          <a:p>
-            <a:pPr algn="ctr">
-              <a:lnSpc>
-                <a:spcPct val="115000"/>
-              </a:lnSpc>
-            </a:pPr>
-            <a:r>
-              <a:rPr sz="2000" b="0">
-                <a:solidFill>
-                  <a:srgbClr val="00B4B4"/>
-                </a:solidFill>
-                <a:latin typeface="Barlow Condensed"/>
-              </a:rPr>
-              <a:t>→ 14h30</a:t>
-            </a:r>
-          </a:p>
-          <a:p>
-            <a:pPr algn="ctr">
-              <a:lnSpc>
-                <a:spcPct val="150000"/>
-              </a:lnSpc>
-            </a:pPr>
-            <a:r>
-              <a:rPr sz="1400" b="0">
-                <a:solidFill>
-                  <a:srgbClr val="E3E3E3"/>
-                </a:solidFill>
-                <a:latin typeface="Barlow"/>
-              </a:rPr>
-              <a:t>Rotation 1</a:t>
-            </a:r>
-          </a:p>
-        </p:txBody>
-      </p:sp>
-      <p:sp>
-        <p:nvSpPr>
-          <p:cNvPr id="14" name="Rectangle 13"/>
+              <a:t>5 ROTATIONS DE 30 MINUTES · 14h00 à 16h30</a:t>
+            </a:r>
+          </a:p>
+        </p:txBody>
+      </p:sp>
+      <p:sp>
+        <p:nvSpPr>
+          <p:cNvPr id="15" name="Rectangle 14"/>
           <p:cNvSpPr/>
           <p:nvPr/>
         </p:nvSpPr>
         <p:spPr>
           <a:xfrm>
-            <a:off x="2599200" y="9648000"/>
-            <a:ext cx="1735200" cy="1655999"/>
+            <a:off x="720000" y="9644757"/>
+            <a:ext cx="1735200" cy="1440000"/>
           </a:xfrm>
           <a:prstGeom prst="rect">
             <a:avLst/>
@@ -7837,14 +8321,14 @@
       </p:sp>
       <p:sp>
         <p:nvSpPr>
-          <p:cNvPr id="15" name="TextBox 14"/>
+          <p:cNvPr id="16" name="TextBox 15"/>
           <p:cNvSpPr txBox="1"/>
           <p:nvPr/>
         </p:nvSpPr>
         <p:spPr>
           <a:xfrm>
-            <a:off x="2599200" y="9900000"/>
-            <a:ext cx="1735200" cy="1224000"/>
+            <a:off x="720000" y="9860757"/>
+            <a:ext cx="1735200" cy="1152000"/>
           </a:xfrm>
           <a:prstGeom prst="rect">
             <a:avLst/>
@@ -7869,23 +8353,23 @@
                 </a:solidFill>
                 <a:latin typeface="Barlow Condensed"/>
               </a:rPr>
-              <a:t>14h30</a:t>
-            </a:r>
-          </a:p>
-          <a:p>
-            <a:pPr algn="ctr">
-              <a:lnSpc>
-                <a:spcPct val="115000"/>
-              </a:lnSpc>
-            </a:pPr>
-            <a:r>
-              <a:rPr sz="2000" b="0">
+              <a:t>14h00</a:t>
+            </a:r>
+          </a:p>
+          <a:p>
+            <a:pPr algn="ctr">
+              <a:lnSpc>
+                <a:spcPct val="120000"/>
+              </a:lnSpc>
+            </a:pPr>
+            <a:r>
+              <a:rPr sz="1800" b="0">
                 <a:solidFill>
                   <a:srgbClr val="00B4B4"/>
                 </a:solidFill>
                 <a:latin typeface="Barlow Condensed"/>
               </a:rPr>
-              <a:t>→ 15h00</a:t>
+              <a:t>jusqu’à 14h30</a:t>
             </a:r>
           </a:p>
           <a:p>
@@ -7901,21 +8385,21 @@
                 </a:solidFill>
                 <a:latin typeface="Barlow"/>
               </a:rPr>
-              <a:t>Rotation 2</a:t>
-            </a:r>
-          </a:p>
-        </p:txBody>
-      </p:sp>
-      <p:sp>
-        <p:nvSpPr>
-          <p:cNvPr id="16" name="Rectangle 15"/>
+              <a:t>Rotation 1</a:t>
+            </a:r>
+          </a:p>
+        </p:txBody>
+      </p:sp>
+      <p:sp>
+        <p:nvSpPr>
+          <p:cNvPr id="17" name="Rectangle 16"/>
           <p:cNvSpPr/>
           <p:nvPr/>
         </p:nvSpPr>
         <p:spPr>
           <a:xfrm>
-            <a:off x="4478400" y="9648000"/>
-            <a:ext cx="1735200" cy="1655999"/>
+            <a:off x="2599200" y="9644757"/>
+            <a:ext cx="1735200" cy="1440000"/>
           </a:xfrm>
           <a:prstGeom prst="rect">
             <a:avLst/>
@@ -7938,14 +8422,14 @@
       </p:sp>
       <p:sp>
         <p:nvSpPr>
-          <p:cNvPr id="17" name="TextBox 16"/>
+          <p:cNvPr id="18" name="TextBox 17"/>
           <p:cNvSpPr txBox="1"/>
           <p:nvPr/>
         </p:nvSpPr>
         <p:spPr>
           <a:xfrm>
-            <a:off x="4478400" y="9900000"/>
-            <a:ext cx="1735200" cy="1224000"/>
+            <a:off x="2599200" y="9860757"/>
+            <a:ext cx="1735200" cy="1152000"/>
           </a:xfrm>
           <a:prstGeom prst="rect">
             <a:avLst/>
@@ -7970,23 +8454,23 @@
                 </a:solidFill>
                 <a:latin typeface="Barlow Condensed"/>
               </a:rPr>
-              <a:t>15h00</a:t>
-            </a:r>
-          </a:p>
-          <a:p>
-            <a:pPr algn="ctr">
-              <a:lnSpc>
-                <a:spcPct val="115000"/>
-              </a:lnSpc>
-            </a:pPr>
-            <a:r>
-              <a:rPr sz="2000" b="0">
+              <a:t>14h30</a:t>
+            </a:r>
+          </a:p>
+          <a:p>
+            <a:pPr algn="ctr">
+              <a:lnSpc>
+                <a:spcPct val="120000"/>
+              </a:lnSpc>
+            </a:pPr>
+            <a:r>
+              <a:rPr sz="1800" b="0">
                 <a:solidFill>
                   <a:srgbClr val="00B4B4"/>
                 </a:solidFill>
                 <a:latin typeface="Barlow Condensed"/>
               </a:rPr>
-              <a:t>→ 15h30</a:t>
+              <a:t>jusqu’à 15h00</a:t>
             </a:r>
           </a:p>
           <a:p>
@@ -8002,21 +8486,21 @@
                 </a:solidFill>
                 <a:latin typeface="Barlow"/>
               </a:rPr>
-              <a:t>Rotation 3</a:t>
-            </a:r>
-          </a:p>
-        </p:txBody>
-      </p:sp>
-      <p:sp>
-        <p:nvSpPr>
-          <p:cNvPr id="18" name="Rectangle 17"/>
+              <a:t>Rotation 2</a:t>
+            </a:r>
+          </a:p>
+        </p:txBody>
+      </p:sp>
+      <p:sp>
+        <p:nvSpPr>
+          <p:cNvPr id="19" name="Rectangle 18"/>
           <p:cNvSpPr/>
           <p:nvPr/>
         </p:nvSpPr>
         <p:spPr>
           <a:xfrm>
-            <a:off x="6357600" y="9648000"/>
-            <a:ext cx="1735200" cy="1655999"/>
+            <a:off x="4478400" y="9644757"/>
+            <a:ext cx="1735200" cy="1440000"/>
           </a:xfrm>
           <a:prstGeom prst="rect">
             <a:avLst/>
@@ -8039,14 +8523,14 @@
       </p:sp>
       <p:sp>
         <p:nvSpPr>
-          <p:cNvPr id="19" name="TextBox 18"/>
+          <p:cNvPr id="20" name="TextBox 19"/>
           <p:cNvSpPr txBox="1"/>
           <p:nvPr/>
         </p:nvSpPr>
         <p:spPr>
           <a:xfrm>
-            <a:off x="6357600" y="9900000"/>
-            <a:ext cx="1735200" cy="1224000"/>
+            <a:off x="4478400" y="9860757"/>
+            <a:ext cx="1735200" cy="1152000"/>
           </a:xfrm>
           <a:prstGeom prst="rect">
             <a:avLst/>
@@ -8071,23 +8555,23 @@
                 </a:solidFill>
                 <a:latin typeface="Barlow Condensed"/>
               </a:rPr>
-              <a:t>15h30</a:t>
-            </a:r>
-          </a:p>
-          <a:p>
-            <a:pPr algn="ctr">
-              <a:lnSpc>
-                <a:spcPct val="115000"/>
-              </a:lnSpc>
-            </a:pPr>
-            <a:r>
-              <a:rPr sz="2000" b="0">
+              <a:t>15h00</a:t>
+            </a:r>
+          </a:p>
+          <a:p>
+            <a:pPr algn="ctr">
+              <a:lnSpc>
+                <a:spcPct val="120000"/>
+              </a:lnSpc>
+            </a:pPr>
+            <a:r>
+              <a:rPr sz="1800" b="0">
                 <a:solidFill>
                   <a:srgbClr val="00B4B4"/>
                 </a:solidFill>
                 <a:latin typeface="Barlow Condensed"/>
               </a:rPr>
-              <a:t>→ 16h00</a:t>
+              <a:t>jusqu’à 15h30</a:t>
             </a:r>
           </a:p>
           <a:p>
@@ -8103,21 +8587,21 @@
                 </a:solidFill>
                 <a:latin typeface="Barlow"/>
               </a:rPr>
-              <a:t>Rotation 4</a:t>
-            </a:r>
-          </a:p>
-        </p:txBody>
-      </p:sp>
-      <p:sp>
-        <p:nvSpPr>
-          <p:cNvPr id="20" name="Rectangle 19"/>
+              <a:t>Rotation 3</a:t>
+            </a:r>
+          </a:p>
+        </p:txBody>
+      </p:sp>
+      <p:sp>
+        <p:nvSpPr>
+          <p:cNvPr id="21" name="Rectangle 20"/>
           <p:cNvSpPr/>
           <p:nvPr/>
         </p:nvSpPr>
         <p:spPr>
           <a:xfrm>
-            <a:off x="8236800" y="9648000"/>
-            <a:ext cx="1735200" cy="1655999"/>
+            <a:off x="6357600" y="9644757"/>
+            <a:ext cx="1735200" cy="1440000"/>
           </a:xfrm>
           <a:prstGeom prst="rect">
             <a:avLst/>
@@ -8140,14 +8624,14 @@
       </p:sp>
       <p:sp>
         <p:nvSpPr>
-          <p:cNvPr id="21" name="TextBox 20"/>
+          <p:cNvPr id="22" name="TextBox 21"/>
           <p:cNvSpPr txBox="1"/>
           <p:nvPr/>
         </p:nvSpPr>
         <p:spPr>
           <a:xfrm>
-            <a:off x="8236800" y="9900000"/>
-            <a:ext cx="1735200" cy="1224000"/>
+            <a:off x="6357600" y="9860757"/>
+            <a:ext cx="1735200" cy="1152000"/>
           </a:xfrm>
           <a:prstGeom prst="rect">
             <a:avLst/>
@@ -8172,23 +8656,124 @@
                 </a:solidFill>
                 <a:latin typeface="Barlow Condensed"/>
               </a:rPr>
+              <a:t>15h30</a:t>
+            </a:r>
+          </a:p>
+          <a:p>
+            <a:pPr algn="ctr">
+              <a:lnSpc>
+                <a:spcPct val="120000"/>
+              </a:lnSpc>
+            </a:pPr>
+            <a:r>
+              <a:rPr sz="1800" b="0">
+                <a:solidFill>
+                  <a:srgbClr val="00B4B4"/>
+                </a:solidFill>
+                <a:latin typeface="Barlow Condensed"/>
+              </a:rPr>
+              <a:t>jusqu’à 16h00</a:t>
+            </a:r>
+          </a:p>
+          <a:p>
+            <a:pPr algn="ctr">
+              <a:lnSpc>
+                <a:spcPct val="150000"/>
+              </a:lnSpc>
+            </a:pPr>
+            <a:r>
+              <a:rPr sz="1400" b="0">
+                <a:solidFill>
+                  <a:srgbClr val="E3E3E3"/>
+                </a:solidFill>
+                <a:latin typeface="Barlow"/>
+              </a:rPr>
+              <a:t>Rotation 4</a:t>
+            </a:r>
+          </a:p>
+        </p:txBody>
+      </p:sp>
+      <p:sp>
+        <p:nvSpPr>
+          <p:cNvPr id="23" name="Rectangle 22"/>
+          <p:cNvSpPr/>
+          <p:nvPr/>
+        </p:nvSpPr>
+        <p:spPr>
+          <a:xfrm>
+            <a:off x="8236800" y="9644757"/>
+            <a:ext cx="1735200" cy="1440000"/>
+          </a:xfrm>
+          <a:prstGeom prst="rect">
+            <a:avLst/>
+          </a:prstGeom>
+          <a:solidFill>
+            <a:srgbClr val="2E2E50"/>
+          </a:solidFill>
+          <a:ln>
+            <a:noFill/>
+          </a:ln>
+          <a:effectLst/>
+        </p:spPr>
+        <p:txBody>
+          <a:bodyPr rtlCol="0" anchor="ctr"/>
+          <a:lstStyle/>
+          <a:p>
+            <a:pPr algn="ctr"/>
+          </a:p>
+        </p:txBody>
+      </p:sp>
+      <p:sp>
+        <p:nvSpPr>
+          <p:cNvPr id="24" name="TextBox 23"/>
+          <p:cNvSpPr txBox="1"/>
+          <p:nvPr/>
+        </p:nvSpPr>
+        <p:spPr>
+          <a:xfrm>
+            <a:off x="8236800" y="9860757"/>
+            <a:ext cx="1735200" cy="1152000"/>
+          </a:xfrm>
+          <a:prstGeom prst="rect">
+            <a:avLst/>
+          </a:prstGeom>
+          <a:noFill/>
+        </p:spPr>
+        <p:txBody>
+          <a:bodyPr wrap="square" anchor="t" lIns="0" rIns="0" tIns="0" bIns="0">
+            <a:spAutoFit/>
+          </a:bodyPr>
+          <a:lstStyle/>
+          <a:p>
+            <a:pPr algn="ctr">
+              <a:lnSpc>
+                <a:spcPct val="100000"/>
+              </a:lnSpc>
+            </a:pPr>
+            <a:r>
+              <a:rPr sz="3200" b="1">
+                <a:solidFill>
+                  <a:srgbClr val="00B4B4"/>
+                </a:solidFill>
+                <a:latin typeface="Barlow Condensed"/>
+              </a:rPr>
               <a:t>16h00</a:t>
             </a:r>
           </a:p>
           <a:p>
             <a:pPr algn="ctr">
               <a:lnSpc>
-                <a:spcPct val="115000"/>
-              </a:lnSpc>
-            </a:pPr>
-            <a:r>
-              <a:rPr sz="2000" b="0">
+                <a:spcPct val="120000"/>
+              </a:lnSpc>
+            </a:pPr>
+            <a:r>
+              <a:rPr sz="1800" b="0">
                 <a:solidFill>
                   <a:srgbClr val="00B4B4"/>
                 </a:solidFill>
                 <a:latin typeface="Barlow Condensed"/>
               </a:rPr>
-              <a:t>→ 16h30</a:t>
+              <a:t>jusqu’à 16h30</a:t>
             </a:r>
           </a:p>
           <a:p>
@@ -8211,7 +8796,7 @@
       </p:sp>
       <p:sp>
         <p:nvSpPr>
-          <p:cNvPr id="22" name="Rectangle 21"/>
+          <p:cNvPr id="25" name="Rectangle 24"/>
           <p:cNvSpPr/>
           <p:nvPr/>
         </p:nvSpPr>
@@ -8241,7 +8826,7 @@
       </p:sp>
       <p:sp>
         <p:nvSpPr>
-          <p:cNvPr id="23" name="Rectangle 22"/>
+          <p:cNvPr id="26" name="Rectangle 25"/>
           <p:cNvSpPr/>
           <p:nvPr/>
         </p:nvSpPr>
@@ -8271,7 +8856,7 @@
       </p:sp>
       <p:pic>
         <p:nvPicPr>
-          <p:cNvPr id="24" name="Picture 23" descr="testing-event-2026.png"/>
+          <p:cNvPr id="27" name="Picture 26" descr="testing-event-2026.png"/>
           <p:cNvPicPr>
             <a:picLocks noChangeAspect="1"/>
           </p:cNvPicPr>
@@ -8295,7 +8880,7 @@
       </p:pic>
       <p:sp>
         <p:nvSpPr>
-          <p:cNvPr id="25" name="TextBox 24"/>
+          <p:cNvPr id="28" name="TextBox 27"/>
           <p:cNvSpPr txBox="1"/>
           <p:nvPr/>
         </p:nvSpPr>
@@ -8691,8 +9276,8 @@
         </p:nvSpPr>
         <p:spPr>
           <a:xfrm>
-            <a:off x="720000" y="6336000"/>
-            <a:ext cx="9252000" cy="2304000"/>
+            <a:off x="720000" y="6263999"/>
+            <a:ext cx="9252000" cy="1069848"/>
           </a:xfrm>
           <a:prstGeom prst="rect">
             <a:avLst/>
@@ -8711,7 +9296,7 @@
               </a:lnSpc>
             </a:pPr>
             <a:r>
-              <a:rPr sz="3400" b="0">
+              <a:rPr sz="2600" b="0">
                 <a:solidFill>
                   <a:srgbClr val="E3E3E3"/>
                 </a:solidFill>
@@ -8730,8 +9315,8 @@
         </p:nvSpPr>
         <p:spPr>
           <a:xfrm>
-            <a:off x="720000" y="9072000"/>
-            <a:ext cx="9252000" cy="432000"/>
+            <a:off x="720000" y="7621847"/>
+            <a:ext cx="9252000" cy="396000"/>
           </a:xfrm>
           <a:prstGeom prst="rect">
             <a:avLst/>
@@ -8756,7 +9341,7 @@
                 </a:solidFill>
                 <a:latin typeface="Barlow Condensed"/>
               </a:rPr>
-              <a:t>5 ROTATIONS DE 30 MINUTES · 14h00 → 16h30</a:t>
+              <a:t>ANIMÉ PAR</a:t>
             </a:r>
           </a:p>
         </p:txBody>
@@ -8769,8 +9354,8 @@
         </p:nvSpPr>
         <p:spPr>
           <a:xfrm>
-            <a:off x="720000" y="9648000"/>
-            <a:ext cx="1735200" cy="1655999"/>
+            <a:off x="720000" y="8053847"/>
+            <a:ext cx="9252000" cy="762911"/>
           </a:xfrm>
           <a:prstGeom prst="rect">
             <a:avLst/>
@@ -8799,8 +9384,8 @@
         </p:nvSpPr>
         <p:spPr>
           <a:xfrm>
-            <a:off x="720000" y="9900000"/>
-            <a:ext cx="1735200" cy="1224000"/>
+            <a:off x="936000" y="8233847"/>
+            <a:ext cx="8820000" cy="402911"/>
           </a:xfrm>
           <a:prstGeom prst="rect">
             <a:avLst/>
@@ -8813,65 +9398,81 @@
           </a:bodyPr>
           <a:lstStyle/>
           <a:p>
-            <a:pPr algn="ctr">
+            <a:pPr algn="l">
+              <a:lnSpc>
+                <a:spcPct val="120000"/>
+              </a:lnSpc>
+            </a:pPr>
+            <a:r>
+              <a:rPr sz="1800" b="1">
+                <a:solidFill>
+                  <a:srgbClr val="00B4B4"/>
+                </a:solidFill>
+                <a:latin typeface="Barlow Condensed"/>
+              </a:rPr>
+              <a:t>TFC</a:t>
+            </a:r>
+            <a:r>
+              <a:rPr sz="2400" b="0">
+                <a:solidFill>
+                  <a:srgbClr val="FFFFFF"/>
+                </a:solidFill>
+                <a:latin typeface="Barlow"/>
+              </a:rPr>
+              <a:t>   Olivier PROUTEAU et Mélanie DA COSTA</a:t>
+            </a:r>
+          </a:p>
+        </p:txBody>
+      </p:sp>
+      <p:sp>
+        <p:nvSpPr>
+          <p:cNvPr id="14" name="TextBox 13"/>
+          <p:cNvSpPr txBox="1"/>
+          <p:nvPr/>
+        </p:nvSpPr>
+        <p:spPr>
+          <a:xfrm>
+            <a:off x="720000" y="9140758"/>
+            <a:ext cx="9252000" cy="432000"/>
+          </a:xfrm>
+          <a:prstGeom prst="rect">
+            <a:avLst/>
+          </a:prstGeom>
+          <a:noFill/>
+        </p:spPr>
+        <p:txBody>
+          <a:bodyPr wrap="square" anchor="t" lIns="0" rIns="0" tIns="0" bIns="0">
+            <a:spAutoFit/>
+          </a:bodyPr>
+          <a:lstStyle/>
+          <a:p>
+            <a:pPr algn="l">
               <a:lnSpc>
                 <a:spcPct val="100000"/>
               </a:lnSpc>
             </a:pPr>
             <a:r>
-              <a:rPr sz="3200" b="1">
+              <a:rPr sz="2400" b="1">
                 <a:solidFill>
                   <a:srgbClr val="00B4B4"/>
                 </a:solidFill>
                 <a:latin typeface="Barlow Condensed"/>
               </a:rPr>
-              <a:t>14h00</a:t>
-            </a:r>
-          </a:p>
-          <a:p>
-            <a:pPr algn="ctr">
-              <a:lnSpc>
-                <a:spcPct val="115000"/>
-              </a:lnSpc>
-            </a:pPr>
-            <a:r>
-              <a:rPr sz="2000" b="0">
-                <a:solidFill>
-                  <a:srgbClr val="00B4B4"/>
-                </a:solidFill>
-                <a:latin typeface="Barlow Condensed"/>
-              </a:rPr>
-              <a:t>→ 14h30</a:t>
-            </a:r>
-          </a:p>
-          <a:p>
-            <a:pPr algn="ctr">
-              <a:lnSpc>
-                <a:spcPct val="150000"/>
-              </a:lnSpc>
-            </a:pPr>
-            <a:r>
-              <a:rPr sz="1400" b="0">
-                <a:solidFill>
-                  <a:srgbClr val="E3E3E3"/>
-                </a:solidFill>
-                <a:latin typeface="Barlow"/>
-              </a:rPr>
-              <a:t>Rotation 1</a:t>
-            </a:r>
-          </a:p>
-        </p:txBody>
-      </p:sp>
-      <p:sp>
-        <p:nvSpPr>
-          <p:cNvPr id="14" name="Rectangle 13"/>
+              <a:t>5 ROTATIONS DE 30 MINUTES · 14h00 à 16h30</a:t>
+            </a:r>
+          </a:p>
+        </p:txBody>
+      </p:sp>
+      <p:sp>
+        <p:nvSpPr>
+          <p:cNvPr id="15" name="Rectangle 14"/>
           <p:cNvSpPr/>
           <p:nvPr/>
         </p:nvSpPr>
         <p:spPr>
           <a:xfrm>
-            <a:off x="2599200" y="9648000"/>
-            <a:ext cx="1735200" cy="1655999"/>
+            <a:off x="720000" y="9644757"/>
+            <a:ext cx="1735200" cy="1440000"/>
           </a:xfrm>
           <a:prstGeom prst="rect">
             <a:avLst/>
@@ -8894,14 +9495,14 @@
       </p:sp>
       <p:sp>
         <p:nvSpPr>
-          <p:cNvPr id="15" name="TextBox 14"/>
+          <p:cNvPr id="16" name="TextBox 15"/>
           <p:cNvSpPr txBox="1"/>
           <p:nvPr/>
         </p:nvSpPr>
         <p:spPr>
           <a:xfrm>
-            <a:off x="2599200" y="9900000"/>
-            <a:ext cx="1735200" cy="1224000"/>
+            <a:off x="720000" y="9860757"/>
+            <a:ext cx="1735200" cy="1152000"/>
           </a:xfrm>
           <a:prstGeom prst="rect">
             <a:avLst/>
@@ -8926,23 +9527,23 @@
                 </a:solidFill>
                 <a:latin typeface="Barlow Condensed"/>
               </a:rPr>
-              <a:t>14h30</a:t>
-            </a:r>
-          </a:p>
-          <a:p>
-            <a:pPr algn="ctr">
-              <a:lnSpc>
-                <a:spcPct val="115000"/>
-              </a:lnSpc>
-            </a:pPr>
-            <a:r>
-              <a:rPr sz="2000" b="0">
+              <a:t>14h00</a:t>
+            </a:r>
+          </a:p>
+          <a:p>
+            <a:pPr algn="ctr">
+              <a:lnSpc>
+                <a:spcPct val="120000"/>
+              </a:lnSpc>
+            </a:pPr>
+            <a:r>
+              <a:rPr sz="1800" b="0">
                 <a:solidFill>
                   <a:srgbClr val="00B4B4"/>
                 </a:solidFill>
                 <a:latin typeface="Barlow Condensed"/>
               </a:rPr>
-              <a:t>→ 15h00</a:t>
+              <a:t>jusqu’à 14h30</a:t>
             </a:r>
           </a:p>
           <a:p>
@@ -8958,21 +9559,21 @@
                 </a:solidFill>
                 <a:latin typeface="Barlow"/>
               </a:rPr>
-              <a:t>Rotation 2</a:t>
-            </a:r>
-          </a:p>
-        </p:txBody>
-      </p:sp>
-      <p:sp>
-        <p:nvSpPr>
-          <p:cNvPr id="16" name="Rectangle 15"/>
+              <a:t>Rotation 1</a:t>
+            </a:r>
+          </a:p>
+        </p:txBody>
+      </p:sp>
+      <p:sp>
+        <p:nvSpPr>
+          <p:cNvPr id="17" name="Rectangle 16"/>
           <p:cNvSpPr/>
           <p:nvPr/>
         </p:nvSpPr>
         <p:spPr>
           <a:xfrm>
-            <a:off x="4478400" y="9648000"/>
-            <a:ext cx="1735200" cy="1655999"/>
+            <a:off x="2599200" y="9644757"/>
+            <a:ext cx="1735200" cy="1440000"/>
           </a:xfrm>
           <a:prstGeom prst="rect">
             <a:avLst/>
@@ -8995,14 +9596,14 @@
       </p:sp>
       <p:sp>
         <p:nvSpPr>
-          <p:cNvPr id="17" name="TextBox 16"/>
+          <p:cNvPr id="18" name="TextBox 17"/>
           <p:cNvSpPr txBox="1"/>
           <p:nvPr/>
         </p:nvSpPr>
         <p:spPr>
           <a:xfrm>
-            <a:off x="4478400" y="9900000"/>
-            <a:ext cx="1735200" cy="1224000"/>
+            <a:off x="2599200" y="9860757"/>
+            <a:ext cx="1735200" cy="1152000"/>
           </a:xfrm>
           <a:prstGeom prst="rect">
             <a:avLst/>
@@ -9027,23 +9628,23 @@
                 </a:solidFill>
                 <a:latin typeface="Barlow Condensed"/>
               </a:rPr>
-              <a:t>15h00</a:t>
-            </a:r>
-          </a:p>
-          <a:p>
-            <a:pPr algn="ctr">
-              <a:lnSpc>
-                <a:spcPct val="115000"/>
-              </a:lnSpc>
-            </a:pPr>
-            <a:r>
-              <a:rPr sz="2000" b="0">
+              <a:t>14h30</a:t>
+            </a:r>
+          </a:p>
+          <a:p>
+            <a:pPr algn="ctr">
+              <a:lnSpc>
+                <a:spcPct val="120000"/>
+              </a:lnSpc>
+            </a:pPr>
+            <a:r>
+              <a:rPr sz="1800" b="0">
                 <a:solidFill>
                   <a:srgbClr val="00B4B4"/>
                 </a:solidFill>
                 <a:latin typeface="Barlow Condensed"/>
               </a:rPr>
-              <a:t>→ 15h30</a:t>
+              <a:t>jusqu’à 15h00</a:t>
             </a:r>
           </a:p>
           <a:p>
@@ -9059,21 +9660,21 @@
                 </a:solidFill>
                 <a:latin typeface="Barlow"/>
               </a:rPr>
-              <a:t>Rotation 3</a:t>
-            </a:r>
-          </a:p>
-        </p:txBody>
-      </p:sp>
-      <p:sp>
-        <p:nvSpPr>
-          <p:cNvPr id="18" name="Rectangle 17"/>
+              <a:t>Rotation 2</a:t>
+            </a:r>
+          </a:p>
+        </p:txBody>
+      </p:sp>
+      <p:sp>
+        <p:nvSpPr>
+          <p:cNvPr id="19" name="Rectangle 18"/>
           <p:cNvSpPr/>
           <p:nvPr/>
         </p:nvSpPr>
         <p:spPr>
           <a:xfrm>
-            <a:off x="6357600" y="9648000"/>
-            <a:ext cx="1735200" cy="1655999"/>
+            <a:off x="4478400" y="9644757"/>
+            <a:ext cx="1735200" cy="1440000"/>
           </a:xfrm>
           <a:prstGeom prst="rect">
             <a:avLst/>
@@ -9096,14 +9697,14 @@
       </p:sp>
       <p:sp>
         <p:nvSpPr>
-          <p:cNvPr id="19" name="TextBox 18"/>
+          <p:cNvPr id="20" name="TextBox 19"/>
           <p:cNvSpPr txBox="1"/>
           <p:nvPr/>
         </p:nvSpPr>
         <p:spPr>
           <a:xfrm>
-            <a:off x="6357600" y="9900000"/>
-            <a:ext cx="1735200" cy="1224000"/>
+            <a:off x="4478400" y="9860757"/>
+            <a:ext cx="1735200" cy="1152000"/>
           </a:xfrm>
           <a:prstGeom prst="rect">
             <a:avLst/>
@@ -9128,23 +9729,23 @@
                 </a:solidFill>
                 <a:latin typeface="Barlow Condensed"/>
               </a:rPr>
-              <a:t>15h30</a:t>
-            </a:r>
-          </a:p>
-          <a:p>
-            <a:pPr algn="ctr">
-              <a:lnSpc>
-                <a:spcPct val="115000"/>
-              </a:lnSpc>
-            </a:pPr>
-            <a:r>
-              <a:rPr sz="2000" b="0">
+              <a:t>15h00</a:t>
+            </a:r>
+          </a:p>
+          <a:p>
+            <a:pPr algn="ctr">
+              <a:lnSpc>
+                <a:spcPct val="120000"/>
+              </a:lnSpc>
+            </a:pPr>
+            <a:r>
+              <a:rPr sz="1800" b="0">
                 <a:solidFill>
                   <a:srgbClr val="00B4B4"/>
                 </a:solidFill>
                 <a:latin typeface="Barlow Condensed"/>
               </a:rPr>
-              <a:t>→ 16h00</a:t>
+              <a:t>jusqu’à 15h30</a:t>
             </a:r>
           </a:p>
           <a:p>
@@ -9160,21 +9761,21 @@
                 </a:solidFill>
                 <a:latin typeface="Barlow"/>
               </a:rPr>
-              <a:t>Rotation 4</a:t>
-            </a:r>
-          </a:p>
-        </p:txBody>
-      </p:sp>
-      <p:sp>
-        <p:nvSpPr>
-          <p:cNvPr id="20" name="Rectangle 19"/>
+              <a:t>Rotation 3</a:t>
+            </a:r>
+          </a:p>
+        </p:txBody>
+      </p:sp>
+      <p:sp>
+        <p:nvSpPr>
+          <p:cNvPr id="21" name="Rectangle 20"/>
           <p:cNvSpPr/>
           <p:nvPr/>
         </p:nvSpPr>
         <p:spPr>
           <a:xfrm>
-            <a:off x="8236800" y="9648000"/>
-            <a:ext cx="1735200" cy="1655999"/>
+            <a:off x="6357600" y="9644757"/>
+            <a:ext cx="1735200" cy="1440000"/>
           </a:xfrm>
           <a:prstGeom prst="rect">
             <a:avLst/>
@@ -9197,14 +9798,14 @@
       </p:sp>
       <p:sp>
         <p:nvSpPr>
-          <p:cNvPr id="21" name="TextBox 20"/>
+          <p:cNvPr id="22" name="TextBox 21"/>
           <p:cNvSpPr txBox="1"/>
           <p:nvPr/>
         </p:nvSpPr>
         <p:spPr>
           <a:xfrm>
-            <a:off x="8236800" y="9900000"/>
-            <a:ext cx="1735200" cy="1224000"/>
+            <a:off x="6357600" y="9860757"/>
+            <a:ext cx="1735200" cy="1152000"/>
           </a:xfrm>
           <a:prstGeom prst="rect">
             <a:avLst/>
@@ -9229,23 +9830,124 @@
                 </a:solidFill>
                 <a:latin typeface="Barlow Condensed"/>
               </a:rPr>
+              <a:t>15h30</a:t>
+            </a:r>
+          </a:p>
+          <a:p>
+            <a:pPr algn="ctr">
+              <a:lnSpc>
+                <a:spcPct val="120000"/>
+              </a:lnSpc>
+            </a:pPr>
+            <a:r>
+              <a:rPr sz="1800" b="0">
+                <a:solidFill>
+                  <a:srgbClr val="00B4B4"/>
+                </a:solidFill>
+                <a:latin typeface="Barlow Condensed"/>
+              </a:rPr>
+              <a:t>jusqu’à 16h00</a:t>
+            </a:r>
+          </a:p>
+          <a:p>
+            <a:pPr algn="ctr">
+              <a:lnSpc>
+                <a:spcPct val="150000"/>
+              </a:lnSpc>
+            </a:pPr>
+            <a:r>
+              <a:rPr sz="1400" b="0">
+                <a:solidFill>
+                  <a:srgbClr val="E3E3E3"/>
+                </a:solidFill>
+                <a:latin typeface="Barlow"/>
+              </a:rPr>
+              <a:t>Rotation 4</a:t>
+            </a:r>
+          </a:p>
+        </p:txBody>
+      </p:sp>
+      <p:sp>
+        <p:nvSpPr>
+          <p:cNvPr id="23" name="Rectangle 22"/>
+          <p:cNvSpPr/>
+          <p:nvPr/>
+        </p:nvSpPr>
+        <p:spPr>
+          <a:xfrm>
+            <a:off x="8236800" y="9644757"/>
+            <a:ext cx="1735200" cy="1440000"/>
+          </a:xfrm>
+          <a:prstGeom prst="rect">
+            <a:avLst/>
+          </a:prstGeom>
+          <a:solidFill>
+            <a:srgbClr val="2E2E50"/>
+          </a:solidFill>
+          <a:ln>
+            <a:noFill/>
+          </a:ln>
+          <a:effectLst/>
+        </p:spPr>
+        <p:txBody>
+          <a:bodyPr rtlCol="0" anchor="ctr"/>
+          <a:lstStyle/>
+          <a:p>
+            <a:pPr algn="ctr"/>
+          </a:p>
+        </p:txBody>
+      </p:sp>
+      <p:sp>
+        <p:nvSpPr>
+          <p:cNvPr id="24" name="TextBox 23"/>
+          <p:cNvSpPr txBox="1"/>
+          <p:nvPr/>
+        </p:nvSpPr>
+        <p:spPr>
+          <a:xfrm>
+            <a:off x="8236800" y="9860757"/>
+            <a:ext cx="1735200" cy="1152000"/>
+          </a:xfrm>
+          <a:prstGeom prst="rect">
+            <a:avLst/>
+          </a:prstGeom>
+          <a:noFill/>
+        </p:spPr>
+        <p:txBody>
+          <a:bodyPr wrap="square" anchor="t" lIns="0" rIns="0" tIns="0" bIns="0">
+            <a:spAutoFit/>
+          </a:bodyPr>
+          <a:lstStyle/>
+          <a:p>
+            <a:pPr algn="ctr">
+              <a:lnSpc>
+                <a:spcPct val="100000"/>
+              </a:lnSpc>
+            </a:pPr>
+            <a:r>
+              <a:rPr sz="3200" b="1">
+                <a:solidFill>
+                  <a:srgbClr val="00B4B4"/>
+                </a:solidFill>
+                <a:latin typeface="Barlow Condensed"/>
+              </a:rPr>
               <a:t>16h00</a:t>
             </a:r>
           </a:p>
           <a:p>
             <a:pPr algn="ctr">
               <a:lnSpc>
-                <a:spcPct val="115000"/>
-              </a:lnSpc>
-            </a:pPr>
-            <a:r>
-              <a:rPr sz="2000" b="0">
+                <a:spcPct val="120000"/>
+              </a:lnSpc>
+            </a:pPr>
+            <a:r>
+              <a:rPr sz="1800" b="0">
                 <a:solidFill>
                   <a:srgbClr val="00B4B4"/>
                 </a:solidFill>
                 <a:latin typeface="Barlow Condensed"/>
               </a:rPr>
-              <a:t>→ 16h30</a:t>
+              <a:t>jusqu’à 16h30</a:t>
             </a:r>
           </a:p>
           <a:p>
@@ -9268,7 +9970,7 @@
       </p:sp>
       <p:sp>
         <p:nvSpPr>
-          <p:cNvPr id="22" name="Rectangle 21"/>
+          <p:cNvPr id="25" name="Rectangle 24"/>
           <p:cNvSpPr/>
           <p:nvPr/>
         </p:nvSpPr>
@@ -9298,7 +10000,7 @@
       </p:sp>
       <p:sp>
         <p:nvSpPr>
-          <p:cNvPr id="23" name="Rectangle 22"/>
+          <p:cNvPr id="26" name="Rectangle 25"/>
           <p:cNvSpPr/>
           <p:nvPr/>
         </p:nvSpPr>
@@ -9328,7 +10030,7 @@
       </p:sp>
       <p:pic>
         <p:nvPicPr>
-          <p:cNvPr id="24" name="Picture 23" descr="testing-event-2026.png"/>
+          <p:cNvPr id="27" name="Picture 26" descr="testing-event-2026.png"/>
           <p:cNvPicPr>
             <a:picLocks noChangeAspect="1"/>
           </p:cNvPicPr>
@@ -9352,7 +10054,7 @@
       </p:pic>
       <p:sp>
         <p:nvSpPr>
-          <p:cNvPr id="25" name="TextBox 24"/>
+          <p:cNvPr id="28" name="TextBox 27"/>
           <p:cNvSpPr txBox="1"/>
           <p:nvPr/>
         </p:nvSpPr>
@@ -9748,8 +10450,8 @@
         </p:nvSpPr>
         <p:spPr>
           <a:xfrm>
-            <a:off x="720000" y="6336000"/>
-            <a:ext cx="9252000" cy="2304000"/>
+            <a:off x="720000" y="6263999"/>
+            <a:ext cx="9252000" cy="1069848"/>
           </a:xfrm>
           <a:prstGeom prst="rect">
             <a:avLst/>
@@ -9768,7 +10470,7 @@
               </a:lnSpc>
             </a:pPr>
             <a:r>
-              <a:rPr sz="3400" b="0">
+              <a:rPr sz="2600" b="0">
                 <a:solidFill>
                   <a:srgbClr val="E3E3E3"/>
                 </a:solidFill>
@@ -9787,8 +10489,8 @@
         </p:nvSpPr>
         <p:spPr>
           <a:xfrm>
-            <a:off x="720000" y="9072000"/>
-            <a:ext cx="9252000" cy="432000"/>
+            <a:off x="720000" y="7621847"/>
+            <a:ext cx="9252000" cy="396000"/>
           </a:xfrm>
           <a:prstGeom prst="rect">
             <a:avLst/>
@@ -9813,7 +10515,7 @@
                 </a:solidFill>
                 <a:latin typeface="Barlow Condensed"/>
               </a:rPr>
-              <a:t>5 ROTATIONS DE 30 MINUTES · 14h00 → 16h30</a:t>
+              <a:t>ANIMÉ PAR</a:t>
             </a:r>
           </a:p>
         </p:txBody>
@@ -9826,8 +10528,8 @@
         </p:nvSpPr>
         <p:spPr>
           <a:xfrm>
-            <a:off x="720000" y="9648000"/>
-            <a:ext cx="1735200" cy="1655999"/>
+            <a:off x="720000" y="8053847"/>
+            <a:ext cx="9252000" cy="1201823"/>
           </a:xfrm>
           <a:prstGeom prst="rect">
             <a:avLst/>
@@ -9856,8 +10558,8 @@
         </p:nvSpPr>
         <p:spPr>
           <a:xfrm>
-            <a:off x="720000" y="9900000"/>
-            <a:ext cx="1735200" cy="1224000"/>
+            <a:off x="936000" y="8233847"/>
+            <a:ext cx="8820000" cy="841823"/>
           </a:xfrm>
           <a:prstGeom prst="rect">
             <a:avLst/>
@@ -9870,65 +10572,106 @@
           </a:bodyPr>
           <a:lstStyle/>
           <a:p>
-            <a:pPr algn="ctr">
+            <a:pPr algn="l">
+              <a:lnSpc>
+                <a:spcPct val="120000"/>
+              </a:lnSpc>
+            </a:pPr>
+            <a:r>
+              <a:rPr sz="1800" b="1">
+                <a:solidFill>
+                  <a:srgbClr val="00B4B4"/>
+                </a:solidFill>
+                <a:latin typeface="Barlow Condensed"/>
+              </a:rPr>
+              <a:t>OPEN</a:t>
+            </a:r>
+            <a:r>
+              <a:rPr sz="2400" b="0">
+                <a:solidFill>
+                  <a:srgbClr val="FFFFFF"/>
+                </a:solidFill>
+                <a:latin typeface="Barlow"/>
+              </a:rPr>
+              <a:t>   Alexandre BRUN</a:t>
+            </a:r>
+          </a:p>
+          <a:p>
+            <a:pPr algn="l">
+              <a:lnSpc>
+                <a:spcPct val="120000"/>
+              </a:lnSpc>
+            </a:pPr>
+            <a:r>
+              <a:rPr sz="1800" b="1">
+                <a:solidFill>
+                  <a:srgbClr val="00B4B4"/>
+                </a:solidFill>
+                <a:latin typeface="Barlow Condensed"/>
+              </a:rPr>
+              <a:t>TFC</a:t>
+            </a:r>
+            <a:r>
+              <a:rPr sz="2400" b="0">
+                <a:solidFill>
+                  <a:srgbClr val="FFFFFF"/>
+                </a:solidFill>
+                <a:latin typeface="Barlow"/>
+              </a:rPr>
+              <a:t>   Fadi AIZOUKI</a:t>
+            </a:r>
+          </a:p>
+        </p:txBody>
+      </p:sp>
+      <p:sp>
+        <p:nvSpPr>
+          <p:cNvPr id="14" name="TextBox 13"/>
+          <p:cNvSpPr txBox="1"/>
+          <p:nvPr/>
+        </p:nvSpPr>
+        <p:spPr>
+          <a:xfrm>
+            <a:off x="720000" y="9579670"/>
+            <a:ext cx="9252000" cy="432000"/>
+          </a:xfrm>
+          <a:prstGeom prst="rect">
+            <a:avLst/>
+          </a:prstGeom>
+          <a:noFill/>
+        </p:spPr>
+        <p:txBody>
+          <a:bodyPr wrap="square" anchor="t" lIns="0" rIns="0" tIns="0" bIns="0">
+            <a:spAutoFit/>
+          </a:bodyPr>
+          <a:lstStyle/>
+          <a:p>
+            <a:pPr algn="l">
               <a:lnSpc>
                 <a:spcPct val="100000"/>
               </a:lnSpc>
             </a:pPr>
             <a:r>
-              <a:rPr sz="3200" b="1">
+              <a:rPr sz="2400" b="1">
                 <a:solidFill>
                   <a:srgbClr val="00B4B4"/>
                 </a:solidFill>
                 <a:latin typeface="Barlow Condensed"/>
               </a:rPr>
-              <a:t>14h00</a:t>
-            </a:r>
-          </a:p>
-          <a:p>
-            <a:pPr algn="ctr">
-              <a:lnSpc>
-                <a:spcPct val="115000"/>
-              </a:lnSpc>
-            </a:pPr>
-            <a:r>
-              <a:rPr sz="2000" b="0">
-                <a:solidFill>
-                  <a:srgbClr val="00B4B4"/>
-                </a:solidFill>
-                <a:latin typeface="Barlow Condensed"/>
-              </a:rPr>
-              <a:t>→ 14h30</a:t>
-            </a:r>
-          </a:p>
-          <a:p>
-            <a:pPr algn="ctr">
-              <a:lnSpc>
-                <a:spcPct val="150000"/>
-              </a:lnSpc>
-            </a:pPr>
-            <a:r>
-              <a:rPr sz="1400" b="0">
-                <a:solidFill>
-                  <a:srgbClr val="E3E3E3"/>
-                </a:solidFill>
-                <a:latin typeface="Barlow"/>
-              </a:rPr>
-              <a:t>Rotation 1</a:t>
-            </a:r>
-          </a:p>
-        </p:txBody>
-      </p:sp>
-      <p:sp>
-        <p:nvSpPr>
-          <p:cNvPr id="14" name="Rectangle 13"/>
+              <a:t>5 ROTATIONS DE 30 MINUTES · 14h00 à 16h30</a:t>
+            </a:r>
+          </a:p>
+        </p:txBody>
+      </p:sp>
+      <p:sp>
+        <p:nvSpPr>
+          <p:cNvPr id="15" name="Rectangle 14"/>
           <p:cNvSpPr/>
           <p:nvPr/>
         </p:nvSpPr>
         <p:spPr>
           <a:xfrm>
-            <a:off x="2599200" y="9648000"/>
-            <a:ext cx="1735200" cy="1655999"/>
+            <a:off x="720000" y="10083669"/>
+            <a:ext cx="1735200" cy="1440000"/>
           </a:xfrm>
           <a:prstGeom prst="rect">
             <a:avLst/>
@@ -9951,14 +10694,14 @@
       </p:sp>
       <p:sp>
         <p:nvSpPr>
-          <p:cNvPr id="15" name="TextBox 14"/>
+          <p:cNvPr id="16" name="TextBox 15"/>
           <p:cNvSpPr txBox="1"/>
           <p:nvPr/>
         </p:nvSpPr>
         <p:spPr>
           <a:xfrm>
-            <a:off x="2599200" y="9900000"/>
-            <a:ext cx="1735200" cy="1224000"/>
+            <a:off x="720000" y="10299669"/>
+            <a:ext cx="1735200" cy="1152000"/>
           </a:xfrm>
           <a:prstGeom prst="rect">
             <a:avLst/>
@@ -9983,23 +10726,23 @@
                 </a:solidFill>
                 <a:latin typeface="Barlow Condensed"/>
               </a:rPr>
-              <a:t>14h30</a:t>
-            </a:r>
-          </a:p>
-          <a:p>
-            <a:pPr algn="ctr">
-              <a:lnSpc>
-                <a:spcPct val="115000"/>
-              </a:lnSpc>
-            </a:pPr>
-            <a:r>
-              <a:rPr sz="2000" b="0">
+              <a:t>14h00</a:t>
+            </a:r>
+          </a:p>
+          <a:p>
+            <a:pPr algn="ctr">
+              <a:lnSpc>
+                <a:spcPct val="120000"/>
+              </a:lnSpc>
+            </a:pPr>
+            <a:r>
+              <a:rPr sz="1800" b="0">
                 <a:solidFill>
                   <a:srgbClr val="00B4B4"/>
                 </a:solidFill>
                 <a:latin typeface="Barlow Condensed"/>
               </a:rPr>
-              <a:t>→ 15h00</a:t>
+              <a:t>jusqu’à 14h30</a:t>
             </a:r>
           </a:p>
           <a:p>
@@ -10015,21 +10758,21 @@
                 </a:solidFill>
                 <a:latin typeface="Barlow"/>
               </a:rPr>
-              <a:t>Rotation 2</a:t>
-            </a:r>
-          </a:p>
-        </p:txBody>
-      </p:sp>
-      <p:sp>
-        <p:nvSpPr>
-          <p:cNvPr id="16" name="Rectangle 15"/>
+              <a:t>Rotation 1</a:t>
+            </a:r>
+          </a:p>
+        </p:txBody>
+      </p:sp>
+      <p:sp>
+        <p:nvSpPr>
+          <p:cNvPr id="17" name="Rectangle 16"/>
           <p:cNvSpPr/>
           <p:nvPr/>
         </p:nvSpPr>
         <p:spPr>
           <a:xfrm>
-            <a:off x="4478400" y="9648000"/>
-            <a:ext cx="1735200" cy="1655999"/>
+            <a:off x="2599200" y="10083669"/>
+            <a:ext cx="1735200" cy="1440000"/>
           </a:xfrm>
           <a:prstGeom prst="rect">
             <a:avLst/>
@@ -10052,14 +10795,14 @@
       </p:sp>
       <p:sp>
         <p:nvSpPr>
-          <p:cNvPr id="17" name="TextBox 16"/>
+          <p:cNvPr id="18" name="TextBox 17"/>
           <p:cNvSpPr txBox="1"/>
           <p:nvPr/>
         </p:nvSpPr>
         <p:spPr>
           <a:xfrm>
-            <a:off x="4478400" y="9900000"/>
-            <a:ext cx="1735200" cy="1224000"/>
+            <a:off x="2599200" y="10299669"/>
+            <a:ext cx="1735200" cy="1152000"/>
           </a:xfrm>
           <a:prstGeom prst="rect">
             <a:avLst/>
@@ -10084,23 +10827,23 @@
                 </a:solidFill>
                 <a:latin typeface="Barlow Condensed"/>
               </a:rPr>
-              <a:t>15h00</a:t>
-            </a:r>
-          </a:p>
-          <a:p>
-            <a:pPr algn="ctr">
-              <a:lnSpc>
-                <a:spcPct val="115000"/>
-              </a:lnSpc>
-            </a:pPr>
-            <a:r>
-              <a:rPr sz="2000" b="0">
+              <a:t>14h30</a:t>
+            </a:r>
+          </a:p>
+          <a:p>
+            <a:pPr algn="ctr">
+              <a:lnSpc>
+                <a:spcPct val="120000"/>
+              </a:lnSpc>
+            </a:pPr>
+            <a:r>
+              <a:rPr sz="1800" b="0">
                 <a:solidFill>
                   <a:srgbClr val="00B4B4"/>
                 </a:solidFill>
                 <a:latin typeface="Barlow Condensed"/>
               </a:rPr>
-              <a:t>→ 15h30</a:t>
+              <a:t>jusqu’à 15h00</a:t>
             </a:r>
           </a:p>
           <a:p>
@@ -10116,21 +10859,21 @@
                 </a:solidFill>
                 <a:latin typeface="Barlow"/>
               </a:rPr>
-              <a:t>Rotation 3</a:t>
-            </a:r>
-          </a:p>
-        </p:txBody>
-      </p:sp>
-      <p:sp>
-        <p:nvSpPr>
-          <p:cNvPr id="18" name="Rectangle 17"/>
+              <a:t>Rotation 2</a:t>
+            </a:r>
+          </a:p>
+        </p:txBody>
+      </p:sp>
+      <p:sp>
+        <p:nvSpPr>
+          <p:cNvPr id="19" name="Rectangle 18"/>
           <p:cNvSpPr/>
           <p:nvPr/>
         </p:nvSpPr>
         <p:spPr>
           <a:xfrm>
-            <a:off x="6357600" y="9648000"/>
-            <a:ext cx="1735200" cy="1655999"/>
+            <a:off x="4478400" y="10083669"/>
+            <a:ext cx="1735200" cy="1440000"/>
           </a:xfrm>
           <a:prstGeom prst="rect">
             <a:avLst/>
@@ -10153,14 +10896,14 @@
       </p:sp>
       <p:sp>
         <p:nvSpPr>
-          <p:cNvPr id="19" name="TextBox 18"/>
+          <p:cNvPr id="20" name="TextBox 19"/>
           <p:cNvSpPr txBox="1"/>
           <p:nvPr/>
         </p:nvSpPr>
         <p:spPr>
           <a:xfrm>
-            <a:off x="6357600" y="9900000"/>
-            <a:ext cx="1735200" cy="1224000"/>
+            <a:off x="4478400" y="10299669"/>
+            <a:ext cx="1735200" cy="1152000"/>
           </a:xfrm>
           <a:prstGeom prst="rect">
             <a:avLst/>
@@ -10185,23 +10928,23 @@
                 </a:solidFill>
                 <a:latin typeface="Barlow Condensed"/>
               </a:rPr>
-              <a:t>15h30</a:t>
-            </a:r>
-          </a:p>
-          <a:p>
-            <a:pPr algn="ctr">
-              <a:lnSpc>
-                <a:spcPct val="115000"/>
-              </a:lnSpc>
-            </a:pPr>
-            <a:r>
-              <a:rPr sz="2000" b="0">
+              <a:t>15h00</a:t>
+            </a:r>
+          </a:p>
+          <a:p>
+            <a:pPr algn="ctr">
+              <a:lnSpc>
+                <a:spcPct val="120000"/>
+              </a:lnSpc>
+            </a:pPr>
+            <a:r>
+              <a:rPr sz="1800" b="0">
                 <a:solidFill>
                   <a:srgbClr val="00B4B4"/>
                 </a:solidFill>
                 <a:latin typeface="Barlow Condensed"/>
               </a:rPr>
-              <a:t>→ 16h00</a:t>
+              <a:t>jusqu’à 15h30</a:t>
             </a:r>
           </a:p>
           <a:p>
@@ -10217,21 +10960,21 @@
                 </a:solidFill>
                 <a:latin typeface="Barlow"/>
               </a:rPr>
-              <a:t>Rotation 4</a:t>
-            </a:r>
-          </a:p>
-        </p:txBody>
-      </p:sp>
-      <p:sp>
-        <p:nvSpPr>
-          <p:cNvPr id="20" name="Rectangle 19"/>
+              <a:t>Rotation 3</a:t>
+            </a:r>
+          </a:p>
+        </p:txBody>
+      </p:sp>
+      <p:sp>
+        <p:nvSpPr>
+          <p:cNvPr id="21" name="Rectangle 20"/>
           <p:cNvSpPr/>
           <p:nvPr/>
         </p:nvSpPr>
         <p:spPr>
           <a:xfrm>
-            <a:off x="8236800" y="9648000"/>
-            <a:ext cx="1735200" cy="1655999"/>
+            <a:off x="6357600" y="10083669"/>
+            <a:ext cx="1735200" cy="1440000"/>
           </a:xfrm>
           <a:prstGeom prst="rect">
             <a:avLst/>
@@ -10254,14 +10997,14 @@
       </p:sp>
       <p:sp>
         <p:nvSpPr>
-          <p:cNvPr id="21" name="TextBox 20"/>
+          <p:cNvPr id="22" name="TextBox 21"/>
           <p:cNvSpPr txBox="1"/>
           <p:nvPr/>
         </p:nvSpPr>
         <p:spPr>
           <a:xfrm>
-            <a:off x="8236800" y="9900000"/>
-            <a:ext cx="1735200" cy="1224000"/>
+            <a:off x="6357600" y="10299669"/>
+            <a:ext cx="1735200" cy="1152000"/>
           </a:xfrm>
           <a:prstGeom prst="rect">
             <a:avLst/>
@@ -10286,23 +11029,124 @@
                 </a:solidFill>
                 <a:latin typeface="Barlow Condensed"/>
               </a:rPr>
+              <a:t>15h30</a:t>
+            </a:r>
+          </a:p>
+          <a:p>
+            <a:pPr algn="ctr">
+              <a:lnSpc>
+                <a:spcPct val="120000"/>
+              </a:lnSpc>
+            </a:pPr>
+            <a:r>
+              <a:rPr sz="1800" b="0">
+                <a:solidFill>
+                  <a:srgbClr val="00B4B4"/>
+                </a:solidFill>
+                <a:latin typeface="Barlow Condensed"/>
+              </a:rPr>
+              <a:t>jusqu’à 16h00</a:t>
+            </a:r>
+          </a:p>
+          <a:p>
+            <a:pPr algn="ctr">
+              <a:lnSpc>
+                <a:spcPct val="150000"/>
+              </a:lnSpc>
+            </a:pPr>
+            <a:r>
+              <a:rPr sz="1400" b="0">
+                <a:solidFill>
+                  <a:srgbClr val="E3E3E3"/>
+                </a:solidFill>
+                <a:latin typeface="Barlow"/>
+              </a:rPr>
+              <a:t>Rotation 4</a:t>
+            </a:r>
+          </a:p>
+        </p:txBody>
+      </p:sp>
+      <p:sp>
+        <p:nvSpPr>
+          <p:cNvPr id="23" name="Rectangle 22"/>
+          <p:cNvSpPr/>
+          <p:nvPr/>
+        </p:nvSpPr>
+        <p:spPr>
+          <a:xfrm>
+            <a:off x="8236800" y="10083669"/>
+            <a:ext cx="1735200" cy="1440000"/>
+          </a:xfrm>
+          <a:prstGeom prst="rect">
+            <a:avLst/>
+          </a:prstGeom>
+          <a:solidFill>
+            <a:srgbClr val="2E2E50"/>
+          </a:solidFill>
+          <a:ln>
+            <a:noFill/>
+          </a:ln>
+          <a:effectLst/>
+        </p:spPr>
+        <p:txBody>
+          <a:bodyPr rtlCol="0" anchor="ctr"/>
+          <a:lstStyle/>
+          <a:p>
+            <a:pPr algn="ctr"/>
+          </a:p>
+        </p:txBody>
+      </p:sp>
+      <p:sp>
+        <p:nvSpPr>
+          <p:cNvPr id="24" name="TextBox 23"/>
+          <p:cNvSpPr txBox="1"/>
+          <p:nvPr/>
+        </p:nvSpPr>
+        <p:spPr>
+          <a:xfrm>
+            <a:off x="8236800" y="10299669"/>
+            <a:ext cx="1735200" cy="1152000"/>
+          </a:xfrm>
+          <a:prstGeom prst="rect">
+            <a:avLst/>
+          </a:prstGeom>
+          <a:noFill/>
+        </p:spPr>
+        <p:txBody>
+          <a:bodyPr wrap="square" anchor="t" lIns="0" rIns="0" tIns="0" bIns="0">
+            <a:spAutoFit/>
+          </a:bodyPr>
+          <a:lstStyle/>
+          <a:p>
+            <a:pPr algn="ctr">
+              <a:lnSpc>
+                <a:spcPct val="100000"/>
+              </a:lnSpc>
+            </a:pPr>
+            <a:r>
+              <a:rPr sz="3200" b="1">
+                <a:solidFill>
+                  <a:srgbClr val="00B4B4"/>
+                </a:solidFill>
+                <a:latin typeface="Barlow Condensed"/>
+              </a:rPr>
               <a:t>16h00</a:t>
             </a:r>
           </a:p>
           <a:p>
             <a:pPr algn="ctr">
               <a:lnSpc>
-                <a:spcPct val="115000"/>
-              </a:lnSpc>
-            </a:pPr>
-            <a:r>
-              <a:rPr sz="2000" b="0">
+                <a:spcPct val="120000"/>
+              </a:lnSpc>
+            </a:pPr>
+            <a:r>
+              <a:rPr sz="1800" b="0">
                 <a:solidFill>
                   <a:srgbClr val="00B4B4"/>
                 </a:solidFill>
                 <a:latin typeface="Barlow Condensed"/>
               </a:rPr>
-              <a:t>→ 16h30</a:t>
+              <a:t>jusqu’à 16h30</a:t>
             </a:r>
           </a:p>
           <a:p>
@@ -10325,7 +11169,7 @@
       </p:sp>
       <p:sp>
         <p:nvSpPr>
-          <p:cNvPr id="22" name="Rectangle 21"/>
+          <p:cNvPr id="25" name="Rectangle 24"/>
           <p:cNvSpPr/>
           <p:nvPr/>
         </p:nvSpPr>
@@ -10355,7 +11199,7 @@
       </p:sp>
       <p:sp>
         <p:nvSpPr>
-          <p:cNvPr id="23" name="Rectangle 22"/>
+          <p:cNvPr id="26" name="Rectangle 25"/>
           <p:cNvSpPr/>
           <p:nvPr/>
         </p:nvSpPr>
@@ -10385,7 +11229,7 @@
       </p:sp>
       <p:pic>
         <p:nvPicPr>
-          <p:cNvPr id="24" name="Picture 23" descr="testing-event-2026.png"/>
+          <p:cNvPr id="27" name="Picture 26" descr="testing-event-2026.png"/>
           <p:cNvPicPr>
             <a:picLocks noChangeAspect="1"/>
           </p:cNvPicPr>
@@ -10409,7 +11253,7 @@
       </p:pic>
       <p:sp>
         <p:nvSpPr>
-          <p:cNvPr id="25" name="TextBox 24"/>
+          <p:cNvPr id="28" name="TextBox 27"/>
           <p:cNvSpPr txBox="1"/>
           <p:nvPr/>
         </p:nvSpPr>
@@ -10805,8 +11649,8 @@
         </p:nvSpPr>
         <p:spPr>
           <a:xfrm>
-            <a:off x="720000" y="6336000"/>
-            <a:ext cx="9252000" cy="2304000"/>
+            <a:off x="720000" y="6263999"/>
+            <a:ext cx="9252000" cy="1069848"/>
           </a:xfrm>
           <a:prstGeom prst="rect">
             <a:avLst/>
@@ -10825,7 +11669,7 @@
               </a:lnSpc>
             </a:pPr>
             <a:r>
-              <a:rPr sz="3400" b="0">
+              <a:rPr sz="2600" b="0">
                 <a:solidFill>
                   <a:srgbClr val="E3E3E3"/>
                 </a:solidFill>
@@ -10844,8 +11688,8 @@
         </p:nvSpPr>
         <p:spPr>
           <a:xfrm>
-            <a:off x="720000" y="9072000"/>
-            <a:ext cx="9252000" cy="432000"/>
+            <a:off x="720000" y="7621847"/>
+            <a:ext cx="9252000" cy="396000"/>
           </a:xfrm>
           <a:prstGeom prst="rect">
             <a:avLst/>
@@ -10870,7 +11714,7 @@
                 </a:solidFill>
                 <a:latin typeface="Barlow Condensed"/>
               </a:rPr>
-              <a:t>5 ROTATIONS DE 30 MINUTES · 14h00 → 16h30</a:t>
+              <a:t>ANIMÉ PAR</a:t>
             </a:r>
           </a:p>
         </p:txBody>
@@ -10883,8 +11727,8 @@
         </p:nvSpPr>
         <p:spPr>
           <a:xfrm>
-            <a:off x="720000" y="9648000"/>
-            <a:ext cx="1735200" cy="1655999"/>
+            <a:off x="720000" y="8053847"/>
+            <a:ext cx="9252000" cy="1201823"/>
           </a:xfrm>
           <a:prstGeom prst="rect">
             <a:avLst/>
@@ -10913,8 +11757,8 @@
         </p:nvSpPr>
         <p:spPr>
           <a:xfrm>
-            <a:off x="720000" y="9900000"/>
-            <a:ext cx="1735200" cy="1224000"/>
+            <a:off x="936000" y="8233847"/>
+            <a:ext cx="8820000" cy="841823"/>
           </a:xfrm>
           <a:prstGeom prst="rect">
             <a:avLst/>
@@ -10927,65 +11771,106 @@
           </a:bodyPr>
           <a:lstStyle/>
           <a:p>
-            <a:pPr algn="ctr">
+            <a:pPr algn="l">
+              <a:lnSpc>
+                <a:spcPct val="120000"/>
+              </a:lnSpc>
+            </a:pPr>
+            <a:r>
+              <a:rPr sz="1800" b="1">
+                <a:solidFill>
+                  <a:srgbClr val="00B4B4"/>
+                </a:solidFill>
+                <a:latin typeface="Barlow Condensed"/>
+              </a:rPr>
+              <a:t>TFC</a:t>
+            </a:r>
+            <a:r>
+              <a:rPr sz="2400" b="0">
+                <a:solidFill>
+                  <a:srgbClr val="FFFFFF"/>
+                </a:solidFill>
+                <a:latin typeface="Barlow"/>
+              </a:rPr>
+              <a:t>   Donatien REVEAU et Elodie TORDJMAN</a:t>
+            </a:r>
+          </a:p>
+          <a:p>
+            <a:pPr algn="l">
+              <a:lnSpc>
+                <a:spcPct val="120000"/>
+              </a:lnSpc>
+            </a:pPr>
+            <a:r>
+              <a:rPr sz="1800" b="1">
+                <a:solidFill>
+                  <a:srgbClr val="00B4B4"/>
+                </a:solidFill>
+                <a:latin typeface="Barlow Condensed"/>
+              </a:rPr>
+              <a:t>DF Dommages</a:t>
+            </a:r>
+            <a:r>
+              <a:rPr sz="2400" b="0">
+                <a:solidFill>
+                  <a:srgbClr val="FFFFFF"/>
+                </a:solidFill>
+                <a:latin typeface="Barlow"/>
+              </a:rPr>
+              <a:t>   Vamé SYLLA</a:t>
+            </a:r>
+          </a:p>
+        </p:txBody>
+      </p:sp>
+      <p:sp>
+        <p:nvSpPr>
+          <p:cNvPr id="14" name="TextBox 13"/>
+          <p:cNvSpPr txBox="1"/>
+          <p:nvPr/>
+        </p:nvSpPr>
+        <p:spPr>
+          <a:xfrm>
+            <a:off x="720000" y="9579670"/>
+            <a:ext cx="9252000" cy="432000"/>
+          </a:xfrm>
+          <a:prstGeom prst="rect">
+            <a:avLst/>
+          </a:prstGeom>
+          <a:noFill/>
+        </p:spPr>
+        <p:txBody>
+          <a:bodyPr wrap="square" anchor="t" lIns="0" rIns="0" tIns="0" bIns="0">
+            <a:spAutoFit/>
+          </a:bodyPr>
+          <a:lstStyle/>
+          <a:p>
+            <a:pPr algn="l">
               <a:lnSpc>
                 <a:spcPct val="100000"/>
               </a:lnSpc>
             </a:pPr>
             <a:r>
-              <a:rPr sz="3200" b="1">
+              <a:rPr sz="2400" b="1">
                 <a:solidFill>
                   <a:srgbClr val="00B4B4"/>
                 </a:solidFill>
                 <a:latin typeface="Barlow Condensed"/>
               </a:rPr>
-              <a:t>14h00</a:t>
-            </a:r>
-          </a:p>
-          <a:p>
-            <a:pPr algn="ctr">
-              <a:lnSpc>
-                <a:spcPct val="115000"/>
-              </a:lnSpc>
-            </a:pPr>
-            <a:r>
-              <a:rPr sz="2000" b="0">
-                <a:solidFill>
-                  <a:srgbClr val="00B4B4"/>
-                </a:solidFill>
-                <a:latin typeface="Barlow Condensed"/>
-              </a:rPr>
-              <a:t>→ 14h30</a:t>
-            </a:r>
-          </a:p>
-          <a:p>
-            <a:pPr algn="ctr">
-              <a:lnSpc>
-                <a:spcPct val="150000"/>
-              </a:lnSpc>
-            </a:pPr>
-            <a:r>
-              <a:rPr sz="1400" b="0">
-                <a:solidFill>
-                  <a:srgbClr val="E3E3E3"/>
-                </a:solidFill>
-                <a:latin typeface="Barlow"/>
-              </a:rPr>
-              <a:t>Rotation 1</a:t>
-            </a:r>
-          </a:p>
-        </p:txBody>
-      </p:sp>
-      <p:sp>
-        <p:nvSpPr>
-          <p:cNvPr id="14" name="Rectangle 13"/>
+              <a:t>5 ROTATIONS DE 30 MINUTES · 14h00 à 16h30</a:t>
+            </a:r>
+          </a:p>
+        </p:txBody>
+      </p:sp>
+      <p:sp>
+        <p:nvSpPr>
+          <p:cNvPr id="15" name="Rectangle 14"/>
           <p:cNvSpPr/>
           <p:nvPr/>
         </p:nvSpPr>
         <p:spPr>
           <a:xfrm>
-            <a:off x="2599200" y="9648000"/>
-            <a:ext cx="1735200" cy="1655999"/>
+            <a:off x="720000" y="10083669"/>
+            <a:ext cx="1735200" cy="1440000"/>
           </a:xfrm>
           <a:prstGeom prst="rect">
             <a:avLst/>
@@ -11008,14 +11893,14 @@
       </p:sp>
       <p:sp>
         <p:nvSpPr>
-          <p:cNvPr id="15" name="TextBox 14"/>
+          <p:cNvPr id="16" name="TextBox 15"/>
           <p:cNvSpPr txBox="1"/>
           <p:nvPr/>
         </p:nvSpPr>
         <p:spPr>
           <a:xfrm>
-            <a:off x="2599200" y="9900000"/>
-            <a:ext cx="1735200" cy="1224000"/>
+            <a:off x="720000" y="10299669"/>
+            <a:ext cx="1735200" cy="1152000"/>
           </a:xfrm>
           <a:prstGeom prst="rect">
             <a:avLst/>
@@ -11040,23 +11925,23 @@
                 </a:solidFill>
                 <a:latin typeface="Barlow Condensed"/>
               </a:rPr>
-              <a:t>14h30</a:t>
-            </a:r>
-          </a:p>
-          <a:p>
-            <a:pPr algn="ctr">
-              <a:lnSpc>
-                <a:spcPct val="115000"/>
-              </a:lnSpc>
-            </a:pPr>
-            <a:r>
-              <a:rPr sz="2000" b="0">
+              <a:t>14h00</a:t>
+            </a:r>
+          </a:p>
+          <a:p>
+            <a:pPr algn="ctr">
+              <a:lnSpc>
+                <a:spcPct val="120000"/>
+              </a:lnSpc>
+            </a:pPr>
+            <a:r>
+              <a:rPr sz="1800" b="0">
                 <a:solidFill>
                   <a:srgbClr val="00B4B4"/>
                 </a:solidFill>
                 <a:latin typeface="Barlow Condensed"/>
               </a:rPr>
-              <a:t>→ 15h00</a:t>
+              <a:t>jusqu’à 14h30</a:t>
             </a:r>
           </a:p>
           <a:p>
@@ -11072,21 +11957,21 @@
                 </a:solidFill>
                 <a:latin typeface="Barlow"/>
               </a:rPr>
-              <a:t>Rotation 2</a:t>
-            </a:r>
-          </a:p>
-        </p:txBody>
-      </p:sp>
-      <p:sp>
-        <p:nvSpPr>
-          <p:cNvPr id="16" name="Rectangle 15"/>
+              <a:t>Rotation 1</a:t>
+            </a:r>
+          </a:p>
+        </p:txBody>
+      </p:sp>
+      <p:sp>
+        <p:nvSpPr>
+          <p:cNvPr id="17" name="Rectangle 16"/>
           <p:cNvSpPr/>
           <p:nvPr/>
         </p:nvSpPr>
         <p:spPr>
           <a:xfrm>
-            <a:off x="4478400" y="9648000"/>
-            <a:ext cx="1735200" cy="1655999"/>
+            <a:off x="2599200" y="10083669"/>
+            <a:ext cx="1735200" cy="1440000"/>
           </a:xfrm>
           <a:prstGeom prst="rect">
             <a:avLst/>
@@ -11109,14 +11994,14 @@
       </p:sp>
       <p:sp>
         <p:nvSpPr>
-          <p:cNvPr id="17" name="TextBox 16"/>
+          <p:cNvPr id="18" name="TextBox 17"/>
           <p:cNvSpPr txBox="1"/>
           <p:nvPr/>
         </p:nvSpPr>
         <p:spPr>
           <a:xfrm>
-            <a:off x="4478400" y="9900000"/>
-            <a:ext cx="1735200" cy="1224000"/>
+            <a:off x="2599200" y="10299669"/>
+            <a:ext cx="1735200" cy="1152000"/>
           </a:xfrm>
           <a:prstGeom prst="rect">
             <a:avLst/>
@@ -11141,23 +12026,23 @@
                 </a:solidFill>
                 <a:latin typeface="Barlow Condensed"/>
               </a:rPr>
-              <a:t>15h00</a:t>
-            </a:r>
-          </a:p>
-          <a:p>
-            <a:pPr algn="ctr">
-              <a:lnSpc>
-                <a:spcPct val="115000"/>
-              </a:lnSpc>
-            </a:pPr>
-            <a:r>
-              <a:rPr sz="2000" b="0">
+              <a:t>14h30</a:t>
+            </a:r>
+          </a:p>
+          <a:p>
+            <a:pPr algn="ctr">
+              <a:lnSpc>
+                <a:spcPct val="120000"/>
+              </a:lnSpc>
+            </a:pPr>
+            <a:r>
+              <a:rPr sz="1800" b="0">
                 <a:solidFill>
                   <a:srgbClr val="00B4B4"/>
                 </a:solidFill>
                 <a:latin typeface="Barlow Condensed"/>
               </a:rPr>
-              <a:t>→ 15h30</a:t>
+              <a:t>jusqu’à 15h00</a:t>
             </a:r>
           </a:p>
           <a:p>
@@ -11173,21 +12058,21 @@
                 </a:solidFill>
                 <a:latin typeface="Barlow"/>
               </a:rPr>
-              <a:t>Rotation 3</a:t>
-            </a:r>
-          </a:p>
-        </p:txBody>
-      </p:sp>
-      <p:sp>
-        <p:nvSpPr>
-          <p:cNvPr id="18" name="Rectangle 17"/>
+              <a:t>Rotation 2</a:t>
+            </a:r>
+          </a:p>
+        </p:txBody>
+      </p:sp>
+      <p:sp>
+        <p:nvSpPr>
+          <p:cNvPr id="19" name="Rectangle 18"/>
           <p:cNvSpPr/>
           <p:nvPr/>
         </p:nvSpPr>
         <p:spPr>
           <a:xfrm>
-            <a:off x="6357600" y="9648000"/>
-            <a:ext cx="1735200" cy="1655999"/>
+            <a:off x="4478400" y="10083669"/>
+            <a:ext cx="1735200" cy="1440000"/>
           </a:xfrm>
           <a:prstGeom prst="rect">
             <a:avLst/>
@@ -11210,14 +12095,14 @@
       </p:sp>
       <p:sp>
         <p:nvSpPr>
-          <p:cNvPr id="19" name="TextBox 18"/>
+          <p:cNvPr id="20" name="TextBox 19"/>
           <p:cNvSpPr txBox="1"/>
           <p:nvPr/>
         </p:nvSpPr>
         <p:spPr>
           <a:xfrm>
-            <a:off x="6357600" y="9900000"/>
-            <a:ext cx="1735200" cy="1224000"/>
+            <a:off x="4478400" y="10299669"/>
+            <a:ext cx="1735200" cy="1152000"/>
           </a:xfrm>
           <a:prstGeom prst="rect">
             <a:avLst/>
@@ -11242,23 +12127,23 @@
                 </a:solidFill>
                 <a:latin typeface="Barlow Condensed"/>
               </a:rPr>
-              <a:t>15h30</a:t>
-            </a:r>
-          </a:p>
-          <a:p>
-            <a:pPr algn="ctr">
-              <a:lnSpc>
-                <a:spcPct val="115000"/>
-              </a:lnSpc>
-            </a:pPr>
-            <a:r>
-              <a:rPr sz="2000" b="0">
+              <a:t>15h00</a:t>
+            </a:r>
+          </a:p>
+          <a:p>
+            <a:pPr algn="ctr">
+              <a:lnSpc>
+                <a:spcPct val="120000"/>
+              </a:lnSpc>
+            </a:pPr>
+            <a:r>
+              <a:rPr sz="1800" b="0">
                 <a:solidFill>
                   <a:srgbClr val="00B4B4"/>
                 </a:solidFill>
                 <a:latin typeface="Barlow Condensed"/>
               </a:rPr>
-              <a:t>→ 16h00</a:t>
+              <a:t>jusqu’à 15h30</a:t>
             </a:r>
           </a:p>
           <a:p>
@@ -11274,21 +12159,21 @@
                 </a:solidFill>
                 <a:latin typeface="Barlow"/>
               </a:rPr>
-              <a:t>Rotation 4</a:t>
-            </a:r>
-          </a:p>
-        </p:txBody>
-      </p:sp>
-      <p:sp>
-        <p:nvSpPr>
-          <p:cNvPr id="20" name="Rectangle 19"/>
+              <a:t>Rotation 3</a:t>
+            </a:r>
+          </a:p>
+        </p:txBody>
+      </p:sp>
+      <p:sp>
+        <p:nvSpPr>
+          <p:cNvPr id="21" name="Rectangle 20"/>
           <p:cNvSpPr/>
           <p:nvPr/>
         </p:nvSpPr>
         <p:spPr>
           <a:xfrm>
-            <a:off x="8236800" y="9648000"/>
-            <a:ext cx="1735200" cy="1655999"/>
+            <a:off x="6357600" y="10083669"/>
+            <a:ext cx="1735200" cy="1440000"/>
           </a:xfrm>
           <a:prstGeom prst="rect">
             <a:avLst/>
@@ -11311,14 +12196,14 @@
       </p:sp>
       <p:sp>
         <p:nvSpPr>
-          <p:cNvPr id="21" name="TextBox 20"/>
+          <p:cNvPr id="22" name="TextBox 21"/>
           <p:cNvSpPr txBox="1"/>
           <p:nvPr/>
         </p:nvSpPr>
         <p:spPr>
           <a:xfrm>
-            <a:off x="8236800" y="9900000"/>
-            <a:ext cx="1735200" cy="1224000"/>
+            <a:off x="6357600" y="10299669"/>
+            <a:ext cx="1735200" cy="1152000"/>
           </a:xfrm>
           <a:prstGeom prst="rect">
             <a:avLst/>
@@ -11343,23 +12228,124 @@
                 </a:solidFill>
                 <a:latin typeface="Barlow Condensed"/>
               </a:rPr>
+              <a:t>15h30</a:t>
+            </a:r>
+          </a:p>
+          <a:p>
+            <a:pPr algn="ctr">
+              <a:lnSpc>
+                <a:spcPct val="120000"/>
+              </a:lnSpc>
+            </a:pPr>
+            <a:r>
+              <a:rPr sz="1800" b="0">
+                <a:solidFill>
+                  <a:srgbClr val="00B4B4"/>
+                </a:solidFill>
+                <a:latin typeface="Barlow Condensed"/>
+              </a:rPr>
+              <a:t>jusqu’à 16h00</a:t>
+            </a:r>
+          </a:p>
+          <a:p>
+            <a:pPr algn="ctr">
+              <a:lnSpc>
+                <a:spcPct val="150000"/>
+              </a:lnSpc>
+            </a:pPr>
+            <a:r>
+              <a:rPr sz="1400" b="0">
+                <a:solidFill>
+                  <a:srgbClr val="E3E3E3"/>
+                </a:solidFill>
+                <a:latin typeface="Barlow"/>
+              </a:rPr>
+              <a:t>Rotation 4</a:t>
+            </a:r>
+          </a:p>
+        </p:txBody>
+      </p:sp>
+      <p:sp>
+        <p:nvSpPr>
+          <p:cNvPr id="23" name="Rectangle 22"/>
+          <p:cNvSpPr/>
+          <p:nvPr/>
+        </p:nvSpPr>
+        <p:spPr>
+          <a:xfrm>
+            <a:off x="8236800" y="10083669"/>
+            <a:ext cx="1735200" cy="1440000"/>
+          </a:xfrm>
+          <a:prstGeom prst="rect">
+            <a:avLst/>
+          </a:prstGeom>
+          <a:solidFill>
+            <a:srgbClr val="2E2E50"/>
+          </a:solidFill>
+          <a:ln>
+            <a:noFill/>
+          </a:ln>
+          <a:effectLst/>
+        </p:spPr>
+        <p:txBody>
+          <a:bodyPr rtlCol="0" anchor="ctr"/>
+          <a:lstStyle/>
+          <a:p>
+            <a:pPr algn="ctr"/>
+          </a:p>
+        </p:txBody>
+      </p:sp>
+      <p:sp>
+        <p:nvSpPr>
+          <p:cNvPr id="24" name="TextBox 23"/>
+          <p:cNvSpPr txBox="1"/>
+          <p:nvPr/>
+        </p:nvSpPr>
+        <p:spPr>
+          <a:xfrm>
+            <a:off x="8236800" y="10299669"/>
+            <a:ext cx="1735200" cy="1152000"/>
+          </a:xfrm>
+          <a:prstGeom prst="rect">
+            <a:avLst/>
+          </a:prstGeom>
+          <a:noFill/>
+        </p:spPr>
+        <p:txBody>
+          <a:bodyPr wrap="square" anchor="t" lIns="0" rIns="0" tIns="0" bIns="0">
+            <a:spAutoFit/>
+          </a:bodyPr>
+          <a:lstStyle/>
+          <a:p>
+            <a:pPr algn="ctr">
+              <a:lnSpc>
+                <a:spcPct val="100000"/>
+              </a:lnSpc>
+            </a:pPr>
+            <a:r>
+              <a:rPr sz="3200" b="1">
+                <a:solidFill>
+                  <a:srgbClr val="00B4B4"/>
+                </a:solidFill>
+                <a:latin typeface="Barlow Condensed"/>
+              </a:rPr>
               <a:t>16h00</a:t>
             </a:r>
           </a:p>
           <a:p>
             <a:pPr algn="ctr">
               <a:lnSpc>
-                <a:spcPct val="115000"/>
-              </a:lnSpc>
-            </a:pPr>
-            <a:r>
-              <a:rPr sz="2000" b="0">
+                <a:spcPct val="120000"/>
+              </a:lnSpc>
+            </a:pPr>
+            <a:r>
+              <a:rPr sz="1800" b="0">
                 <a:solidFill>
                   <a:srgbClr val="00B4B4"/>
                 </a:solidFill>
                 <a:latin typeface="Barlow Condensed"/>
               </a:rPr>
-              <a:t>→ 16h30</a:t>
+              <a:t>jusqu’à 16h30</a:t>
             </a:r>
           </a:p>
           <a:p>
@@ -11382,7 +12368,7 @@
       </p:sp>
       <p:sp>
         <p:nvSpPr>
-          <p:cNvPr id="22" name="Rectangle 21"/>
+          <p:cNvPr id="25" name="Rectangle 24"/>
           <p:cNvSpPr/>
           <p:nvPr/>
         </p:nvSpPr>
@@ -11412,7 +12398,7 @@
       </p:sp>
       <p:sp>
         <p:nvSpPr>
-          <p:cNvPr id="23" name="Rectangle 22"/>
+          <p:cNvPr id="26" name="Rectangle 25"/>
           <p:cNvSpPr/>
           <p:nvPr/>
         </p:nvSpPr>
@@ -11442,7 +12428,7 @@
       </p:sp>
       <p:pic>
         <p:nvPicPr>
-          <p:cNvPr id="24" name="Picture 23" descr="testing-event-2026.png"/>
+          <p:cNvPr id="27" name="Picture 26" descr="testing-event-2026.png"/>
           <p:cNvPicPr>
             <a:picLocks noChangeAspect="1"/>
           </p:cNvPicPr>
@@ -11466,7 +12452,7 @@
       </p:pic>
       <p:sp>
         <p:nvSpPr>
-          <p:cNvPr id="25" name="TextBox 24"/>
+          <p:cNvPr id="28" name="TextBox 27"/>
           <p:cNvSpPr txBox="1"/>
           <p:nvPr/>
         </p:nvSpPr>
@@ -11862,8 +12848,8 @@
         </p:nvSpPr>
         <p:spPr>
           <a:xfrm>
-            <a:off x="720000" y="6336000"/>
-            <a:ext cx="9252000" cy="2304000"/>
+            <a:off x="720000" y="6263999"/>
+            <a:ext cx="9252000" cy="1069848"/>
           </a:xfrm>
           <a:prstGeom prst="rect">
             <a:avLst/>
@@ -11882,7 +12868,7 @@
               </a:lnSpc>
             </a:pPr>
             <a:r>
-              <a:rPr sz="3400" b="0">
+              <a:rPr sz="2600" b="0">
                 <a:solidFill>
                   <a:srgbClr val="E3E3E3"/>
                 </a:solidFill>
@@ -11901,8 +12887,8 @@
         </p:nvSpPr>
         <p:spPr>
           <a:xfrm>
-            <a:off x="720000" y="9072000"/>
-            <a:ext cx="9252000" cy="432000"/>
+            <a:off x="720000" y="7621847"/>
+            <a:ext cx="9252000" cy="396000"/>
           </a:xfrm>
           <a:prstGeom prst="rect">
             <a:avLst/>
@@ -11927,7 +12913,7 @@
                 </a:solidFill>
                 <a:latin typeface="Barlow Condensed"/>
               </a:rPr>
-              <a:t>5 ROTATIONS DE 30 MINUTES · 14h00 → 16h30</a:t>
+              <a:t>ANIMÉ PAR</a:t>
             </a:r>
           </a:p>
         </p:txBody>
@@ -11940,8 +12926,8 @@
         </p:nvSpPr>
         <p:spPr>
           <a:xfrm>
-            <a:off x="720000" y="9648000"/>
-            <a:ext cx="1735200" cy="1655999"/>
+            <a:off x="720000" y="8053847"/>
+            <a:ext cx="9252000" cy="1201823"/>
           </a:xfrm>
           <a:prstGeom prst="rect">
             <a:avLst/>
@@ -11970,8 +12956,8 @@
         </p:nvSpPr>
         <p:spPr>
           <a:xfrm>
-            <a:off x="720000" y="9900000"/>
-            <a:ext cx="1735200" cy="1224000"/>
+            <a:off x="936000" y="8233847"/>
+            <a:ext cx="8820000" cy="841823"/>
           </a:xfrm>
           <a:prstGeom prst="rect">
             <a:avLst/>
@@ -11984,65 +12970,106 @@
           </a:bodyPr>
           <a:lstStyle/>
           <a:p>
-            <a:pPr algn="ctr">
+            <a:pPr algn="l">
+              <a:lnSpc>
+                <a:spcPct val="120000"/>
+              </a:lnSpc>
+            </a:pPr>
+            <a:r>
+              <a:rPr sz="1800" b="1">
+                <a:solidFill>
+                  <a:srgbClr val="00B4B4"/>
+                </a:solidFill>
+                <a:latin typeface="Barlow Condensed"/>
+              </a:rPr>
+              <a:t>TFC</a:t>
+            </a:r>
+            <a:r>
+              <a:rPr sz="2400" b="0">
+                <a:solidFill>
+                  <a:srgbClr val="FFFFFF"/>
+                </a:solidFill>
+                <a:latin typeface="Barlow"/>
+              </a:rPr>
+              <a:t>   Gabriel MOROSAN et Laurie ZINGLE</a:t>
+            </a:r>
+          </a:p>
+          <a:p>
+            <a:pPr algn="l">
+              <a:lnSpc>
+                <a:spcPct val="120000"/>
+              </a:lnSpc>
+            </a:pPr>
+            <a:r>
+              <a:rPr sz="1800" b="1">
+                <a:solidFill>
+                  <a:srgbClr val="00B4B4"/>
+                </a:solidFill>
+                <a:latin typeface="Barlow Condensed"/>
+              </a:rPr>
+              <a:t>MCAD</a:t>
+            </a:r>
+            <a:r>
+              <a:rPr sz="2400" b="0">
+                <a:solidFill>
+                  <a:srgbClr val="FFFFFF"/>
+                </a:solidFill>
+                <a:latin typeface="Barlow"/>
+              </a:rPr>
+              <a:t>   Julien BAZZALI et Nicolas DROUET</a:t>
+            </a:r>
+          </a:p>
+        </p:txBody>
+      </p:sp>
+      <p:sp>
+        <p:nvSpPr>
+          <p:cNvPr id="14" name="TextBox 13"/>
+          <p:cNvSpPr txBox="1"/>
+          <p:nvPr/>
+        </p:nvSpPr>
+        <p:spPr>
+          <a:xfrm>
+            <a:off x="720000" y="9579670"/>
+            <a:ext cx="9252000" cy="432000"/>
+          </a:xfrm>
+          <a:prstGeom prst="rect">
+            <a:avLst/>
+          </a:prstGeom>
+          <a:noFill/>
+        </p:spPr>
+        <p:txBody>
+          <a:bodyPr wrap="square" anchor="t" lIns="0" rIns="0" tIns="0" bIns="0">
+            <a:spAutoFit/>
+          </a:bodyPr>
+          <a:lstStyle/>
+          <a:p>
+            <a:pPr algn="l">
               <a:lnSpc>
                 <a:spcPct val="100000"/>
               </a:lnSpc>
             </a:pPr>
             <a:r>
-              <a:rPr sz="3200" b="1">
+              <a:rPr sz="2400" b="1">
                 <a:solidFill>
                   <a:srgbClr val="00B4B4"/>
                 </a:solidFill>
                 <a:latin typeface="Barlow Condensed"/>
               </a:rPr>
-              <a:t>14h00</a:t>
-            </a:r>
-          </a:p>
-          <a:p>
-            <a:pPr algn="ctr">
-              <a:lnSpc>
-                <a:spcPct val="115000"/>
-              </a:lnSpc>
-            </a:pPr>
-            <a:r>
-              <a:rPr sz="2000" b="0">
-                <a:solidFill>
-                  <a:srgbClr val="00B4B4"/>
-                </a:solidFill>
-                <a:latin typeface="Barlow Condensed"/>
-              </a:rPr>
-              <a:t>→ 14h30</a:t>
-            </a:r>
-          </a:p>
-          <a:p>
-            <a:pPr algn="ctr">
-              <a:lnSpc>
-                <a:spcPct val="150000"/>
-              </a:lnSpc>
-            </a:pPr>
-            <a:r>
-              <a:rPr sz="1400" b="0">
-                <a:solidFill>
-                  <a:srgbClr val="E3E3E3"/>
-                </a:solidFill>
-                <a:latin typeface="Barlow"/>
-              </a:rPr>
-              <a:t>Rotation 1</a:t>
-            </a:r>
-          </a:p>
-        </p:txBody>
-      </p:sp>
-      <p:sp>
-        <p:nvSpPr>
-          <p:cNvPr id="14" name="Rectangle 13"/>
+              <a:t>5 ROTATIONS DE 30 MINUTES · 14h00 à 16h30</a:t>
+            </a:r>
+          </a:p>
+        </p:txBody>
+      </p:sp>
+      <p:sp>
+        <p:nvSpPr>
+          <p:cNvPr id="15" name="Rectangle 14"/>
           <p:cNvSpPr/>
           <p:nvPr/>
         </p:nvSpPr>
         <p:spPr>
           <a:xfrm>
-            <a:off x="2599200" y="9648000"/>
-            <a:ext cx="1735200" cy="1655999"/>
+            <a:off x="720000" y="10083669"/>
+            <a:ext cx="1735200" cy="1440000"/>
           </a:xfrm>
           <a:prstGeom prst="rect">
             <a:avLst/>
@@ -12065,14 +13092,14 @@
       </p:sp>
       <p:sp>
         <p:nvSpPr>
-          <p:cNvPr id="15" name="TextBox 14"/>
+          <p:cNvPr id="16" name="TextBox 15"/>
           <p:cNvSpPr txBox="1"/>
           <p:nvPr/>
         </p:nvSpPr>
         <p:spPr>
           <a:xfrm>
-            <a:off x="2599200" y="9900000"/>
-            <a:ext cx="1735200" cy="1224000"/>
+            <a:off x="720000" y="10299669"/>
+            <a:ext cx="1735200" cy="1152000"/>
           </a:xfrm>
           <a:prstGeom prst="rect">
             <a:avLst/>
@@ -12097,23 +13124,23 @@
                 </a:solidFill>
                 <a:latin typeface="Barlow Condensed"/>
               </a:rPr>
-              <a:t>14h30</a:t>
-            </a:r>
-          </a:p>
-          <a:p>
-            <a:pPr algn="ctr">
-              <a:lnSpc>
-                <a:spcPct val="115000"/>
-              </a:lnSpc>
-            </a:pPr>
-            <a:r>
-              <a:rPr sz="2000" b="0">
+              <a:t>14h00</a:t>
+            </a:r>
+          </a:p>
+          <a:p>
+            <a:pPr algn="ctr">
+              <a:lnSpc>
+                <a:spcPct val="120000"/>
+              </a:lnSpc>
+            </a:pPr>
+            <a:r>
+              <a:rPr sz="1800" b="0">
                 <a:solidFill>
                   <a:srgbClr val="00B4B4"/>
                 </a:solidFill>
                 <a:latin typeface="Barlow Condensed"/>
               </a:rPr>
-              <a:t>→ 15h00</a:t>
+              <a:t>jusqu’à 14h30</a:t>
             </a:r>
           </a:p>
           <a:p>
@@ -12129,21 +13156,21 @@
                 </a:solidFill>
                 <a:latin typeface="Barlow"/>
               </a:rPr>
-              <a:t>Rotation 2</a:t>
-            </a:r>
-          </a:p>
-        </p:txBody>
-      </p:sp>
-      <p:sp>
-        <p:nvSpPr>
-          <p:cNvPr id="16" name="Rectangle 15"/>
+              <a:t>Rotation 1</a:t>
+            </a:r>
+          </a:p>
+        </p:txBody>
+      </p:sp>
+      <p:sp>
+        <p:nvSpPr>
+          <p:cNvPr id="17" name="Rectangle 16"/>
           <p:cNvSpPr/>
           <p:nvPr/>
         </p:nvSpPr>
         <p:spPr>
           <a:xfrm>
-            <a:off x="4478400" y="9648000"/>
-            <a:ext cx="1735200" cy="1655999"/>
+            <a:off x="2599200" y="10083669"/>
+            <a:ext cx="1735200" cy="1440000"/>
           </a:xfrm>
           <a:prstGeom prst="rect">
             <a:avLst/>
@@ -12166,14 +13193,14 @@
       </p:sp>
       <p:sp>
         <p:nvSpPr>
-          <p:cNvPr id="17" name="TextBox 16"/>
+          <p:cNvPr id="18" name="TextBox 17"/>
           <p:cNvSpPr txBox="1"/>
           <p:nvPr/>
         </p:nvSpPr>
         <p:spPr>
           <a:xfrm>
-            <a:off x="4478400" y="9900000"/>
-            <a:ext cx="1735200" cy="1224000"/>
+            <a:off x="2599200" y="10299669"/>
+            <a:ext cx="1735200" cy="1152000"/>
           </a:xfrm>
           <a:prstGeom prst="rect">
             <a:avLst/>
@@ -12198,23 +13225,23 @@
                 </a:solidFill>
                 <a:latin typeface="Barlow Condensed"/>
               </a:rPr>
-              <a:t>15h00</a:t>
-            </a:r>
-          </a:p>
-          <a:p>
-            <a:pPr algn="ctr">
-              <a:lnSpc>
-                <a:spcPct val="115000"/>
-              </a:lnSpc>
-            </a:pPr>
-            <a:r>
-              <a:rPr sz="2000" b="0">
+              <a:t>14h30</a:t>
+            </a:r>
+          </a:p>
+          <a:p>
+            <a:pPr algn="ctr">
+              <a:lnSpc>
+                <a:spcPct val="120000"/>
+              </a:lnSpc>
+            </a:pPr>
+            <a:r>
+              <a:rPr sz="1800" b="0">
                 <a:solidFill>
                   <a:srgbClr val="00B4B4"/>
                 </a:solidFill>
                 <a:latin typeface="Barlow Condensed"/>
               </a:rPr>
-              <a:t>→ 15h30</a:t>
+              <a:t>jusqu’à 15h00</a:t>
             </a:r>
           </a:p>
           <a:p>
@@ -12230,21 +13257,21 @@
                 </a:solidFill>
                 <a:latin typeface="Barlow"/>
               </a:rPr>
-              <a:t>Rotation 3</a:t>
-            </a:r>
-          </a:p>
-        </p:txBody>
-      </p:sp>
-      <p:sp>
-        <p:nvSpPr>
-          <p:cNvPr id="18" name="Rectangle 17"/>
+              <a:t>Rotation 2</a:t>
+            </a:r>
+          </a:p>
+        </p:txBody>
+      </p:sp>
+      <p:sp>
+        <p:nvSpPr>
+          <p:cNvPr id="19" name="Rectangle 18"/>
           <p:cNvSpPr/>
           <p:nvPr/>
         </p:nvSpPr>
         <p:spPr>
           <a:xfrm>
-            <a:off x="6357600" y="9648000"/>
-            <a:ext cx="1735200" cy="1655999"/>
+            <a:off x="4478400" y="10083669"/>
+            <a:ext cx="1735200" cy="1440000"/>
           </a:xfrm>
           <a:prstGeom prst="rect">
             <a:avLst/>
@@ -12267,14 +13294,14 @@
       </p:sp>
       <p:sp>
         <p:nvSpPr>
-          <p:cNvPr id="19" name="TextBox 18"/>
+          <p:cNvPr id="20" name="TextBox 19"/>
           <p:cNvSpPr txBox="1"/>
           <p:nvPr/>
         </p:nvSpPr>
         <p:spPr>
           <a:xfrm>
-            <a:off x="6357600" y="9900000"/>
-            <a:ext cx="1735200" cy="1224000"/>
+            <a:off x="4478400" y="10299669"/>
+            <a:ext cx="1735200" cy="1152000"/>
           </a:xfrm>
           <a:prstGeom prst="rect">
             <a:avLst/>
@@ -12299,23 +13326,23 @@
                 </a:solidFill>
                 <a:latin typeface="Barlow Condensed"/>
               </a:rPr>
-              <a:t>15h30</a:t>
-            </a:r>
-          </a:p>
-          <a:p>
-            <a:pPr algn="ctr">
-              <a:lnSpc>
-                <a:spcPct val="115000"/>
-              </a:lnSpc>
-            </a:pPr>
-            <a:r>
-              <a:rPr sz="2000" b="0">
+              <a:t>15h00</a:t>
+            </a:r>
+          </a:p>
+          <a:p>
+            <a:pPr algn="ctr">
+              <a:lnSpc>
+                <a:spcPct val="120000"/>
+              </a:lnSpc>
+            </a:pPr>
+            <a:r>
+              <a:rPr sz="1800" b="0">
                 <a:solidFill>
                   <a:srgbClr val="00B4B4"/>
                 </a:solidFill>
                 <a:latin typeface="Barlow Condensed"/>
               </a:rPr>
-              <a:t>→ 16h00</a:t>
+              <a:t>jusqu’à 15h30</a:t>
             </a:r>
           </a:p>
           <a:p>
@@ -12331,21 +13358,21 @@
                 </a:solidFill>
                 <a:latin typeface="Barlow"/>
               </a:rPr>
-              <a:t>Rotation 4</a:t>
-            </a:r>
-          </a:p>
-        </p:txBody>
-      </p:sp>
-      <p:sp>
-        <p:nvSpPr>
-          <p:cNvPr id="20" name="Rectangle 19"/>
+              <a:t>Rotation 3</a:t>
+            </a:r>
+          </a:p>
+        </p:txBody>
+      </p:sp>
+      <p:sp>
+        <p:nvSpPr>
+          <p:cNvPr id="21" name="Rectangle 20"/>
           <p:cNvSpPr/>
           <p:nvPr/>
         </p:nvSpPr>
         <p:spPr>
           <a:xfrm>
-            <a:off x="8236800" y="9648000"/>
-            <a:ext cx="1735200" cy="1655999"/>
+            <a:off x="6357600" y="10083669"/>
+            <a:ext cx="1735200" cy="1440000"/>
           </a:xfrm>
           <a:prstGeom prst="rect">
             <a:avLst/>
@@ -12368,14 +13395,14 @@
       </p:sp>
       <p:sp>
         <p:nvSpPr>
-          <p:cNvPr id="21" name="TextBox 20"/>
+          <p:cNvPr id="22" name="TextBox 21"/>
           <p:cNvSpPr txBox="1"/>
           <p:nvPr/>
         </p:nvSpPr>
         <p:spPr>
           <a:xfrm>
-            <a:off x="8236800" y="9900000"/>
-            <a:ext cx="1735200" cy="1224000"/>
+            <a:off x="6357600" y="10299669"/>
+            <a:ext cx="1735200" cy="1152000"/>
           </a:xfrm>
           <a:prstGeom prst="rect">
             <a:avLst/>
@@ -12400,23 +13427,124 @@
                 </a:solidFill>
                 <a:latin typeface="Barlow Condensed"/>
               </a:rPr>
+              <a:t>15h30</a:t>
+            </a:r>
+          </a:p>
+          <a:p>
+            <a:pPr algn="ctr">
+              <a:lnSpc>
+                <a:spcPct val="120000"/>
+              </a:lnSpc>
+            </a:pPr>
+            <a:r>
+              <a:rPr sz="1800" b="0">
+                <a:solidFill>
+                  <a:srgbClr val="00B4B4"/>
+                </a:solidFill>
+                <a:latin typeface="Barlow Condensed"/>
+              </a:rPr>
+              <a:t>jusqu’à 16h00</a:t>
+            </a:r>
+          </a:p>
+          <a:p>
+            <a:pPr algn="ctr">
+              <a:lnSpc>
+                <a:spcPct val="150000"/>
+              </a:lnSpc>
+            </a:pPr>
+            <a:r>
+              <a:rPr sz="1400" b="0">
+                <a:solidFill>
+                  <a:srgbClr val="E3E3E3"/>
+                </a:solidFill>
+                <a:latin typeface="Barlow"/>
+              </a:rPr>
+              <a:t>Rotation 4</a:t>
+            </a:r>
+          </a:p>
+        </p:txBody>
+      </p:sp>
+      <p:sp>
+        <p:nvSpPr>
+          <p:cNvPr id="23" name="Rectangle 22"/>
+          <p:cNvSpPr/>
+          <p:nvPr/>
+        </p:nvSpPr>
+        <p:spPr>
+          <a:xfrm>
+            <a:off x="8236800" y="10083669"/>
+            <a:ext cx="1735200" cy="1440000"/>
+          </a:xfrm>
+          <a:prstGeom prst="rect">
+            <a:avLst/>
+          </a:prstGeom>
+          <a:solidFill>
+            <a:srgbClr val="2E2E50"/>
+          </a:solidFill>
+          <a:ln>
+            <a:noFill/>
+          </a:ln>
+          <a:effectLst/>
+        </p:spPr>
+        <p:txBody>
+          <a:bodyPr rtlCol="0" anchor="ctr"/>
+          <a:lstStyle/>
+          <a:p>
+            <a:pPr algn="ctr"/>
+          </a:p>
+        </p:txBody>
+      </p:sp>
+      <p:sp>
+        <p:nvSpPr>
+          <p:cNvPr id="24" name="TextBox 23"/>
+          <p:cNvSpPr txBox="1"/>
+          <p:nvPr/>
+        </p:nvSpPr>
+        <p:spPr>
+          <a:xfrm>
+            <a:off x="8236800" y="10299669"/>
+            <a:ext cx="1735200" cy="1152000"/>
+          </a:xfrm>
+          <a:prstGeom prst="rect">
+            <a:avLst/>
+          </a:prstGeom>
+          <a:noFill/>
+        </p:spPr>
+        <p:txBody>
+          <a:bodyPr wrap="square" anchor="t" lIns="0" rIns="0" tIns="0" bIns="0">
+            <a:spAutoFit/>
+          </a:bodyPr>
+          <a:lstStyle/>
+          <a:p>
+            <a:pPr algn="ctr">
+              <a:lnSpc>
+                <a:spcPct val="100000"/>
+              </a:lnSpc>
+            </a:pPr>
+            <a:r>
+              <a:rPr sz="3200" b="1">
+                <a:solidFill>
+                  <a:srgbClr val="00B4B4"/>
+                </a:solidFill>
+                <a:latin typeface="Barlow Condensed"/>
+              </a:rPr>
               <a:t>16h00</a:t>
             </a:r>
           </a:p>
           <a:p>
             <a:pPr algn="ctr">
               <a:lnSpc>
-                <a:spcPct val="115000"/>
-              </a:lnSpc>
-            </a:pPr>
-            <a:r>
-              <a:rPr sz="2000" b="0">
+                <a:spcPct val="120000"/>
+              </a:lnSpc>
+            </a:pPr>
+            <a:r>
+              <a:rPr sz="1800" b="0">
                 <a:solidFill>
                   <a:srgbClr val="00B4B4"/>
                 </a:solidFill>
                 <a:latin typeface="Barlow Condensed"/>
               </a:rPr>
-              <a:t>→ 16h30</a:t>
+              <a:t>jusqu’à 16h30</a:t>
             </a:r>
           </a:p>
           <a:p>
@@ -12439,7 +13567,7 @@
       </p:sp>
       <p:sp>
         <p:nvSpPr>
-          <p:cNvPr id="22" name="Rectangle 21"/>
+          <p:cNvPr id="25" name="Rectangle 24"/>
           <p:cNvSpPr/>
           <p:nvPr/>
         </p:nvSpPr>
@@ -12469,7 +13597,7 @@
       </p:sp>
       <p:sp>
         <p:nvSpPr>
-          <p:cNvPr id="23" name="Rectangle 22"/>
+          <p:cNvPr id="26" name="Rectangle 25"/>
           <p:cNvSpPr/>
           <p:nvPr/>
         </p:nvSpPr>
@@ -12499,7 +13627,7 @@
       </p:sp>
       <p:pic>
         <p:nvPicPr>
-          <p:cNvPr id="24" name="Picture 23" descr="testing-event-2026.png"/>
+          <p:cNvPr id="27" name="Picture 26" descr="testing-event-2026.png"/>
           <p:cNvPicPr>
             <a:picLocks noChangeAspect="1"/>
           </p:cNvPicPr>
@@ -12523,7 +13651,7 @@
       </p:pic>
       <p:sp>
         <p:nvSpPr>
-          <p:cNvPr id="25" name="TextBox 24"/>
+          <p:cNvPr id="28" name="TextBox 27"/>
           <p:cNvSpPr txBox="1"/>
           <p:nvPr/>
         </p:nvSpPr>
@@ -12919,8 +14047,8 @@
         </p:nvSpPr>
         <p:spPr>
           <a:xfrm>
-            <a:off x="720000" y="6336000"/>
-            <a:ext cx="9252000" cy="2304000"/>
+            <a:off x="720000" y="6263999"/>
+            <a:ext cx="9252000" cy="1069848"/>
           </a:xfrm>
           <a:prstGeom prst="rect">
             <a:avLst/>
@@ -12939,7 +14067,7 @@
               </a:lnSpc>
             </a:pPr>
             <a:r>
-              <a:rPr sz="3400" b="0">
+              <a:rPr sz="2600" b="0">
                 <a:solidFill>
                   <a:srgbClr val="E3E3E3"/>
                 </a:solidFill>
@@ -12958,8 +14086,8 @@
         </p:nvSpPr>
         <p:spPr>
           <a:xfrm>
-            <a:off x="720000" y="9072000"/>
-            <a:ext cx="9252000" cy="432000"/>
+            <a:off x="720000" y="7621847"/>
+            <a:ext cx="9252000" cy="396000"/>
           </a:xfrm>
           <a:prstGeom prst="rect">
             <a:avLst/>
@@ -12984,7 +14112,7 @@
                 </a:solidFill>
                 <a:latin typeface="Barlow Condensed"/>
               </a:rPr>
-              <a:t>5 ROTATIONS DE 30 MINUTES · 14h00 → 16h30</a:t>
+              <a:t>ANIMÉ PAR</a:t>
             </a:r>
           </a:p>
         </p:txBody>
@@ -12997,8 +14125,8 @@
         </p:nvSpPr>
         <p:spPr>
           <a:xfrm>
-            <a:off x="720000" y="9648000"/>
-            <a:ext cx="1735200" cy="1655999"/>
+            <a:off x="720000" y="8053847"/>
+            <a:ext cx="9252000" cy="1201823"/>
           </a:xfrm>
           <a:prstGeom prst="rect">
             <a:avLst/>
@@ -13027,8 +14155,8 @@
         </p:nvSpPr>
         <p:spPr>
           <a:xfrm>
-            <a:off x="720000" y="9900000"/>
-            <a:ext cx="1735200" cy="1224000"/>
+            <a:off x="936000" y="8233847"/>
+            <a:ext cx="8820000" cy="841823"/>
           </a:xfrm>
           <a:prstGeom prst="rect">
             <a:avLst/>
@@ -13041,65 +14169,106 @@
           </a:bodyPr>
           <a:lstStyle/>
           <a:p>
-            <a:pPr algn="ctr">
+            <a:pPr algn="l">
+              <a:lnSpc>
+                <a:spcPct val="120000"/>
+              </a:lnSpc>
+            </a:pPr>
+            <a:r>
+              <a:rPr sz="1800" b="1">
+                <a:solidFill>
+                  <a:srgbClr val="00B4B4"/>
+                </a:solidFill>
+                <a:latin typeface="Barlow Condensed"/>
+              </a:rPr>
+              <a:t>TFC</a:t>
+            </a:r>
+            <a:r>
+              <a:rPr sz="2400" b="0">
+                <a:solidFill>
+                  <a:srgbClr val="FFFFFF"/>
+                </a:solidFill>
+                <a:latin typeface="Barlow"/>
+              </a:rPr>
+              <a:t>   Vincent TREVARIN</a:t>
+            </a:r>
+          </a:p>
+          <a:p>
+            <a:pPr algn="l">
+              <a:lnSpc>
+                <a:spcPct val="120000"/>
+              </a:lnSpc>
+            </a:pPr>
+            <a:r>
+              <a:rPr sz="1800" b="1">
+                <a:solidFill>
+                  <a:srgbClr val="00B4B4"/>
+                </a:solidFill>
+                <a:latin typeface="Barlow Condensed"/>
+              </a:rPr>
+              <a:t>DF Dommages</a:t>
+            </a:r>
+            <a:r>
+              <a:rPr sz="2400" b="0">
+                <a:solidFill>
+                  <a:srgbClr val="FFFFFF"/>
+                </a:solidFill>
+                <a:latin typeface="Barlow"/>
+              </a:rPr>
+              <a:t>   Aurore CAPLAN</a:t>
+            </a:r>
+          </a:p>
+        </p:txBody>
+      </p:sp>
+      <p:sp>
+        <p:nvSpPr>
+          <p:cNvPr id="14" name="TextBox 13"/>
+          <p:cNvSpPr txBox="1"/>
+          <p:nvPr/>
+        </p:nvSpPr>
+        <p:spPr>
+          <a:xfrm>
+            <a:off x="720000" y="9579670"/>
+            <a:ext cx="9252000" cy="432000"/>
+          </a:xfrm>
+          <a:prstGeom prst="rect">
+            <a:avLst/>
+          </a:prstGeom>
+          <a:noFill/>
+        </p:spPr>
+        <p:txBody>
+          <a:bodyPr wrap="square" anchor="t" lIns="0" rIns="0" tIns="0" bIns="0">
+            <a:spAutoFit/>
+          </a:bodyPr>
+          <a:lstStyle/>
+          <a:p>
+            <a:pPr algn="l">
               <a:lnSpc>
                 <a:spcPct val="100000"/>
               </a:lnSpc>
             </a:pPr>
             <a:r>
-              <a:rPr sz="3200" b="1">
+              <a:rPr sz="2400" b="1">
                 <a:solidFill>
                   <a:srgbClr val="00B4B4"/>
                 </a:solidFill>
                 <a:latin typeface="Barlow Condensed"/>
               </a:rPr>
-              <a:t>14h00</a:t>
-            </a:r>
-          </a:p>
-          <a:p>
-            <a:pPr algn="ctr">
-              <a:lnSpc>
-                <a:spcPct val="115000"/>
-              </a:lnSpc>
-            </a:pPr>
-            <a:r>
-              <a:rPr sz="2000" b="0">
-                <a:solidFill>
-                  <a:srgbClr val="00B4B4"/>
-                </a:solidFill>
-                <a:latin typeface="Barlow Condensed"/>
-              </a:rPr>
-              <a:t>→ 14h30</a:t>
-            </a:r>
-          </a:p>
-          <a:p>
-            <a:pPr algn="ctr">
-              <a:lnSpc>
-                <a:spcPct val="150000"/>
-              </a:lnSpc>
-            </a:pPr>
-            <a:r>
-              <a:rPr sz="1400" b="0">
-                <a:solidFill>
-                  <a:srgbClr val="E3E3E3"/>
-                </a:solidFill>
-                <a:latin typeface="Barlow"/>
-              </a:rPr>
-              <a:t>Rotation 1</a:t>
-            </a:r>
-          </a:p>
-        </p:txBody>
-      </p:sp>
-      <p:sp>
-        <p:nvSpPr>
-          <p:cNvPr id="14" name="Rectangle 13"/>
+              <a:t>5 ROTATIONS DE 30 MINUTES · 14h00 à 16h30</a:t>
+            </a:r>
+          </a:p>
+        </p:txBody>
+      </p:sp>
+      <p:sp>
+        <p:nvSpPr>
+          <p:cNvPr id="15" name="Rectangle 14"/>
           <p:cNvSpPr/>
           <p:nvPr/>
         </p:nvSpPr>
         <p:spPr>
           <a:xfrm>
-            <a:off x="2599200" y="9648000"/>
-            <a:ext cx="1735200" cy="1655999"/>
+            <a:off x="720000" y="10083669"/>
+            <a:ext cx="1735200" cy="1440000"/>
           </a:xfrm>
           <a:prstGeom prst="rect">
             <a:avLst/>
@@ -13122,14 +14291,14 @@
       </p:sp>
       <p:sp>
         <p:nvSpPr>
-          <p:cNvPr id="15" name="TextBox 14"/>
+          <p:cNvPr id="16" name="TextBox 15"/>
           <p:cNvSpPr txBox="1"/>
           <p:nvPr/>
         </p:nvSpPr>
         <p:spPr>
           <a:xfrm>
-            <a:off x="2599200" y="9900000"/>
-            <a:ext cx="1735200" cy="1224000"/>
+            <a:off x="720000" y="10299669"/>
+            <a:ext cx="1735200" cy="1152000"/>
           </a:xfrm>
           <a:prstGeom prst="rect">
             <a:avLst/>
@@ -13154,23 +14323,23 @@
                 </a:solidFill>
                 <a:latin typeface="Barlow Condensed"/>
               </a:rPr>
-              <a:t>14h30</a:t>
-            </a:r>
-          </a:p>
-          <a:p>
-            <a:pPr algn="ctr">
-              <a:lnSpc>
-                <a:spcPct val="115000"/>
-              </a:lnSpc>
-            </a:pPr>
-            <a:r>
-              <a:rPr sz="2000" b="0">
+              <a:t>14h00</a:t>
+            </a:r>
+          </a:p>
+          <a:p>
+            <a:pPr algn="ctr">
+              <a:lnSpc>
+                <a:spcPct val="120000"/>
+              </a:lnSpc>
+            </a:pPr>
+            <a:r>
+              <a:rPr sz="1800" b="0">
                 <a:solidFill>
                   <a:srgbClr val="00B4B4"/>
                 </a:solidFill>
                 <a:latin typeface="Barlow Condensed"/>
               </a:rPr>
-              <a:t>→ 15h00</a:t>
+              <a:t>jusqu’à 14h30</a:t>
             </a:r>
           </a:p>
           <a:p>
@@ -13186,21 +14355,21 @@
                 </a:solidFill>
                 <a:latin typeface="Barlow"/>
               </a:rPr>
-              <a:t>Rotation 2</a:t>
-            </a:r>
-          </a:p>
-        </p:txBody>
-      </p:sp>
-      <p:sp>
-        <p:nvSpPr>
-          <p:cNvPr id="16" name="Rectangle 15"/>
+              <a:t>Rotation 1</a:t>
+            </a:r>
+          </a:p>
+        </p:txBody>
+      </p:sp>
+      <p:sp>
+        <p:nvSpPr>
+          <p:cNvPr id="17" name="Rectangle 16"/>
           <p:cNvSpPr/>
           <p:nvPr/>
         </p:nvSpPr>
         <p:spPr>
           <a:xfrm>
-            <a:off x="4478400" y="9648000"/>
-            <a:ext cx="1735200" cy="1655999"/>
+            <a:off x="2599200" y="10083669"/>
+            <a:ext cx="1735200" cy="1440000"/>
           </a:xfrm>
           <a:prstGeom prst="rect">
             <a:avLst/>
@@ -13223,14 +14392,14 @@
       </p:sp>
       <p:sp>
         <p:nvSpPr>
-          <p:cNvPr id="17" name="TextBox 16"/>
+          <p:cNvPr id="18" name="TextBox 17"/>
           <p:cNvSpPr txBox="1"/>
           <p:nvPr/>
         </p:nvSpPr>
         <p:spPr>
           <a:xfrm>
-            <a:off x="4478400" y="9900000"/>
-            <a:ext cx="1735200" cy="1224000"/>
+            <a:off x="2599200" y="10299669"/>
+            <a:ext cx="1735200" cy="1152000"/>
           </a:xfrm>
           <a:prstGeom prst="rect">
             <a:avLst/>
@@ -13255,23 +14424,23 @@
                 </a:solidFill>
                 <a:latin typeface="Barlow Condensed"/>
               </a:rPr>
-              <a:t>15h00</a:t>
-            </a:r>
-          </a:p>
-          <a:p>
-            <a:pPr algn="ctr">
-              <a:lnSpc>
-                <a:spcPct val="115000"/>
-              </a:lnSpc>
-            </a:pPr>
-            <a:r>
-              <a:rPr sz="2000" b="0">
+              <a:t>14h30</a:t>
+            </a:r>
+          </a:p>
+          <a:p>
+            <a:pPr algn="ctr">
+              <a:lnSpc>
+                <a:spcPct val="120000"/>
+              </a:lnSpc>
+            </a:pPr>
+            <a:r>
+              <a:rPr sz="1800" b="0">
                 <a:solidFill>
                   <a:srgbClr val="00B4B4"/>
                 </a:solidFill>
                 <a:latin typeface="Barlow Condensed"/>
               </a:rPr>
-              <a:t>→ 15h30</a:t>
+              <a:t>jusqu’à 15h00</a:t>
             </a:r>
           </a:p>
           <a:p>
@@ -13287,21 +14456,21 @@
                 </a:solidFill>
                 <a:latin typeface="Barlow"/>
               </a:rPr>
-              <a:t>Rotation 3</a:t>
-            </a:r>
-          </a:p>
-        </p:txBody>
-      </p:sp>
-      <p:sp>
-        <p:nvSpPr>
-          <p:cNvPr id="18" name="Rectangle 17"/>
+              <a:t>Rotation 2</a:t>
+            </a:r>
+          </a:p>
+        </p:txBody>
+      </p:sp>
+      <p:sp>
+        <p:nvSpPr>
+          <p:cNvPr id="19" name="Rectangle 18"/>
           <p:cNvSpPr/>
           <p:nvPr/>
         </p:nvSpPr>
         <p:spPr>
           <a:xfrm>
-            <a:off x="6357600" y="9648000"/>
-            <a:ext cx="1735200" cy="1655999"/>
+            <a:off x="4478400" y="10083669"/>
+            <a:ext cx="1735200" cy="1440000"/>
           </a:xfrm>
           <a:prstGeom prst="rect">
             <a:avLst/>
@@ -13324,14 +14493,14 @@
       </p:sp>
       <p:sp>
         <p:nvSpPr>
-          <p:cNvPr id="19" name="TextBox 18"/>
+          <p:cNvPr id="20" name="TextBox 19"/>
           <p:cNvSpPr txBox="1"/>
           <p:nvPr/>
         </p:nvSpPr>
         <p:spPr>
           <a:xfrm>
-            <a:off x="6357600" y="9900000"/>
-            <a:ext cx="1735200" cy="1224000"/>
+            <a:off x="4478400" y="10299669"/>
+            <a:ext cx="1735200" cy="1152000"/>
           </a:xfrm>
           <a:prstGeom prst="rect">
             <a:avLst/>
@@ -13356,23 +14525,23 @@
                 </a:solidFill>
                 <a:latin typeface="Barlow Condensed"/>
               </a:rPr>
-              <a:t>15h30</a:t>
-            </a:r>
-          </a:p>
-          <a:p>
-            <a:pPr algn="ctr">
-              <a:lnSpc>
-                <a:spcPct val="115000"/>
-              </a:lnSpc>
-            </a:pPr>
-            <a:r>
-              <a:rPr sz="2000" b="0">
+              <a:t>15h00</a:t>
+            </a:r>
+          </a:p>
+          <a:p>
+            <a:pPr algn="ctr">
+              <a:lnSpc>
+                <a:spcPct val="120000"/>
+              </a:lnSpc>
+            </a:pPr>
+            <a:r>
+              <a:rPr sz="1800" b="0">
                 <a:solidFill>
                   <a:srgbClr val="00B4B4"/>
                 </a:solidFill>
                 <a:latin typeface="Barlow Condensed"/>
               </a:rPr>
-              <a:t>→ 16h00</a:t>
+              <a:t>jusqu’à 15h30</a:t>
             </a:r>
           </a:p>
           <a:p>
@@ -13388,21 +14557,21 @@
                 </a:solidFill>
                 <a:latin typeface="Barlow"/>
               </a:rPr>
-              <a:t>Rotation 4</a:t>
-            </a:r>
-          </a:p>
-        </p:txBody>
-      </p:sp>
-      <p:sp>
-        <p:nvSpPr>
-          <p:cNvPr id="20" name="Rectangle 19"/>
+              <a:t>Rotation 3</a:t>
+            </a:r>
+          </a:p>
+        </p:txBody>
+      </p:sp>
+      <p:sp>
+        <p:nvSpPr>
+          <p:cNvPr id="21" name="Rectangle 20"/>
           <p:cNvSpPr/>
           <p:nvPr/>
         </p:nvSpPr>
         <p:spPr>
           <a:xfrm>
-            <a:off x="8236800" y="9648000"/>
-            <a:ext cx="1735200" cy="1655999"/>
+            <a:off x="6357600" y="10083669"/>
+            <a:ext cx="1735200" cy="1440000"/>
           </a:xfrm>
           <a:prstGeom prst="rect">
             <a:avLst/>
@@ -13425,14 +14594,14 @@
       </p:sp>
       <p:sp>
         <p:nvSpPr>
-          <p:cNvPr id="21" name="TextBox 20"/>
+          <p:cNvPr id="22" name="TextBox 21"/>
           <p:cNvSpPr txBox="1"/>
           <p:nvPr/>
         </p:nvSpPr>
         <p:spPr>
           <a:xfrm>
-            <a:off x="8236800" y="9900000"/>
-            <a:ext cx="1735200" cy="1224000"/>
+            <a:off x="6357600" y="10299669"/>
+            <a:ext cx="1735200" cy="1152000"/>
           </a:xfrm>
           <a:prstGeom prst="rect">
             <a:avLst/>
@@ -13457,23 +14626,124 @@
                 </a:solidFill>
                 <a:latin typeface="Barlow Condensed"/>
               </a:rPr>
+              <a:t>15h30</a:t>
+            </a:r>
+          </a:p>
+          <a:p>
+            <a:pPr algn="ctr">
+              <a:lnSpc>
+                <a:spcPct val="120000"/>
+              </a:lnSpc>
+            </a:pPr>
+            <a:r>
+              <a:rPr sz="1800" b="0">
+                <a:solidFill>
+                  <a:srgbClr val="00B4B4"/>
+                </a:solidFill>
+                <a:latin typeface="Barlow Condensed"/>
+              </a:rPr>
+              <a:t>jusqu’à 16h00</a:t>
+            </a:r>
+          </a:p>
+          <a:p>
+            <a:pPr algn="ctr">
+              <a:lnSpc>
+                <a:spcPct val="150000"/>
+              </a:lnSpc>
+            </a:pPr>
+            <a:r>
+              <a:rPr sz="1400" b="0">
+                <a:solidFill>
+                  <a:srgbClr val="E3E3E3"/>
+                </a:solidFill>
+                <a:latin typeface="Barlow"/>
+              </a:rPr>
+              <a:t>Rotation 4</a:t>
+            </a:r>
+          </a:p>
+        </p:txBody>
+      </p:sp>
+      <p:sp>
+        <p:nvSpPr>
+          <p:cNvPr id="23" name="Rectangle 22"/>
+          <p:cNvSpPr/>
+          <p:nvPr/>
+        </p:nvSpPr>
+        <p:spPr>
+          <a:xfrm>
+            <a:off x="8236800" y="10083669"/>
+            <a:ext cx="1735200" cy="1440000"/>
+          </a:xfrm>
+          <a:prstGeom prst="rect">
+            <a:avLst/>
+          </a:prstGeom>
+          <a:solidFill>
+            <a:srgbClr val="2E2E50"/>
+          </a:solidFill>
+          <a:ln>
+            <a:noFill/>
+          </a:ln>
+          <a:effectLst/>
+        </p:spPr>
+        <p:txBody>
+          <a:bodyPr rtlCol="0" anchor="ctr"/>
+          <a:lstStyle/>
+          <a:p>
+            <a:pPr algn="ctr"/>
+          </a:p>
+        </p:txBody>
+      </p:sp>
+      <p:sp>
+        <p:nvSpPr>
+          <p:cNvPr id="24" name="TextBox 23"/>
+          <p:cNvSpPr txBox="1"/>
+          <p:nvPr/>
+        </p:nvSpPr>
+        <p:spPr>
+          <a:xfrm>
+            <a:off x="8236800" y="10299669"/>
+            <a:ext cx="1735200" cy="1152000"/>
+          </a:xfrm>
+          <a:prstGeom prst="rect">
+            <a:avLst/>
+          </a:prstGeom>
+          <a:noFill/>
+        </p:spPr>
+        <p:txBody>
+          <a:bodyPr wrap="square" anchor="t" lIns="0" rIns="0" tIns="0" bIns="0">
+            <a:spAutoFit/>
+          </a:bodyPr>
+          <a:lstStyle/>
+          <a:p>
+            <a:pPr algn="ctr">
+              <a:lnSpc>
+                <a:spcPct val="100000"/>
+              </a:lnSpc>
+            </a:pPr>
+            <a:r>
+              <a:rPr sz="3200" b="1">
+                <a:solidFill>
+                  <a:srgbClr val="00B4B4"/>
+                </a:solidFill>
+                <a:latin typeface="Barlow Condensed"/>
+              </a:rPr>
               <a:t>16h00</a:t>
             </a:r>
           </a:p>
           <a:p>
             <a:pPr algn="ctr">
               <a:lnSpc>
-                <a:spcPct val="115000"/>
-              </a:lnSpc>
-            </a:pPr>
-            <a:r>
-              <a:rPr sz="2000" b="0">
+                <a:spcPct val="120000"/>
+              </a:lnSpc>
+            </a:pPr>
+            <a:r>
+              <a:rPr sz="1800" b="0">
                 <a:solidFill>
                   <a:srgbClr val="00B4B4"/>
                 </a:solidFill>
                 <a:latin typeface="Barlow Condensed"/>
               </a:rPr>
-              <a:t>→ 16h30</a:t>
+              <a:t>jusqu’à 16h30</a:t>
             </a:r>
           </a:p>
           <a:p>
@@ -13496,7 +14766,7 @@
       </p:sp>
       <p:sp>
         <p:nvSpPr>
-          <p:cNvPr id="22" name="Rectangle 21"/>
+          <p:cNvPr id="25" name="Rectangle 24"/>
           <p:cNvSpPr/>
           <p:nvPr/>
         </p:nvSpPr>
@@ -13526,7 +14796,7 @@
       </p:sp>
       <p:sp>
         <p:nvSpPr>
-          <p:cNvPr id="23" name="Rectangle 22"/>
+          <p:cNvPr id="26" name="Rectangle 25"/>
           <p:cNvSpPr/>
           <p:nvPr/>
         </p:nvSpPr>
@@ -13556,7 +14826,7 @@
       </p:sp>
       <p:pic>
         <p:nvPicPr>
-          <p:cNvPr id="24" name="Picture 23" descr="testing-event-2026.png"/>
+          <p:cNvPr id="27" name="Picture 26" descr="testing-event-2026.png"/>
           <p:cNvPicPr>
             <a:picLocks noChangeAspect="1"/>
           </p:cNvPicPr>
@@ -13580,7 +14850,7 @@
       </p:pic>
       <p:sp>
         <p:nvSpPr>
-          <p:cNvPr id="25" name="TextBox 24"/>
+          <p:cNvPr id="28" name="TextBox 27"/>
           <p:cNvSpPr txBox="1"/>
           <p:nvPr/>
         </p:nvSpPr>
